--- a/Présentation/TOKI.pptx
+++ b/Présentation/TOKI.pptx
@@ -9,6 +9,10 @@
     <p:sldId id="257" r:id="rId3"/>
     <p:sldId id="258" r:id="rId4"/>
     <p:sldId id="259" r:id="rId5"/>
+    <p:sldId id="260" r:id="rId6"/>
+    <p:sldId id="264" r:id="rId7"/>
+    <p:sldId id="261" r:id="rId8"/>
+    <p:sldId id="262" r:id="rId9"/>
   </p:sldIdLst>
   <p:sldSz cx="12192000" cy="6858000"/>
   <p:notesSz cx="6858000" cy="9144000"/>
@@ -107,6 +111,11 @@
       </a:defRPr>
     </a:lvl9pPr>
   </p:defaultTextStyle>
+  <p:extLst>
+    <p:ext uri="{EFAFB233-063F-42B5-8137-9DF3F51BA10A}">
+      <p15:sldGuideLst xmlns:p15="http://schemas.microsoft.com/office/powerpoint/2012/main"/>
+    </p:ext>
+  </p:extLst>
 </p:presentation>
 </file>
 
@@ -4338,6 +4347,42 @@
           </a:p>
         </p:txBody>
       </p:sp>
+      <p:pic>
+        <p:nvPicPr>
+          <p:cNvPr id="4" name="Image 3">
+            <a:extLst>
+              <a:ext uri="{FF2B5EF4-FFF2-40B4-BE49-F238E27FC236}">
+                <a16:creationId xmlns:a16="http://schemas.microsoft.com/office/drawing/2014/main" id="{15B911E3-E2BF-798A-CC1C-D7B8F4FD5711}"/>
+              </a:ext>
+            </a:extLst>
+          </p:cNvPr>
+          <p:cNvPicPr>
+            <a:picLocks noChangeAspect="1"/>
+          </p:cNvPicPr>
+          <p:nvPr/>
+        </p:nvPicPr>
+        <p:blipFill>
+          <a:blip r:embed="rId2">
+            <a:extLst>
+              <a:ext uri="{28A0092B-C50C-407E-A947-70E740481C1C}">
+                <a14:useLocalDpi xmlns:a14="http://schemas.microsoft.com/office/drawing/2010/main" val="0"/>
+              </a:ext>
+            </a:extLst>
+          </a:blip>
+          <a:stretch>
+            <a:fillRect/>
+          </a:stretch>
+        </p:blipFill>
+        <p:spPr>
+          <a:xfrm>
+            <a:off x="643573" y="2402602"/>
+            <a:ext cx="3515557" cy="3206088"/>
+          </a:xfrm>
+          <a:prstGeom prst="rect">
+            <a:avLst/>
+          </a:prstGeom>
+        </p:spPr>
+      </p:pic>
     </p:spTree>
     <p:extLst>
       <p:ext uri="{BB962C8B-B14F-4D97-AF65-F5344CB8AC3E}">
@@ -4767,8 +4812,8 @@
         </p:blipFill>
         <p:spPr>
           <a:xfrm>
-            <a:off x="8878529" y="728435"/>
-            <a:ext cx="2703151" cy="2465817"/>
+            <a:off x="9843860" y="122751"/>
+            <a:ext cx="1859477" cy="1696217"/>
           </a:xfrm>
           <a:prstGeom prst="rect">
             <a:avLst/>
@@ -4869,8 +4914,8 @@
         </p:nvSpPr>
         <p:spPr>
           <a:xfrm>
-            <a:off x="610320" y="2084686"/>
-            <a:ext cx="1328954" cy="369332"/>
+            <a:off x="1500103" y="2295178"/>
+            <a:ext cx="2052037" cy="923330"/>
           </a:xfrm>
           <a:prstGeom prst="rect">
             <a:avLst/>
@@ -4884,10 +4929,40 @@
           <a:lstStyle/>
           <a:p>
             <a:r>
+              <a:rPr lang="fr-FR" b="1" u="sng" dirty="0">
+                <a:latin typeface="Aptos Display" panose="020B0004020202020204" pitchFamily="34" charset="0"/>
+              </a:rPr>
+              <a:t>Connexion</a:t>
+            </a:r>
+            <a:r>
+              <a:rPr lang="fr-FR" u="sng" dirty="0">
+                <a:latin typeface="Aptos Display" panose="020B0004020202020204" pitchFamily="34" charset="0"/>
+              </a:rPr>
+              <a:t> :</a:t>
+            </a:r>
+          </a:p>
+          <a:p>
+            <a:pPr marL="285750" indent="-285750">
+              <a:buFont typeface="Arial" panose="020B0604020202020204" pitchFamily="34" charset="0"/>
+              <a:buChar char="•"/>
+            </a:pPr>
+            <a:r>
               <a:rPr lang="fr-FR" dirty="0">
                 <a:latin typeface="Aptos Display" panose="020B0004020202020204" pitchFamily="34" charset="0"/>
               </a:rPr>
-              <a:t>Connexion : </a:t>
+              <a:t>Nom d’utilisation</a:t>
+            </a:r>
+          </a:p>
+          <a:p>
+            <a:pPr marL="285750" indent="-285750">
+              <a:buFont typeface="Arial" panose="020B0604020202020204" pitchFamily="34" charset="0"/>
+              <a:buChar char="•"/>
+            </a:pPr>
+            <a:r>
+              <a:rPr lang="fr-FR" dirty="0">
+                <a:latin typeface="Aptos Display" panose="020B0004020202020204" pitchFamily="34" charset="0"/>
+              </a:rPr>
+              <a:t>Mot de passe </a:t>
             </a:r>
           </a:p>
         </p:txBody>
@@ -4914,8 +4989,124 @@
         </p:blipFill>
         <p:spPr>
           <a:xfrm>
-            <a:off x="6723727" y="3429000"/>
+            <a:off x="952192" y="3429000"/>
             <a:ext cx="3147860" cy="3215949"/>
+          </a:xfrm>
+          <a:prstGeom prst="rect">
+            <a:avLst/>
+          </a:prstGeom>
+        </p:spPr>
+      </p:pic>
+      <p:sp>
+        <p:nvSpPr>
+          <p:cNvPr id="7" name="ZoneTexte 6">
+            <a:extLst>
+              <a:ext uri="{FF2B5EF4-FFF2-40B4-BE49-F238E27FC236}">
+                <a16:creationId xmlns:a16="http://schemas.microsoft.com/office/drawing/2014/main" id="{C70410CA-2EDE-6F52-9FE0-A43D0E398AEE}"/>
+              </a:ext>
+            </a:extLst>
+          </p:cNvPr>
+          <p:cNvSpPr txBox="1"/>
+          <p:nvPr/>
+        </p:nvSpPr>
+        <p:spPr>
+          <a:xfrm>
+            <a:off x="5157739" y="3218508"/>
+            <a:ext cx="2703151" cy="2585323"/>
+          </a:xfrm>
+          <a:prstGeom prst="rect">
+            <a:avLst/>
+          </a:prstGeom>
+          <a:noFill/>
+        </p:spPr>
+        <p:txBody>
+          <a:bodyPr wrap="square" rtlCol="0">
+            <a:spAutoFit/>
+          </a:bodyPr>
+          <a:lstStyle/>
+          <a:p>
+            <a:r>
+              <a:rPr lang="fr-FR" b="1" u="sng" dirty="0">
+                <a:latin typeface="Aptos Display" panose="020B0004020202020204" pitchFamily="34" charset="0"/>
+              </a:rPr>
+              <a:t>Inscription</a:t>
+            </a:r>
+            <a:r>
+              <a:rPr lang="fr-FR" u="sng" dirty="0">
+                <a:latin typeface="Aptos Display" panose="020B0004020202020204" pitchFamily="34" charset="0"/>
+              </a:rPr>
+              <a:t> :</a:t>
+            </a:r>
+          </a:p>
+          <a:p>
+            <a:r>
+              <a:rPr lang="fr-FR" dirty="0">
+                <a:latin typeface="Aptos" panose="020B0004020202020204" pitchFamily="34" charset="0"/>
+              </a:rPr>
+              <a:t>Restriction sur les mots de passe : </a:t>
+            </a:r>
+          </a:p>
+          <a:p>
+            <a:r>
+              <a:rPr lang="fr-FR" dirty="0">
+                <a:latin typeface="Aptos" panose="020B0004020202020204" pitchFamily="34" charset="0"/>
+              </a:rPr>
+              <a:t>• 8 caractères minimum • Une majuscule </a:t>
+            </a:r>
+          </a:p>
+          <a:p>
+            <a:r>
+              <a:rPr lang="fr-FR" dirty="0">
+                <a:latin typeface="Aptos" panose="020B0004020202020204" pitchFamily="34" charset="0"/>
+              </a:rPr>
+              <a:t>• Une minuscule </a:t>
+            </a:r>
+          </a:p>
+          <a:p>
+            <a:r>
+              <a:rPr lang="fr-FR" dirty="0">
+                <a:latin typeface="Aptos" panose="020B0004020202020204" pitchFamily="34" charset="0"/>
+              </a:rPr>
+              <a:t>• Un chiffre </a:t>
+            </a:r>
+          </a:p>
+          <a:p>
+            <a:r>
+              <a:rPr lang="fr-FR" dirty="0">
+                <a:latin typeface="Aptos" panose="020B0004020202020204" pitchFamily="34" charset="0"/>
+              </a:rPr>
+              <a:t>• Un caractère spécial (@, ?, %, !, …)</a:t>
+            </a:r>
+            <a:endParaRPr lang="fr-FR" u="sng" dirty="0">
+              <a:latin typeface="Aptos" panose="020B0004020202020204" pitchFamily="34" charset="0"/>
+            </a:endParaRPr>
+          </a:p>
+        </p:txBody>
+      </p:sp>
+      <p:pic>
+        <p:nvPicPr>
+          <p:cNvPr id="8" name="Image 7">
+            <a:extLst>
+              <a:ext uri="{FF2B5EF4-FFF2-40B4-BE49-F238E27FC236}">
+                <a16:creationId xmlns:a16="http://schemas.microsoft.com/office/drawing/2014/main" id="{7044476A-A6F8-600B-FCD7-1F2F0AB475CC}"/>
+              </a:ext>
+            </a:extLst>
+          </p:cNvPr>
+          <p:cNvPicPr>
+            <a:picLocks noChangeAspect="1"/>
+          </p:cNvPicPr>
+          <p:nvPr/>
+        </p:nvPicPr>
+        <p:blipFill>
+          <a:blip r:embed="rId4"/>
+          <a:stretch>
+            <a:fillRect/>
+          </a:stretch>
+        </p:blipFill>
+        <p:spPr>
+          <a:xfrm>
+            <a:off x="8162379" y="1897624"/>
+            <a:ext cx="3321696" cy="4720304"/>
           </a:xfrm>
           <a:prstGeom prst="rect">
             <a:avLst/>
@@ -4926,6 +5117,669 @@
     <p:extLst>
       <p:ext uri="{BB962C8B-B14F-4D97-AF65-F5344CB8AC3E}">
         <p14:creationId xmlns:p14="http://schemas.microsoft.com/office/powerpoint/2010/main" val="243014035"/>
+      </p:ext>
+    </p:extLst>
+  </p:cSld>
+  <p:clrMapOvr>
+    <a:masterClrMapping/>
+  </p:clrMapOvr>
+</p:sld>
+</file>
+
+<file path=ppt/slides/slide5.xml><?xml version="1.0" encoding="utf-8"?>
+<p:sld xmlns:a="http://schemas.openxmlformats.org/drawingml/2006/main" xmlns:r="http://schemas.openxmlformats.org/officeDocument/2006/relationships" xmlns:p="http://schemas.openxmlformats.org/presentationml/2006/main">
+  <p:cSld>
+    <p:spTree>
+      <p:nvGrpSpPr>
+        <p:cNvPr id="1" name="">
+          <a:extLst>
+            <a:ext uri="{FF2B5EF4-FFF2-40B4-BE49-F238E27FC236}">
+              <a16:creationId xmlns:a16="http://schemas.microsoft.com/office/drawing/2014/main" id="{196C41EE-C7C0-2D7F-4169-4BF1C99E820B}"/>
+            </a:ext>
+          </a:extLst>
+        </p:cNvPr>
+        <p:cNvGrpSpPr/>
+        <p:nvPr/>
+      </p:nvGrpSpPr>
+      <p:grpSpPr>
+        <a:xfrm>
+          <a:off x="0" y="0"/>
+          <a:ext cx="0" cy="0"/>
+          <a:chOff x="0" y="0"/>
+          <a:chExt cx="0" cy="0"/>
+        </a:xfrm>
+      </p:grpSpPr>
+      <p:sp>
+        <p:nvSpPr>
+          <p:cNvPr id="3" name="ZoneTexte 2">
+            <a:extLst>
+              <a:ext uri="{FF2B5EF4-FFF2-40B4-BE49-F238E27FC236}">
+                <a16:creationId xmlns:a16="http://schemas.microsoft.com/office/drawing/2014/main" id="{DCAA6DC6-D9B6-7F94-CCEE-1D865566B8AC}"/>
+              </a:ext>
+            </a:extLst>
+          </p:cNvPr>
+          <p:cNvSpPr txBox="1"/>
+          <p:nvPr/>
+        </p:nvSpPr>
+        <p:spPr>
+          <a:xfrm>
+            <a:off x="4018935" y="347554"/>
+            <a:ext cx="4154129" cy="584775"/>
+          </a:xfrm>
+          <a:prstGeom prst="rect">
+            <a:avLst/>
+          </a:prstGeom>
+          <a:noFill/>
+        </p:spPr>
+        <p:txBody>
+          <a:bodyPr wrap="square">
+            <a:spAutoFit/>
+          </a:bodyPr>
+          <a:lstStyle/>
+          <a:p>
+            <a:r>
+              <a:rPr lang="fr-FR" sz="3200" b="1" u="sng" dirty="0">
+                <a:latin typeface="Aptos Display" panose="020B0004020202020204" pitchFamily="34" charset="0"/>
+              </a:rPr>
+              <a:t>Présentation du projet </a:t>
+            </a:r>
+          </a:p>
+        </p:txBody>
+      </p:sp>
+      <p:pic>
+        <p:nvPicPr>
+          <p:cNvPr id="5" name="Image 4">
+            <a:extLst>
+              <a:ext uri="{FF2B5EF4-FFF2-40B4-BE49-F238E27FC236}">
+                <a16:creationId xmlns:a16="http://schemas.microsoft.com/office/drawing/2014/main" id="{2069FC91-5936-B5A0-4C86-0974534B07CA}"/>
+              </a:ext>
+            </a:extLst>
+          </p:cNvPr>
+          <p:cNvPicPr>
+            <a:picLocks noChangeAspect="1"/>
+          </p:cNvPicPr>
+          <p:nvPr/>
+        </p:nvPicPr>
+        <p:blipFill>
+          <a:blip r:embed="rId2"/>
+          <a:stretch>
+            <a:fillRect/>
+          </a:stretch>
+        </p:blipFill>
+        <p:spPr>
+          <a:xfrm>
+            <a:off x="10241280" y="481680"/>
+            <a:ext cx="1428891" cy="1303436"/>
+          </a:xfrm>
+          <a:prstGeom prst="rect">
+            <a:avLst/>
+          </a:prstGeom>
+        </p:spPr>
+      </p:pic>
+      <p:pic>
+        <p:nvPicPr>
+          <p:cNvPr id="1026" name="Picture 2">
+            <a:extLst>
+              <a:ext uri="{FF2B5EF4-FFF2-40B4-BE49-F238E27FC236}">
+                <a16:creationId xmlns:a16="http://schemas.microsoft.com/office/drawing/2014/main" id="{89D958C1-BC7D-92FB-0672-C887641F72A8}"/>
+              </a:ext>
+            </a:extLst>
+          </p:cNvPr>
+          <p:cNvPicPr>
+            <a:picLocks noChangeAspect="1" noChangeArrowheads="1"/>
+          </p:cNvPicPr>
+          <p:nvPr/>
+        </p:nvPicPr>
+        <p:blipFill>
+          <a:blip r:embed="rId3">
+            <a:extLst>
+              <a:ext uri="{28A0092B-C50C-407E-A947-70E740481C1C}">
+                <a14:useLocalDpi xmlns:a14="http://schemas.microsoft.com/office/drawing/2010/main" val="0"/>
+              </a:ext>
+            </a:extLst>
+          </a:blip>
+          <a:srcRect/>
+          <a:stretch>
+            <a:fillRect/>
+          </a:stretch>
+        </p:blipFill>
+        <p:spPr bwMode="auto">
+          <a:xfrm>
+            <a:off x="2715853" y="1352499"/>
+            <a:ext cx="6760292" cy="5293436"/>
+          </a:xfrm>
+          <a:prstGeom prst="rect">
+            <a:avLst/>
+          </a:prstGeom>
+          <a:noFill/>
+          <a:extLst>
+            <a:ext uri="{909E8E84-426E-40DD-AFC4-6F175D3DCCD1}">
+              <a14:hiddenFill xmlns:a14="http://schemas.microsoft.com/office/drawing/2010/main">
+                <a:solidFill>
+                  <a:srgbClr val="FFFFFF"/>
+                </a:solidFill>
+              </a14:hiddenFill>
+            </a:ext>
+          </a:extLst>
+        </p:spPr>
+      </p:pic>
+      <p:sp>
+        <p:nvSpPr>
+          <p:cNvPr id="2" name="ZoneTexte 1">
+            <a:extLst>
+              <a:ext uri="{FF2B5EF4-FFF2-40B4-BE49-F238E27FC236}">
+                <a16:creationId xmlns:a16="http://schemas.microsoft.com/office/drawing/2014/main" id="{CACC78B5-47F1-7FCD-A008-8E96C2A9CA41}"/>
+              </a:ext>
+            </a:extLst>
+          </p:cNvPr>
+          <p:cNvSpPr txBox="1"/>
+          <p:nvPr/>
+        </p:nvSpPr>
+        <p:spPr>
+          <a:xfrm>
+            <a:off x="3944608" y="902565"/>
+            <a:ext cx="4302781" cy="461665"/>
+          </a:xfrm>
+          <a:prstGeom prst="rect">
+            <a:avLst/>
+          </a:prstGeom>
+          <a:noFill/>
+        </p:spPr>
+        <p:txBody>
+          <a:bodyPr wrap="none" rtlCol="0">
+            <a:spAutoFit/>
+          </a:bodyPr>
+          <a:lstStyle/>
+          <a:p>
+            <a:r>
+              <a:rPr lang="fr-FR" sz="2400" u="sng" dirty="0"/>
+              <a:t>Diagramme de cas d’utilisation</a:t>
+            </a:r>
+          </a:p>
+        </p:txBody>
+      </p:sp>
+    </p:spTree>
+    <p:extLst>
+      <p:ext uri="{BB962C8B-B14F-4D97-AF65-F5344CB8AC3E}">
+        <p14:creationId xmlns:p14="http://schemas.microsoft.com/office/powerpoint/2010/main" val="916855787"/>
+      </p:ext>
+    </p:extLst>
+  </p:cSld>
+  <p:clrMapOvr>
+    <a:masterClrMapping/>
+  </p:clrMapOvr>
+</p:sld>
+</file>
+
+<file path=ppt/slides/slide6.xml><?xml version="1.0" encoding="utf-8"?>
+<p:sld xmlns:a="http://schemas.openxmlformats.org/drawingml/2006/main" xmlns:r="http://schemas.openxmlformats.org/officeDocument/2006/relationships" xmlns:p="http://schemas.openxmlformats.org/presentationml/2006/main">
+  <p:cSld>
+    <p:spTree>
+      <p:nvGrpSpPr>
+        <p:cNvPr id="1" name="">
+          <a:extLst>
+            <a:ext uri="{FF2B5EF4-FFF2-40B4-BE49-F238E27FC236}">
+              <a16:creationId xmlns:a16="http://schemas.microsoft.com/office/drawing/2014/main" id="{EB2071C7-19B7-CE14-F39C-3515128F0D87}"/>
+            </a:ext>
+          </a:extLst>
+        </p:cNvPr>
+        <p:cNvGrpSpPr/>
+        <p:nvPr/>
+      </p:nvGrpSpPr>
+      <p:grpSpPr>
+        <a:xfrm>
+          <a:off x="0" y="0"/>
+          <a:ext cx="0" cy="0"/>
+          <a:chOff x="0" y="0"/>
+          <a:chExt cx="0" cy="0"/>
+        </a:xfrm>
+      </p:grpSpPr>
+      <p:sp>
+        <p:nvSpPr>
+          <p:cNvPr id="3" name="ZoneTexte 2">
+            <a:extLst>
+              <a:ext uri="{FF2B5EF4-FFF2-40B4-BE49-F238E27FC236}">
+                <a16:creationId xmlns:a16="http://schemas.microsoft.com/office/drawing/2014/main" id="{AB9F68F1-512D-2FC9-3BD5-4C8F4DA11E9C}"/>
+              </a:ext>
+            </a:extLst>
+          </p:cNvPr>
+          <p:cNvSpPr txBox="1"/>
+          <p:nvPr/>
+        </p:nvSpPr>
+        <p:spPr>
+          <a:xfrm>
+            <a:off x="4018935" y="347554"/>
+            <a:ext cx="4154129" cy="584775"/>
+          </a:xfrm>
+          <a:prstGeom prst="rect">
+            <a:avLst/>
+          </a:prstGeom>
+          <a:noFill/>
+        </p:spPr>
+        <p:txBody>
+          <a:bodyPr wrap="square">
+            <a:spAutoFit/>
+          </a:bodyPr>
+          <a:lstStyle/>
+          <a:p>
+            <a:r>
+              <a:rPr lang="fr-FR" sz="3200" b="1" u="sng">
+                <a:latin typeface="Aptos Display" panose="020B0004020202020204" pitchFamily="34" charset="0"/>
+              </a:rPr>
+              <a:t>Présentation du projet </a:t>
+            </a:r>
+          </a:p>
+        </p:txBody>
+      </p:sp>
+      <p:pic>
+        <p:nvPicPr>
+          <p:cNvPr id="5" name="Image 4">
+            <a:extLst>
+              <a:ext uri="{FF2B5EF4-FFF2-40B4-BE49-F238E27FC236}">
+                <a16:creationId xmlns:a16="http://schemas.microsoft.com/office/drawing/2014/main" id="{7DA818D5-3C36-D9C4-4AA4-61B4811E1717}"/>
+              </a:ext>
+            </a:extLst>
+          </p:cNvPr>
+          <p:cNvPicPr>
+            <a:picLocks noChangeAspect="1"/>
+          </p:cNvPicPr>
+          <p:nvPr/>
+        </p:nvPicPr>
+        <p:blipFill>
+          <a:blip r:embed="rId2"/>
+          <a:stretch>
+            <a:fillRect/>
+          </a:stretch>
+        </p:blipFill>
+        <p:spPr>
+          <a:xfrm>
+            <a:off x="10241280" y="481680"/>
+            <a:ext cx="1428891" cy="1303436"/>
+          </a:xfrm>
+          <a:prstGeom prst="rect">
+            <a:avLst/>
+          </a:prstGeom>
+        </p:spPr>
+      </p:pic>
+      <p:sp>
+        <p:nvSpPr>
+          <p:cNvPr id="2" name="ZoneTexte 1">
+            <a:extLst>
+              <a:ext uri="{FF2B5EF4-FFF2-40B4-BE49-F238E27FC236}">
+                <a16:creationId xmlns:a16="http://schemas.microsoft.com/office/drawing/2014/main" id="{59030587-CC8D-CE2A-848B-313FE7EE8597}"/>
+              </a:ext>
+            </a:extLst>
+          </p:cNvPr>
+          <p:cNvSpPr txBox="1"/>
+          <p:nvPr/>
+        </p:nvSpPr>
+        <p:spPr>
+          <a:xfrm>
+            <a:off x="3944608" y="902565"/>
+            <a:ext cx="3502882" cy="461665"/>
+          </a:xfrm>
+          <a:prstGeom prst="rect">
+            <a:avLst/>
+          </a:prstGeom>
+          <a:noFill/>
+        </p:spPr>
+        <p:txBody>
+          <a:bodyPr wrap="none" rtlCol="0">
+            <a:spAutoFit/>
+          </a:bodyPr>
+          <a:lstStyle/>
+          <a:p>
+            <a:r>
+              <a:rPr lang="fr-FR" sz="2400" u="sng" dirty="0"/>
+              <a:t>Diagramme de séquence</a:t>
+            </a:r>
+          </a:p>
+        </p:txBody>
+      </p:sp>
+      <p:pic>
+        <p:nvPicPr>
+          <p:cNvPr id="2050" name="Picture 2">
+            <a:extLst>
+              <a:ext uri="{FF2B5EF4-FFF2-40B4-BE49-F238E27FC236}">
+                <a16:creationId xmlns:a16="http://schemas.microsoft.com/office/drawing/2014/main" id="{35929E55-9910-8499-30CE-21EEB5FDA848}"/>
+              </a:ext>
+            </a:extLst>
+          </p:cNvPr>
+          <p:cNvPicPr>
+            <a:picLocks noChangeAspect="1" noChangeArrowheads="1"/>
+          </p:cNvPicPr>
+          <p:nvPr/>
+        </p:nvPicPr>
+        <p:blipFill>
+          <a:blip r:embed="rId3">
+            <a:extLst>
+              <a:ext uri="{28A0092B-C50C-407E-A947-70E740481C1C}">
+                <a14:useLocalDpi xmlns:a14="http://schemas.microsoft.com/office/drawing/2010/main" val="0"/>
+              </a:ext>
+            </a:extLst>
+          </a:blip>
+          <a:srcRect/>
+          <a:stretch>
+            <a:fillRect/>
+          </a:stretch>
+        </p:blipFill>
+        <p:spPr bwMode="auto">
+          <a:xfrm>
+            <a:off x="2265680" y="1487340"/>
+            <a:ext cx="7660640" cy="5149370"/>
+          </a:xfrm>
+          <a:prstGeom prst="rect">
+            <a:avLst/>
+          </a:prstGeom>
+          <a:noFill/>
+          <a:extLst>
+            <a:ext uri="{909E8E84-426E-40DD-AFC4-6F175D3DCCD1}">
+              <a14:hiddenFill xmlns:a14="http://schemas.microsoft.com/office/drawing/2010/main">
+                <a:solidFill>
+                  <a:srgbClr val="FFFFFF"/>
+                </a:solidFill>
+              </a14:hiddenFill>
+            </a:ext>
+          </a:extLst>
+        </p:spPr>
+      </p:pic>
+    </p:spTree>
+    <p:extLst>
+      <p:ext uri="{BB962C8B-B14F-4D97-AF65-F5344CB8AC3E}">
+        <p14:creationId xmlns:p14="http://schemas.microsoft.com/office/powerpoint/2010/main" val="1157583138"/>
+      </p:ext>
+    </p:extLst>
+  </p:cSld>
+  <p:clrMapOvr>
+    <a:masterClrMapping/>
+  </p:clrMapOvr>
+</p:sld>
+</file>
+
+<file path=ppt/slides/slide7.xml><?xml version="1.0" encoding="utf-8"?>
+<p:sld xmlns:a="http://schemas.openxmlformats.org/drawingml/2006/main" xmlns:r="http://schemas.openxmlformats.org/officeDocument/2006/relationships" xmlns:p="http://schemas.openxmlformats.org/presentationml/2006/main">
+  <p:cSld>
+    <p:spTree>
+      <p:nvGrpSpPr>
+        <p:cNvPr id="1" name="">
+          <a:extLst>
+            <a:ext uri="{FF2B5EF4-FFF2-40B4-BE49-F238E27FC236}">
+              <a16:creationId xmlns:a16="http://schemas.microsoft.com/office/drawing/2014/main" id="{EBF5E24C-5A3A-0922-00F8-E2957C277533}"/>
+            </a:ext>
+          </a:extLst>
+        </p:cNvPr>
+        <p:cNvGrpSpPr/>
+        <p:nvPr/>
+      </p:nvGrpSpPr>
+      <p:grpSpPr>
+        <a:xfrm>
+          <a:off x="0" y="0"/>
+          <a:ext cx="0" cy="0"/>
+          <a:chOff x="0" y="0"/>
+          <a:chExt cx="0" cy="0"/>
+        </a:xfrm>
+      </p:grpSpPr>
+      <p:sp>
+        <p:nvSpPr>
+          <p:cNvPr id="3" name="ZoneTexte 2">
+            <a:extLst>
+              <a:ext uri="{FF2B5EF4-FFF2-40B4-BE49-F238E27FC236}">
+                <a16:creationId xmlns:a16="http://schemas.microsoft.com/office/drawing/2014/main" id="{AB949303-1AB3-2932-C0CE-C0D795DB2337}"/>
+              </a:ext>
+            </a:extLst>
+          </p:cNvPr>
+          <p:cNvSpPr txBox="1"/>
+          <p:nvPr/>
+        </p:nvSpPr>
+        <p:spPr>
+          <a:xfrm>
+            <a:off x="4018935" y="347554"/>
+            <a:ext cx="4154129" cy="584775"/>
+          </a:xfrm>
+          <a:prstGeom prst="rect">
+            <a:avLst/>
+          </a:prstGeom>
+          <a:noFill/>
+        </p:spPr>
+        <p:txBody>
+          <a:bodyPr wrap="square">
+            <a:spAutoFit/>
+          </a:bodyPr>
+          <a:lstStyle/>
+          <a:p>
+            <a:r>
+              <a:rPr lang="fr-FR" sz="3200" b="1" u="sng" dirty="0">
+                <a:latin typeface="Aptos Display" panose="020B0004020202020204" pitchFamily="34" charset="0"/>
+              </a:rPr>
+              <a:t>Outils utilisés </a:t>
+            </a:r>
+          </a:p>
+        </p:txBody>
+      </p:sp>
+      <p:pic>
+        <p:nvPicPr>
+          <p:cNvPr id="5" name="Image 4">
+            <a:extLst>
+              <a:ext uri="{FF2B5EF4-FFF2-40B4-BE49-F238E27FC236}">
+                <a16:creationId xmlns:a16="http://schemas.microsoft.com/office/drawing/2014/main" id="{90D64C95-51C8-4458-2C4F-6E267C38A96D}"/>
+              </a:ext>
+            </a:extLst>
+          </p:cNvPr>
+          <p:cNvPicPr>
+            <a:picLocks noChangeAspect="1"/>
+          </p:cNvPicPr>
+          <p:nvPr/>
+        </p:nvPicPr>
+        <p:blipFill>
+          <a:blip r:embed="rId2"/>
+          <a:stretch>
+            <a:fillRect/>
+          </a:stretch>
+        </p:blipFill>
+        <p:spPr>
+          <a:xfrm>
+            <a:off x="10241280" y="481680"/>
+            <a:ext cx="1428891" cy="1303436"/>
+          </a:xfrm>
+          <a:prstGeom prst="rect">
+            <a:avLst/>
+          </a:prstGeom>
+        </p:spPr>
+      </p:pic>
+      <p:sp>
+        <p:nvSpPr>
+          <p:cNvPr id="4" name="ZoneTexte 3">
+            <a:extLst>
+              <a:ext uri="{FF2B5EF4-FFF2-40B4-BE49-F238E27FC236}">
+                <a16:creationId xmlns:a16="http://schemas.microsoft.com/office/drawing/2014/main" id="{BB863726-A82E-3ACA-30E0-5796FEF7D0D1}"/>
+              </a:ext>
+            </a:extLst>
+          </p:cNvPr>
+          <p:cNvSpPr txBox="1"/>
+          <p:nvPr/>
+        </p:nvSpPr>
+        <p:spPr>
+          <a:xfrm>
+            <a:off x="1207205" y="2028691"/>
+            <a:ext cx="2980747" cy="1846659"/>
+          </a:xfrm>
+          <a:prstGeom prst="rect">
+            <a:avLst/>
+          </a:prstGeom>
+          <a:noFill/>
+        </p:spPr>
+        <p:txBody>
+          <a:bodyPr wrap="square" rtlCol="0">
+            <a:spAutoFit/>
+          </a:bodyPr>
+          <a:lstStyle/>
+          <a:p>
+            <a:pPr marL="285750" indent="-285750">
+              <a:buFont typeface="Arial" panose="020B0604020202020204" pitchFamily="34" charset="0"/>
+              <a:buChar char="•"/>
+            </a:pPr>
+            <a:r>
+              <a:rPr lang="fr-FR" sz="2400">
+                <a:latin typeface="Aptos Display" panose="020B0004020202020204" pitchFamily="34" charset="0"/>
+              </a:rPr>
+              <a:t>Visual Studio Code</a:t>
+            </a:r>
+          </a:p>
+          <a:p>
+            <a:pPr marL="285750" indent="-285750">
+              <a:buFont typeface="Arial" panose="020B0604020202020204" pitchFamily="34" charset="0"/>
+              <a:buChar char="•"/>
+            </a:pPr>
+            <a:r>
+              <a:rPr lang="fr-FR" sz="2400">
+                <a:latin typeface="Aptos Display" panose="020B0004020202020204" pitchFamily="34" charset="0"/>
+              </a:rPr>
+              <a:t>GitHub</a:t>
+            </a:r>
+          </a:p>
+          <a:p>
+            <a:pPr marL="285750" indent="-285750">
+              <a:buFont typeface="Arial" panose="020B0604020202020204" pitchFamily="34" charset="0"/>
+              <a:buChar char="•"/>
+            </a:pPr>
+            <a:r>
+              <a:rPr lang="fr-FR" sz="2400">
+                <a:latin typeface="Aptos Display" panose="020B0004020202020204" pitchFamily="34" charset="0"/>
+              </a:rPr>
+              <a:t>GitHub Desktop</a:t>
+            </a:r>
+          </a:p>
+          <a:p>
+            <a:pPr marL="285750" indent="-285750">
+              <a:buFont typeface="Arial" panose="020B0604020202020204" pitchFamily="34" charset="0"/>
+              <a:buChar char="•"/>
+            </a:pPr>
+            <a:r>
+              <a:rPr lang="fr-FR" sz="2400" err="1">
+                <a:latin typeface="Aptos Display" panose="020B0004020202020204" pitchFamily="34" charset="0"/>
+              </a:rPr>
+              <a:t>MagicDraw</a:t>
+            </a:r>
+            <a:r>
+              <a:rPr lang="fr-FR" sz="2400">
+                <a:latin typeface="Aptos Display" panose="020B0004020202020204" pitchFamily="34" charset="0"/>
+              </a:rPr>
+              <a:t> UML</a:t>
+            </a:r>
+          </a:p>
+          <a:p>
+            <a:pPr marL="285750" indent="-285750">
+              <a:buFont typeface="Arial" panose="020B0604020202020204" pitchFamily="34" charset="0"/>
+              <a:buChar char="•"/>
+            </a:pPr>
+            <a:endParaRPr lang="fr-FR" dirty="0">
+              <a:latin typeface="Aptos Display" panose="020B0004020202020204" pitchFamily="34" charset="0"/>
+            </a:endParaRPr>
+          </a:p>
+        </p:txBody>
+      </p:sp>
+      <p:sp>
+        <p:nvSpPr>
+          <p:cNvPr id="2" name="ZoneTexte 1">
+            <a:extLst>
+              <a:ext uri="{FF2B5EF4-FFF2-40B4-BE49-F238E27FC236}">
+                <a16:creationId xmlns:a16="http://schemas.microsoft.com/office/drawing/2014/main" id="{014C1D89-A585-02D4-2F5A-1F025FC8552F}"/>
+              </a:ext>
+            </a:extLst>
+          </p:cNvPr>
+          <p:cNvSpPr txBox="1"/>
+          <p:nvPr/>
+        </p:nvSpPr>
+        <p:spPr>
+          <a:xfrm>
+            <a:off x="5827628" y="1951672"/>
+            <a:ext cx="4690872" cy="1477328"/>
+          </a:xfrm>
+          <a:prstGeom prst="rect">
+            <a:avLst/>
+          </a:prstGeom>
+          <a:noFill/>
+        </p:spPr>
+        <p:txBody>
+          <a:bodyPr wrap="square" rtlCol="0">
+            <a:spAutoFit/>
+          </a:bodyPr>
+          <a:lstStyle/>
+          <a:p>
+            <a:r>
+              <a:rPr lang="fr-FR" b="1" u="sng"/>
+              <a:t>Langages de programmation utilisés:</a:t>
+            </a:r>
+          </a:p>
+          <a:p>
+            <a:endParaRPr lang="fr-FR"/>
+          </a:p>
+          <a:p>
+            <a:pPr marL="285750" indent="-285750">
+              <a:buFontTx/>
+              <a:buChar char="-"/>
+            </a:pPr>
+            <a:r>
+              <a:rPr lang="fr-FR"/>
+              <a:t>Python</a:t>
+            </a:r>
+          </a:p>
+          <a:p>
+            <a:pPr marL="285750" indent="-285750">
+              <a:buFontTx/>
+              <a:buChar char="-"/>
+            </a:pPr>
+            <a:r>
+              <a:rPr lang="fr-FR"/>
+              <a:t>HTML/CSS</a:t>
+            </a:r>
+          </a:p>
+          <a:p>
+            <a:pPr marL="285750" indent="-285750">
+              <a:buFontTx/>
+              <a:buChar char="-"/>
+            </a:pPr>
+            <a:r>
+              <a:rPr lang="fr-FR"/>
+              <a:t>JavaScript</a:t>
+            </a:r>
+          </a:p>
+        </p:txBody>
+      </p:sp>
+    </p:spTree>
+    <p:extLst>
+      <p:ext uri="{BB962C8B-B14F-4D97-AF65-F5344CB8AC3E}">
+        <p14:creationId xmlns:p14="http://schemas.microsoft.com/office/powerpoint/2010/main" val="437715359"/>
+      </p:ext>
+    </p:extLst>
+  </p:cSld>
+  <p:clrMapOvr>
+    <a:masterClrMapping/>
+  </p:clrMapOvr>
+</p:sld>
+</file>
+
+<file path=ppt/slides/slide8.xml><?xml version="1.0" encoding="utf-8"?>
+<p:sld xmlns:a="http://schemas.openxmlformats.org/drawingml/2006/main" xmlns:r="http://schemas.openxmlformats.org/officeDocument/2006/relationships" xmlns:p="http://schemas.openxmlformats.org/presentationml/2006/main">
+  <p:cSld>
+    <p:spTree>
+      <p:nvGrpSpPr>
+        <p:cNvPr id="1" name=""/>
+        <p:cNvGrpSpPr/>
+        <p:nvPr/>
+      </p:nvGrpSpPr>
+      <p:grpSpPr>
+        <a:xfrm>
+          <a:off x="0" y="0"/>
+          <a:ext cx="0" cy="0"/>
+          <a:chOff x="0" y="0"/>
+          <a:chExt cx="0" cy="0"/>
+        </a:xfrm>
+      </p:grpSpPr>
+    </p:spTree>
+    <p:extLst>
+      <p:ext uri="{BB962C8B-B14F-4D97-AF65-F5344CB8AC3E}">
+        <p14:creationId xmlns:p14="http://schemas.microsoft.com/office/powerpoint/2010/main" val="1657465610"/>
       </p:ext>
     </p:extLst>
   </p:cSld>

--- a/Présentation/TOKI.pptx
+++ b/Présentation/TOKI.pptx
@@ -12,7 +12,8 @@
     <p:sldId id="260" r:id="rId6"/>
     <p:sldId id="264" r:id="rId7"/>
     <p:sldId id="261" r:id="rId8"/>
-    <p:sldId id="262" r:id="rId9"/>
+    <p:sldId id="265" r:id="rId9"/>
+    <p:sldId id="262" r:id="rId10"/>
   </p:sldIdLst>
   <p:sldSz cx="12192000" cy="6858000"/>
   <p:notesSz cx="6858000" cy="9144000"/>
@@ -5764,6 +5765,239 @@
   <p:cSld>
     <p:spTree>
       <p:nvGrpSpPr>
+        <p:cNvPr id="1" name="">
+          <a:extLst>
+            <a:ext uri="{FF2B5EF4-FFF2-40B4-BE49-F238E27FC236}">
+              <a16:creationId xmlns:a16="http://schemas.microsoft.com/office/drawing/2014/main" id="{271B9DEF-F848-E4FD-F260-AAB469DA5382}"/>
+            </a:ext>
+          </a:extLst>
+        </p:cNvPr>
+        <p:cNvGrpSpPr/>
+        <p:nvPr/>
+      </p:nvGrpSpPr>
+      <p:grpSpPr>
+        <a:xfrm>
+          <a:off x="0" y="0"/>
+          <a:ext cx="0" cy="0"/>
+          <a:chOff x="0" y="0"/>
+          <a:chExt cx="0" cy="0"/>
+        </a:xfrm>
+      </p:grpSpPr>
+      <p:sp>
+        <p:nvSpPr>
+          <p:cNvPr id="3" name="ZoneTexte 2">
+            <a:extLst>
+              <a:ext uri="{FF2B5EF4-FFF2-40B4-BE49-F238E27FC236}">
+                <a16:creationId xmlns:a16="http://schemas.microsoft.com/office/drawing/2014/main" id="{3076D1AD-9FE5-0DAE-648B-9266CFC7E3C7}"/>
+              </a:ext>
+            </a:extLst>
+          </p:cNvPr>
+          <p:cNvSpPr txBox="1"/>
+          <p:nvPr/>
+        </p:nvSpPr>
+        <p:spPr>
+          <a:xfrm>
+            <a:off x="1503106" y="551311"/>
+            <a:ext cx="9185788" cy="584775"/>
+          </a:xfrm>
+          <a:prstGeom prst="rect">
+            <a:avLst/>
+          </a:prstGeom>
+          <a:noFill/>
+        </p:spPr>
+        <p:txBody>
+          <a:bodyPr wrap="square">
+            <a:spAutoFit/>
+          </a:bodyPr>
+          <a:lstStyle/>
+          <a:p>
+            <a:r>
+              <a:rPr lang="fr-FR" sz="3200" b="1" u="sng" dirty="0">
+                <a:latin typeface="Aptos Display" panose="020B0004020202020204" pitchFamily="34" charset="0"/>
+              </a:rPr>
+              <a:t>Poursuites possibles : Fonctionnalités optionnelles</a:t>
+            </a:r>
+          </a:p>
+        </p:txBody>
+      </p:sp>
+      <p:pic>
+        <p:nvPicPr>
+          <p:cNvPr id="5" name="Image 4">
+            <a:extLst>
+              <a:ext uri="{FF2B5EF4-FFF2-40B4-BE49-F238E27FC236}">
+                <a16:creationId xmlns:a16="http://schemas.microsoft.com/office/drawing/2014/main" id="{CDFBB76B-A9B4-B16A-F91A-2AA8E1C5A1F4}"/>
+              </a:ext>
+            </a:extLst>
+          </p:cNvPr>
+          <p:cNvPicPr>
+            <a:picLocks noChangeAspect="1"/>
+          </p:cNvPicPr>
+          <p:nvPr/>
+        </p:nvPicPr>
+        <p:blipFill>
+          <a:blip r:embed="rId2"/>
+          <a:stretch>
+            <a:fillRect/>
+          </a:stretch>
+        </p:blipFill>
+        <p:spPr>
+          <a:xfrm>
+            <a:off x="10575578" y="481680"/>
+            <a:ext cx="1428891" cy="1303436"/>
+          </a:xfrm>
+          <a:prstGeom prst="rect">
+            <a:avLst/>
+          </a:prstGeom>
+        </p:spPr>
+      </p:pic>
+      <p:sp>
+        <p:nvSpPr>
+          <p:cNvPr id="2" name="ZoneTexte 1">
+            <a:extLst>
+              <a:ext uri="{FF2B5EF4-FFF2-40B4-BE49-F238E27FC236}">
+                <a16:creationId xmlns:a16="http://schemas.microsoft.com/office/drawing/2014/main" id="{259BCCE2-C5D8-625D-91C8-F31112D2D6DF}"/>
+              </a:ext>
+            </a:extLst>
+          </p:cNvPr>
+          <p:cNvSpPr txBox="1"/>
+          <p:nvPr/>
+        </p:nvSpPr>
+        <p:spPr>
+          <a:xfrm>
+            <a:off x="4696917" y="2830135"/>
+            <a:ext cx="4810877" cy="1815882"/>
+          </a:xfrm>
+          <a:prstGeom prst="rect">
+            <a:avLst/>
+          </a:prstGeom>
+          <a:noFill/>
+        </p:spPr>
+        <p:txBody>
+          <a:bodyPr wrap="square" rtlCol="0">
+            <a:spAutoFit/>
+          </a:bodyPr>
+          <a:lstStyle/>
+          <a:p>
+            <a:pPr marL="285750" indent="-285750">
+              <a:buFont typeface="Arial" panose="020B0604020202020204" pitchFamily="34" charset="0"/>
+              <a:buChar char="•"/>
+            </a:pPr>
+            <a:r>
+              <a:rPr lang="fr-FR" sz="2800" dirty="0">
+                <a:latin typeface="Aptos Display" panose="020B0004020202020204" pitchFamily="34" charset="0"/>
+              </a:rPr>
+              <a:t>Envoie de fichiers </a:t>
+            </a:r>
+          </a:p>
+          <a:p>
+            <a:pPr marL="285750" indent="-285750">
+              <a:buFont typeface="Arial" panose="020B0604020202020204" pitchFamily="34" charset="0"/>
+              <a:buChar char="•"/>
+            </a:pPr>
+            <a:r>
+              <a:rPr lang="fr-FR" sz="2800" dirty="0">
+                <a:latin typeface="Aptos Display" panose="020B0004020202020204" pitchFamily="34" charset="0"/>
+              </a:rPr>
+              <a:t>Supprimer les messages</a:t>
+            </a:r>
+          </a:p>
+          <a:p>
+            <a:pPr marL="285750" indent="-285750">
+              <a:buFont typeface="Arial" panose="020B0604020202020204" pitchFamily="34" charset="0"/>
+              <a:buChar char="•"/>
+            </a:pPr>
+            <a:r>
+              <a:rPr lang="fr-FR" sz="2800" dirty="0">
+                <a:latin typeface="Aptos Display" panose="020B0004020202020204" pitchFamily="34" charset="0"/>
+              </a:rPr>
+              <a:t>Confirmation de compte par email</a:t>
+            </a:r>
+          </a:p>
+        </p:txBody>
+      </p:sp>
+      <p:pic>
+        <p:nvPicPr>
+          <p:cNvPr id="7" name="Image 6">
+            <a:extLst>
+              <a:ext uri="{FF2B5EF4-FFF2-40B4-BE49-F238E27FC236}">
+                <a16:creationId xmlns:a16="http://schemas.microsoft.com/office/drawing/2014/main" id="{1D01F8D7-E8A5-1410-E19B-94C7B249230E}"/>
+              </a:ext>
+            </a:extLst>
+          </p:cNvPr>
+          <p:cNvPicPr>
+            <a:picLocks noChangeAspect="1"/>
+          </p:cNvPicPr>
+          <p:nvPr/>
+        </p:nvPicPr>
+        <p:blipFill>
+          <a:blip r:embed="rId3"/>
+          <a:stretch>
+            <a:fillRect/>
+          </a:stretch>
+        </p:blipFill>
+        <p:spPr>
+          <a:xfrm>
+            <a:off x="562733" y="3230076"/>
+            <a:ext cx="2819644" cy="2034716"/>
+          </a:xfrm>
+          <a:prstGeom prst="rect">
+            <a:avLst/>
+          </a:prstGeom>
+        </p:spPr>
+      </p:pic>
+      <p:sp>
+        <p:nvSpPr>
+          <p:cNvPr id="8" name="ZoneTexte 7">
+            <a:extLst>
+              <a:ext uri="{FF2B5EF4-FFF2-40B4-BE49-F238E27FC236}">
+                <a16:creationId xmlns:a16="http://schemas.microsoft.com/office/drawing/2014/main" id="{4057975C-4149-C800-AB5D-7E4B647322D6}"/>
+              </a:ext>
+            </a:extLst>
+          </p:cNvPr>
+          <p:cNvSpPr txBox="1"/>
+          <p:nvPr/>
+        </p:nvSpPr>
+        <p:spPr>
+          <a:xfrm>
+            <a:off x="562734" y="5383359"/>
+            <a:ext cx="2819644" cy="923330"/>
+          </a:xfrm>
+          <a:prstGeom prst="rect">
+            <a:avLst/>
+          </a:prstGeom>
+          <a:noFill/>
+        </p:spPr>
+        <p:txBody>
+          <a:bodyPr wrap="square" rtlCol="0">
+            <a:spAutoFit/>
+          </a:bodyPr>
+          <a:lstStyle/>
+          <a:p>
+            <a:r>
+              <a:rPr lang="fr-FR" dirty="0"/>
+              <a:t>Pas possible de voir un contact connecter ou déconnecter </a:t>
+            </a:r>
+          </a:p>
+        </p:txBody>
+      </p:sp>
+    </p:spTree>
+    <p:extLst>
+      <p:ext uri="{BB962C8B-B14F-4D97-AF65-F5344CB8AC3E}">
+        <p14:creationId xmlns:p14="http://schemas.microsoft.com/office/powerpoint/2010/main" val="1132041448"/>
+      </p:ext>
+    </p:extLst>
+  </p:cSld>
+  <p:clrMapOvr>
+    <a:masterClrMapping/>
+  </p:clrMapOvr>
+</p:sld>
+</file>
+
+<file path=ppt/slides/slide9.xml><?xml version="1.0" encoding="utf-8"?>
+<p:sld xmlns:a="http://schemas.openxmlformats.org/drawingml/2006/main" xmlns:r="http://schemas.openxmlformats.org/officeDocument/2006/relationships" xmlns:p="http://schemas.openxmlformats.org/presentationml/2006/main">
+  <p:cSld>
+    <p:spTree>
+      <p:nvGrpSpPr>
         <p:cNvPr id="1" name=""/>
         <p:cNvGrpSpPr/>
         <p:nvPr/>

--- a/Présentation/TOKI.pptx
+++ b/Présentation/TOKI.pptx
@@ -4,6 +4,9 @@
   <p:sldMasterIdLst>
     <p:sldMasterId id="2147483699" r:id="rId1"/>
   </p:sldMasterIdLst>
+  <p:notesMasterIdLst>
+    <p:notesMasterId r:id="rId15"/>
+  </p:notesMasterIdLst>
   <p:sldIdLst>
     <p:sldId id="256" r:id="rId2"/>
     <p:sldId id="257" r:id="rId3"/>
@@ -12,8 +15,12 @@
     <p:sldId id="260" r:id="rId6"/>
     <p:sldId id="264" r:id="rId7"/>
     <p:sldId id="261" r:id="rId8"/>
-    <p:sldId id="265" r:id="rId9"/>
-    <p:sldId id="262" r:id="rId10"/>
+    <p:sldId id="272" r:id="rId9"/>
+    <p:sldId id="273" r:id="rId10"/>
+    <p:sldId id="267" r:id="rId11"/>
+    <p:sldId id="269" r:id="rId12"/>
+    <p:sldId id="265" r:id="rId13"/>
+    <p:sldId id="268" r:id="rId14"/>
   </p:sldIdLst>
   <p:sldSz cx="12192000" cy="6858000"/>
   <p:notesSz cx="6858000" cy="9144000"/>
@@ -112,12 +119,443 @@
       </a:defRPr>
     </a:lvl9pPr>
   </p:defaultTextStyle>
-  <p:extLst>
-    <p:ext uri="{EFAFB233-063F-42B5-8137-9DF3F51BA10A}">
-      <p15:sldGuideLst xmlns:p15="http://schemas.microsoft.com/office/powerpoint/2012/main"/>
-    </p:ext>
-  </p:extLst>
 </p:presentation>
+</file>
+
+<file path=ppt/notesMasters/notesMaster1.xml><?xml version="1.0" encoding="utf-8"?>
+<p:notesMaster xmlns:a="http://schemas.openxmlformats.org/drawingml/2006/main" xmlns:r="http://schemas.openxmlformats.org/officeDocument/2006/relationships" xmlns:p="http://schemas.openxmlformats.org/presentationml/2006/main">
+  <p:cSld>
+    <p:bg>
+      <p:bgRef idx="1001">
+        <a:schemeClr val="bg1"/>
+      </p:bgRef>
+    </p:bg>
+    <p:spTree>
+      <p:nvGrpSpPr>
+        <p:cNvPr id="1" name=""/>
+        <p:cNvGrpSpPr/>
+        <p:nvPr/>
+      </p:nvGrpSpPr>
+      <p:grpSpPr>
+        <a:xfrm>
+          <a:off x="0" y="0"/>
+          <a:ext cx="0" cy="0"/>
+          <a:chOff x="0" y="0"/>
+          <a:chExt cx="0" cy="0"/>
+        </a:xfrm>
+      </p:grpSpPr>
+      <p:sp>
+        <p:nvSpPr>
+          <p:cNvPr id="2" name="Espace réservé de l'en-tête 1"/>
+          <p:cNvSpPr>
+            <a:spLocks noGrp="1"/>
+          </p:cNvSpPr>
+          <p:nvPr>
+            <p:ph type="hdr" sz="quarter"/>
+          </p:nvPr>
+        </p:nvSpPr>
+        <p:spPr>
+          <a:xfrm>
+            <a:off x="0" y="0"/>
+            <a:ext cx="2971800" cy="458788"/>
+          </a:xfrm>
+          <a:prstGeom prst="rect">
+            <a:avLst/>
+          </a:prstGeom>
+        </p:spPr>
+        <p:txBody>
+          <a:bodyPr vert="horz" lIns="91440" tIns="45720" rIns="91440" bIns="45720" rtlCol="0"/>
+          <a:lstStyle>
+            <a:lvl1pPr algn="l">
+              <a:defRPr sz="1200"/>
+            </a:lvl1pPr>
+          </a:lstStyle>
+          <a:p>
+            <a:endParaRPr lang="fr-FR"/>
+          </a:p>
+        </p:txBody>
+      </p:sp>
+      <p:sp>
+        <p:nvSpPr>
+          <p:cNvPr id="3" name="Espace réservé de la date 2"/>
+          <p:cNvSpPr>
+            <a:spLocks noGrp="1"/>
+          </p:cNvSpPr>
+          <p:nvPr>
+            <p:ph type="dt" idx="1"/>
+          </p:nvPr>
+        </p:nvSpPr>
+        <p:spPr>
+          <a:xfrm>
+            <a:off x="3884613" y="0"/>
+            <a:ext cx="2971800" cy="458788"/>
+          </a:xfrm>
+          <a:prstGeom prst="rect">
+            <a:avLst/>
+          </a:prstGeom>
+        </p:spPr>
+        <p:txBody>
+          <a:bodyPr vert="horz" lIns="91440" tIns="45720" rIns="91440" bIns="45720" rtlCol="0"/>
+          <a:lstStyle>
+            <a:lvl1pPr algn="r">
+              <a:defRPr sz="1200"/>
+            </a:lvl1pPr>
+          </a:lstStyle>
+          <a:p>
+            <a:fld id="{9CEC310B-918C-4C6B-8262-16D23C938C7B}" type="datetimeFigureOut">
+              <a:rPr lang="fr-FR" smtClean="0"/>
+              <a:t>10/04/2026</a:t>
+            </a:fld>
+            <a:endParaRPr lang="fr-FR"/>
+          </a:p>
+        </p:txBody>
+      </p:sp>
+      <p:sp>
+        <p:nvSpPr>
+          <p:cNvPr id="4" name="Espace réservé de l'image des diapositives 3"/>
+          <p:cNvSpPr>
+            <a:spLocks noGrp="1" noRot="1" noChangeAspect="1"/>
+          </p:cNvSpPr>
+          <p:nvPr>
+            <p:ph type="sldImg" idx="2"/>
+          </p:nvPr>
+        </p:nvSpPr>
+        <p:spPr>
+          <a:xfrm>
+            <a:off x="685800" y="1143000"/>
+            <a:ext cx="5486400" cy="3086100"/>
+          </a:xfrm>
+          <a:prstGeom prst="rect">
+            <a:avLst/>
+          </a:prstGeom>
+          <a:noFill/>
+          <a:ln w="12700">
+            <a:solidFill>
+              <a:prstClr val="black"/>
+            </a:solidFill>
+          </a:ln>
+        </p:spPr>
+        <p:txBody>
+          <a:bodyPr vert="horz" lIns="91440" tIns="45720" rIns="91440" bIns="45720" rtlCol="0" anchor="ctr"/>
+          <a:lstStyle/>
+          <a:p>
+            <a:endParaRPr lang="fr-FR"/>
+          </a:p>
+        </p:txBody>
+      </p:sp>
+      <p:sp>
+        <p:nvSpPr>
+          <p:cNvPr id="5" name="Espace réservé des notes 4"/>
+          <p:cNvSpPr>
+            <a:spLocks noGrp="1"/>
+          </p:cNvSpPr>
+          <p:nvPr>
+            <p:ph type="body" sz="quarter" idx="3"/>
+          </p:nvPr>
+        </p:nvSpPr>
+        <p:spPr>
+          <a:xfrm>
+            <a:off x="685800" y="4400550"/>
+            <a:ext cx="5486400" cy="3600450"/>
+          </a:xfrm>
+          <a:prstGeom prst="rect">
+            <a:avLst/>
+          </a:prstGeom>
+        </p:spPr>
+        <p:txBody>
+          <a:bodyPr vert="horz" lIns="91440" tIns="45720" rIns="91440" bIns="45720" rtlCol="0"/>
+          <a:lstStyle/>
+          <a:p>
+            <a:pPr lvl="0"/>
+            <a:r>
+              <a:rPr lang="fr-FR"/>
+              <a:t>Cliquez pour modifier les styles du texte du masque</a:t>
+            </a:r>
+          </a:p>
+          <a:p>
+            <a:pPr lvl="1"/>
+            <a:r>
+              <a:rPr lang="fr-FR"/>
+              <a:t>Deuxième niveau</a:t>
+            </a:r>
+          </a:p>
+          <a:p>
+            <a:pPr lvl="2"/>
+            <a:r>
+              <a:rPr lang="fr-FR"/>
+              <a:t>Troisième niveau</a:t>
+            </a:r>
+          </a:p>
+          <a:p>
+            <a:pPr lvl="3"/>
+            <a:r>
+              <a:rPr lang="fr-FR"/>
+              <a:t>Quatrième niveau</a:t>
+            </a:r>
+          </a:p>
+          <a:p>
+            <a:pPr lvl="4"/>
+            <a:r>
+              <a:rPr lang="fr-FR"/>
+              <a:t>Cinquième niveau</a:t>
+            </a:r>
+          </a:p>
+        </p:txBody>
+      </p:sp>
+      <p:sp>
+        <p:nvSpPr>
+          <p:cNvPr id="6" name="Espace réservé du pied de page 5"/>
+          <p:cNvSpPr>
+            <a:spLocks noGrp="1"/>
+          </p:cNvSpPr>
+          <p:nvPr>
+            <p:ph type="ftr" sz="quarter" idx="4"/>
+          </p:nvPr>
+        </p:nvSpPr>
+        <p:spPr>
+          <a:xfrm>
+            <a:off x="0" y="8685213"/>
+            <a:ext cx="2971800" cy="458787"/>
+          </a:xfrm>
+          <a:prstGeom prst="rect">
+            <a:avLst/>
+          </a:prstGeom>
+        </p:spPr>
+        <p:txBody>
+          <a:bodyPr vert="horz" lIns="91440" tIns="45720" rIns="91440" bIns="45720" rtlCol="0" anchor="b"/>
+          <a:lstStyle>
+            <a:lvl1pPr algn="l">
+              <a:defRPr sz="1200"/>
+            </a:lvl1pPr>
+          </a:lstStyle>
+          <a:p>
+            <a:endParaRPr lang="fr-FR"/>
+          </a:p>
+        </p:txBody>
+      </p:sp>
+      <p:sp>
+        <p:nvSpPr>
+          <p:cNvPr id="7" name="Espace réservé du numéro de diapositive 6"/>
+          <p:cNvSpPr>
+            <a:spLocks noGrp="1"/>
+          </p:cNvSpPr>
+          <p:nvPr>
+            <p:ph type="sldNum" sz="quarter" idx="5"/>
+          </p:nvPr>
+        </p:nvSpPr>
+        <p:spPr>
+          <a:xfrm>
+            <a:off x="3884613" y="8685213"/>
+            <a:ext cx="2971800" cy="458787"/>
+          </a:xfrm>
+          <a:prstGeom prst="rect">
+            <a:avLst/>
+          </a:prstGeom>
+        </p:spPr>
+        <p:txBody>
+          <a:bodyPr vert="horz" lIns="91440" tIns="45720" rIns="91440" bIns="45720" rtlCol="0" anchor="b"/>
+          <a:lstStyle>
+            <a:lvl1pPr algn="r">
+              <a:defRPr sz="1200"/>
+            </a:lvl1pPr>
+          </a:lstStyle>
+          <a:p>
+            <a:fld id="{08798FA1-20D3-46ED-A06E-B96DB04CEA0D}" type="slidenum">
+              <a:rPr lang="fr-FR" smtClean="0"/>
+              <a:t>‹N°›</a:t>
+            </a:fld>
+            <a:endParaRPr lang="fr-FR"/>
+          </a:p>
+        </p:txBody>
+      </p:sp>
+    </p:spTree>
+    <p:extLst>
+      <p:ext uri="{BB962C8B-B14F-4D97-AF65-F5344CB8AC3E}">
+        <p14:creationId xmlns:p14="http://schemas.microsoft.com/office/powerpoint/2010/main" val="2712552945"/>
+      </p:ext>
+    </p:extLst>
+  </p:cSld>
+  <p:clrMap bg1="lt1" tx1="dk1" bg2="lt2" tx2="dk2" accent1="accent1" accent2="accent2" accent3="accent3" accent4="accent4" accent5="accent5" accent6="accent6" hlink="hlink" folHlink="folHlink"/>
+  <p:notesStyle>
+    <a:lvl1pPr marL="0" algn="l" defTabSz="914400" rtl="0" eaLnBrk="1" latinLnBrk="0" hangingPunct="1">
+      <a:defRPr sz="1200" kern="1200">
+        <a:solidFill>
+          <a:schemeClr val="tx1"/>
+        </a:solidFill>
+        <a:latin typeface="+mn-lt"/>
+        <a:ea typeface="+mn-ea"/>
+        <a:cs typeface="+mn-cs"/>
+      </a:defRPr>
+    </a:lvl1pPr>
+    <a:lvl2pPr marL="457200" algn="l" defTabSz="914400" rtl="0" eaLnBrk="1" latinLnBrk="0" hangingPunct="1">
+      <a:defRPr sz="1200" kern="1200">
+        <a:solidFill>
+          <a:schemeClr val="tx1"/>
+        </a:solidFill>
+        <a:latin typeface="+mn-lt"/>
+        <a:ea typeface="+mn-ea"/>
+        <a:cs typeface="+mn-cs"/>
+      </a:defRPr>
+    </a:lvl2pPr>
+    <a:lvl3pPr marL="914400" algn="l" defTabSz="914400" rtl="0" eaLnBrk="1" latinLnBrk="0" hangingPunct="1">
+      <a:defRPr sz="1200" kern="1200">
+        <a:solidFill>
+          <a:schemeClr val="tx1"/>
+        </a:solidFill>
+        <a:latin typeface="+mn-lt"/>
+        <a:ea typeface="+mn-ea"/>
+        <a:cs typeface="+mn-cs"/>
+      </a:defRPr>
+    </a:lvl3pPr>
+    <a:lvl4pPr marL="1371600" algn="l" defTabSz="914400" rtl="0" eaLnBrk="1" latinLnBrk="0" hangingPunct="1">
+      <a:defRPr sz="1200" kern="1200">
+        <a:solidFill>
+          <a:schemeClr val="tx1"/>
+        </a:solidFill>
+        <a:latin typeface="+mn-lt"/>
+        <a:ea typeface="+mn-ea"/>
+        <a:cs typeface="+mn-cs"/>
+      </a:defRPr>
+    </a:lvl4pPr>
+    <a:lvl5pPr marL="1828800" algn="l" defTabSz="914400" rtl="0" eaLnBrk="1" latinLnBrk="0" hangingPunct="1">
+      <a:defRPr sz="1200" kern="1200">
+        <a:solidFill>
+          <a:schemeClr val="tx1"/>
+        </a:solidFill>
+        <a:latin typeface="+mn-lt"/>
+        <a:ea typeface="+mn-ea"/>
+        <a:cs typeface="+mn-cs"/>
+      </a:defRPr>
+    </a:lvl5pPr>
+    <a:lvl6pPr marL="2286000" algn="l" defTabSz="914400" rtl="0" eaLnBrk="1" latinLnBrk="0" hangingPunct="1">
+      <a:defRPr sz="1200" kern="1200">
+        <a:solidFill>
+          <a:schemeClr val="tx1"/>
+        </a:solidFill>
+        <a:latin typeface="+mn-lt"/>
+        <a:ea typeface="+mn-ea"/>
+        <a:cs typeface="+mn-cs"/>
+      </a:defRPr>
+    </a:lvl6pPr>
+    <a:lvl7pPr marL="2743200" algn="l" defTabSz="914400" rtl="0" eaLnBrk="1" latinLnBrk="0" hangingPunct="1">
+      <a:defRPr sz="1200" kern="1200">
+        <a:solidFill>
+          <a:schemeClr val="tx1"/>
+        </a:solidFill>
+        <a:latin typeface="+mn-lt"/>
+        <a:ea typeface="+mn-ea"/>
+        <a:cs typeface="+mn-cs"/>
+      </a:defRPr>
+    </a:lvl7pPr>
+    <a:lvl8pPr marL="3200400" algn="l" defTabSz="914400" rtl="0" eaLnBrk="1" latinLnBrk="0" hangingPunct="1">
+      <a:defRPr sz="1200" kern="1200">
+        <a:solidFill>
+          <a:schemeClr val="tx1"/>
+        </a:solidFill>
+        <a:latin typeface="+mn-lt"/>
+        <a:ea typeface="+mn-ea"/>
+        <a:cs typeface="+mn-cs"/>
+      </a:defRPr>
+    </a:lvl8pPr>
+    <a:lvl9pPr marL="3657600" algn="l" defTabSz="914400" rtl="0" eaLnBrk="1" latinLnBrk="0" hangingPunct="1">
+      <a:defRPr sz="1200" kern="1200">
+        <a:solidFill>
+          <a:schemeClr val="tx1"/>
+        </a:solidFill>
+        <a:latin typeface="+mn-lt"/>
+        <a:ea typeface="+mn-ea"/>
+        <a:cs typeface="+mn-cs"/>
+      </a:defRPr>
+    </a:lvl9pPr>
+  </p:notesStyle>
+</p:notesMaster>
+</file>
+
+<file path=ppt/notesSlides/notesSlide1.xml><?xml version="1.0" encoding="utf-8"?>
+<p:notes xmlns:a="http://schemas.openxmlformats.org/drawingml/2006/main" xmlns:r="http://schemas.openxmlformats.org/officeDocument/2006/relationships" xmlns:p="http://schemas.openxmlformats.org/presentationml/2006/main">
+  <p:cSld>
+    <p:spTree>
+      <p:nvGrpSpPr>
+        <p:cNvPr id="1" name=""/>
+        <p:cNvGrpSpPr/>
+        <p:nvPr/>
+      </p:nvGrpSpPr>
+      <p:grpSpPr>
+        <a:xfrm>
+          <a:off x="0" y="0"/>
+          <a:ext cx="0" cy="0"/>
+          <a:chOff x="0" y="0"/>
+          <a:chExt cx="0" cy="0"/>
+        </a:xfrm>
+      </p:grpSpPr>
+      <p:sp>
+        <p:nvSpPr>
+          <p:cNvPr id="2" name="Espace réservé de l'image des diapositives 1"/>
+          <p:cNvSpPr>
+            <a:spLocks noGrp="1" noRot="1" noChangeAspect="1"/>
+          </p:cNvSpPr>
+          <p:nvPr>
+            <p:ph type="sldImg"/>
+          </p:nvPr>
+        </p:nvSpPr>
+        <p:spPr/>
+      </p:sp>
+      <p:sp>
+        <p:nvSpPr>
+          <p:cNvPr id="3" name="Espace réservé des notes 2"/>
+          <p:cNvSpPr>
+            <a:spLocks noGrp="1"/>
+          </p:cNvSpPr>
+          <p:nvPr>
+            <p:ph type="body" idx="1"/>
+          </p:nvPr>
+        </p:nvSpPr>
+        <p:spPr/>
+        <p:txBody>
+          <a:bodyPr/>
+          <a:lstStyle/>
+          <a:p>
+            <a:r>
+              <a:rPr lang="fr-FR"/>
+              <a:t>Envoie de message (comment ca ce passe)</a:t>
+            </a:r>
+          </a:p>
+        </p:txBody>
+      </p:sp>
+      <p:sp>
+        <p:nvSpPr>
+          <p:cNvPr id="4" name="Espace réservé du numéro de diapositive 3"/>
+          <p:cNvSpPr>
+            <a:spLocks noGrp="1"/>
+          </p:cNvSpPr>
+          <p:nvPr>
+            <p:ph type="sldNum" sz="quarter" idx="5"/>
+          </p:nvPr>
+        </p:nvSpPr>
+        <p:spPr/>
+        <p:txBody>
+          <a:bodyPr/>
+          <a:lstStyle/>
+          <a:p>
+            <a:fld id="{08798FA1-20D3-46ED-A06E-B96DB04CEA0D}" type="slidenum">
+              <a:rPr lang="fr-FR" smtClean="0"/>
+              <a:t>6</a:t>
+            </a:fld>
+            <a:endParaRPr lang="fr-FR"/>
+          </a:p>
+        </p:txBody>
+      </p:sp>
+    </p:spTree>
+    <p:extLst>
+      <p:ext uri="{BB962C8B-B14F-4D97-AF65-F5344CB8AC3E}">
+        <p14:creationId xmlns:p14="http://schemas.microsoft.com/office/powerpoint/2010/main" val="4088319415"/>
+      </p:ext>
+    </p:extLst>
+  </p:cSld>
+  <p:clrMapOvr>
+    <a:masterClrMapping/>
+  </p:clrMapOvr>
+</p:notes>
 </file>
 
 <file path=ppt/slideLayouts/slideLayout1.xml><?xml version="1.0" encoding="utf-8"?>
@@ -173,7 +611,6 @@
               <a:rPr lang="en-US"/>
               <a:t>Click to edit Master title style</a:t>
             </a:r>
-            <a:endParaRPr lang="en-US" dirty="0"/>
           </a:p>
         </p:txBody>
       </p:sp>
@@ -249,7 +686,6 @@
               <a:rPr lang="en-US"/>
               <a:t>Click to edit Master subtitle style</a:t>
             </a:r>
-            <a:endParaRPr lang="en-US" dirty="0"/>
           </a:p>
         </p:txBody>
       </p:sp>
@@ -303,7 +739,7 @@
           <a:bodyPr/>
           <a:lstStyle/>
           <a:p>
-            <a:endParaRPr lang="en-US" dirty="0"/>
+            <a:endParaRPr lang="en-US"/>
           </a:p>
         </p:txBody>
       </p:sp>
@@ -391,7 +827,6 @@
               <a:rPr lang="en-US"/>
               <a:t>Click to edit Master title style</a:t>
             </a:r>
-            <a:endParaRPr lang="en-US" dirty="0"/>
           </a:p>
         </p:txBody>
       </p:sp>
@@ -449,7 +884,6 @@
               <a:rPr lang="en-US"/>
               <a:t>Fifth level</a:t>
             </a:r>
-            <a:endParaRPr lang="en-US" dirty="0"/>
           </a:p>
         </p:txBody>
       </p:sp>
@@ -503,7 +937,7 @@
           <a:bodyPr/>
           <a:lstStyle/>
           <a:p>
-            <a:endParaRPr lang="en-US" dirty="0"/>
+            <a:endParaRPr lang="en-US"/>
           </a:p>
         </p:txBody>
       </p:sp>
@@ -645,7 +1079,6 @@
               <a:rPr lang="en-US"/>
               <a:t>Click to edit Master title style</a:t>
             </a:r>
-            <a:endParaRPr lang="en-US" dirty="0"/>
           </a:p>
         </p:txBody>
       </p:sp>
@@ -708,7 +1141,6 @@
               <a:rPr lang="en-US"/>
               <a:t>Fifth level</a:t>
             </a:r>
-            <a:endParaRPr lang="en-US" dirty="0"/>
           </a:p>
         </p:txBody>
       </p:sp>
@@ -762,7 +1194,7 @@
           <a:bodyPr/>
           <a:lstStyle/>
           <a:p>
-            <a:endParaRPr lang="en-US" dirty="0"/>
+            <a:endParaRPr lang="en-US"/>
           </a:p>
         </p:txBody>
       </p:sp>
@@ -892,7 +1324,6 @@
               <a:rPr lang="en-US"/>
               <a:t>Click to edit Master title style</a:t>
             </a:r>
-            <a:endParaRPr lang="en-US" dirty="0"/>
           </a:p>
         </p:txBody>
       </p:sp>
@@ -1003,7 +1434,7 @@
           <a:bodyPr/>
           <a:lstStyle/>
           <a:p>
-            <a:endParaRPr lang="en-US" dirty="0"/>
+            <a:endParaRPr lang="en-US"/>
           </a:p>
         </p:txBody>
       </p:sp>
@@ -1151,7 +1582,6 @@
               <a:rPr lang="en-US"/>
               <a:t>Click to edit Master title style</a:t>
             </a:r>
-            <a:endParaRPr lang="en-US" dirty="0"/>
           </a:p>
         </p:txBody>
       </p:sp>
@@ -1330,7 +1760,7 @@
           <a:bodyPr/>
           <a:lstStyle/>
           <a:p>
-            <a:endParaRPr lang="en-US" dirty="0"/>
+            <a:endParaRPr lang="en-US"/>
           </a:p>
         </p:txBody>
       </p:sp>
@@ -1460,7 +1890,6 @@
               <a:rPr lang="en-US"/>
               <a:t>Click to edit Master title style</a:t>
             </a:r>
-            <a:endParaRPr lang="en-US" dirty="0"/>
           </a:p>
         </p:txBody>
       </p:sp>
@@ -1523,7 +1952,6 @@
               <a:rPr lang="en-US"/>
               <a:t>Fifth level</a:t>
             </a:r>
-            <a:endParaRPr lang="en-US" dirty="0"/>
           </a:p>
         </p:txBody>
       </p:sp>
@@ -1586,7 +2014,6 @@
               <a:rPr lang="en-US"/>
               <a:t>Fifth level</a:t>
             </a:r>
-            <a:endParaRPr lang="en-US" dirty="0"/>
           </a:p>
         </p:txBody>
       </p:sp>
@@ -1640,7 +2067,7 @@
           <a:bodyPr/>
           <a:lstStyle/>
           <a:p>
-            <a:endParaRPr lang="en-US" dirty="0"/>
+            <a:endParaRPr lang="en-US"/>
           </a:p>
         </p:txBody>
       </p:sp>
@@ -1733,7 +2160,6 @@
               <a:rPr lang="en-US"/>
               <a:t>Click to edit Master title style</a:t>
             </a:r>
-            <a:endParaRPr lang="en-US" dirty="0"/>
           </a:p>
         </p:txBody>
       </p:sp>
@@ -1869,7 +2295,6 @@
               <a:rPr lang="en-US"/>
               <a:t>Fifth level</a:t>
             </a:r>
-            <a:endParaRPr lang="en-US" dirty="0"/>
           </a:p>
         </p:txBody>
       </p:sp>
@@ -2058,7 +2483,7 @@
           <a:bodyPr/>
           <a:lstStyle/>
           <a:p>
-            <a:endParaRPr lang="en-US" dirty="0"/>
+            <a:endParaRPr lang="en-US"/>
           </a:p>
         </p:txBody>
       </p:sp>
@@ -2146,7 +2571,6 @@
               <a:rPr lang="en-US"/>
               <a:t>Click to edit Master title style</a:t>
             </a:r>
-            <a:endParaRPr lang="en-US" dirty="0"/>
           </a:p>
         </p:txBody>
       </p:sp>
@@ -2200,7 +2624,7 @@
           <a:bodyPr/>
           <a:lstStyle/>
           <a:p>
-            <a:endParaRPr lang="en-US" dirty="0"/>
+            <a:endParaRPr lang="en-US"/>
           </a:p>
         </p:txBody>
       </p:sp>
@@ -2362,7 +2786,7 @@
           <a:bodyPr/>
           <a:lstStyle/>
           <a:p>
-            <a:endParaRPr lang="en-US" dirty="0"/>
+            <a:endParaRPr lang="en-US"/>
           </a:p>
         </p:txBody>
       </p:sp>
@@ -2461,7 +2885,6 @@
               <a:rPr lang="en-US"/>
               <a:t>Click to edit Master title style</a:t>
             </a:r>
-            <a:endParaRPr lang="en-US" dirty="0"/>
           </a:p>
         </p:txBody>
       </p:sp>
@@ -2554,7 +2977,6 @@
               <a:rPr lang="en-US"/>
               <a:t>Fifth level</a:t>
             </a:r>
-            <a:endParaRPr lang="en-US" dirty="0"/>
           </a:p>
         </p:txBody>
       </p:sp>
@@ -2679,7 +3101,7 @@
           <a:bodyPr/>
           <a:lstStyle/>
           <a:p>
-            <a:endParaRPr lang="en-US" dirty="0"/>
+            <a:endParaRPr lang="en-US"/>
           </a:p>
         </p:txBody>
       </p:sp>
@@ -2778,7 +3200,6 @@
               <a:rPr lang="en-US"/>
               <a:t>Click to edit Master title style</a:t>
             </a:r>
-            <a:endParaRPr lang="en-US" dirty="0"/>
           </a:p>
         </p:txBody>
       </p:sp>
@@ -2849,7 +3270,6 @@
               <a:rPr lang="en-US"/>
               <a:t>Click icon to add picture</a:t>
             </a:r>
-            <a:endParaRPr lang="en-US" dirty="0"/>
           </a:p>
         </p:txBody>
       </p:sp>
@@ -2974,7 +3394,7 @@
           <a:bodyPr/>
           <a:lstStyle/>
           <a:p>
-            <a:endParaRPr lang="en-US" dirty="0"/>
+            <a:endParaRPr lang="en-US"/>
           </a:p>
         </p:txBody>
       </p:sp>
@@ -3077,7 +3497,6 @@
               <a:rPr lang="en-US"/>
               <a:t>Click to edit Master title style</a:t>
             </a:r>
-            <a:endParaRPr lang="en-US" dirty="0"/>
           </a:p>
         </p:txBody>
       </p:sp>
@@ -3145,7 +3564,6 @@
               <a:rPr lang="en-US"/>
               <a:t>Fifth level</a:t>
             </a:r>
-            <a:endParaRPr lang="en-US" dirty="0"/>
           </a:p>
         </p:txBody>
       </p:sp>
@@ -3231,7 +3649,7 @@
             </a:lvl1pPr>
           </a:lstStyle>
           <a:p>
-            <a:endParaRPr lang="en-US" dirty="0"/>
+            <a:endParaRPr lang="en-US"/>
           </a:p>
         </p:txBody>
       </p:sp>
@@ -3762,14 +4180,14 @@
           <a:lstStyle/>
           <a:p>
             <a:r>
-              <a:rPr lang="fr-FR" sz="4400" dirty="0"/>
-              <a:t>Chat réseaux multi-utilisateur </a:t>
+              <a:rPr lang="fr-FR" sz="4400"/>
+              <a:t>Chat réseau multi-utilisateur </a:t>
             </a:r>
             <a:br>
-              <a:rPr lang="fr-FR" sz="4400" dirty="0"/>
+              <a:rPr lang="fr-FR" sz="4400"/>
             </a:br>
             <a:r>
-              <a:rPr lang="fr-FR" sz="4400" dirty="0"/>
+              <a:rPr lang="fr-FR" sz="4400"/>
               <a:t>TOKI</a:t>
             </a:r>
           </a:p>
@@ -3804,50 +4222,50 @@
           <a:lstStyle/>
           <a:p>
             <a:r>
-              <a:rPr lang="fr-FR" dirty="0">
-                <a:latin typeface="Aptos Display" panose="020B0004020202020204" pitchFamily="34" charset="0"/>
+              <a:rPr lang="fr-FR">
+                <a:latin typeface="Aptos Display"/>
               </a:rPr>
               <a:t>Brando </a:t>
             </a:r>
             <a:r>
-              <a:rPr lang="fr-FR" dirty="0" err="1">
-                <a:latin typeface="Aptos Display" panose="020B0004020202020204" pitchFamily="34" charset="0"/>
+              <a:rPr lang="fr-FR" err="1">
+                <a:latin typeface="Aptos Display"/>
               </a:rPr>
               <a:t>Colamarco</a:t>
             </a:r>
             <a:br>
-              <a:rPr lang="fr-FR" dirty="0">
+              <a:rPr lang="fr-FR">
                 <a:latin typeface="Aptos Display" panose="020B0004020202020204" pitchFamily="34" charset="0"/>
               </a:rPr>
             </a:br>
             <a:r>
-              <a:rPr lang="fr-FR" dirty="0" err="1">
-                <a:latin typeface="Aptos Display" panose="020B0004020202020204" pitchFamily="34" charset="0"/>
+              <a:rPr lang="fr-FR" err="1">
+                <a:latin typeface="Aptos Display"/>
               </a:rPr>
               <a:t>Vento</a:t>
             </a:r>
             <a:r>
-              <a:rPr lang="fr-FR" dirty="0">
-                <a:latin typeface="Aptos Display" panose="020B0004020202020204" pitchFamily="34" charset="0"/>
+              <a:rPr lang="fr-FR">
+                <a:latin typeface="Aptos Display"/>
               </a:rPr>
-              <a:t> </a:t>
-            </a:r>
-            <a:r>
-              <a:rPr lang="fr-FR" dirty="0" err="1">
-                <a:latin typeface="Aptos Display" panose="020B0004020202020204" pitchFamily="34" charset="0"/>
-              </a:rPr>
-              <a:t>DiazBOD</a:t>
-            </a:r>
-            <a:endParaRPr lang="fr-FR" dirty="0">
+              <a:t> Diaz BOD</a:t>
+            </a:r>
+            <a:endParaRPr lang="fr-FR">
               <a:latin typeface="Aptos Display" panose="020B0004020202020204" pitchFamily="34" charset="0"/>
             </a:endParaRPr>
           </a:p>
           <a:p>
             <a:r>
-              <a:rPr lang="fr-FR" dirty="0">
-                <a:latin typeface="Aptos Display" panose="020B0004020202020204" pitchFamily="34" charset="0"/>
+              <a:rPr lang="fr-FR">
+                <a:latin typeface="Aptos Display"/>
               </a:rPr>
-              <a:t>Yoann Gnangla</a:t>
+              <a:t>Yoann </a:t>
+            </a:r>
+            <a:r>
+              <a:rPr lang="fr-FR" err="1">
+                <a:latin typeface="Aptos Display"/>
+              </a:rPr>
+              <a:t>Gnangla</a:t>
             </a:r>
           </a:p>
         </p:txBody>
@@ -3995,7 +4413,7 @@
           <a:lstStyle/>
           <a:p>
             <a:r>
-              <a:rPr lang="fr-FR" dirty="0">
+              <a:rPr lang="fr-FR">
                 <a:latin typeface="Aptos Display" panose="020B0004020202020204" pitchFamily="34" charset="0"/>
               </a:rPr>
               <a:t>BTS CIEL 1</a:t>
@@ -4007,6 +4425,774 @@
     <p:extLst>
       <p:ext uri="{BB962C8B-B14F-4D97-AF65-F5344CB8AC3E}">
         <p14:creationId xmlns:p14="http://schemas.microsoft.com/office/powerpoint/2010/main" val="1874097562"/>
+      </p:ext>
+    </p:extLst>
+  </p:cSld>
+  <p:clrMapOvr>
+    <a:masterClrMapping/>
+  </p:clrMapOvr>
+</p:sld>
+</file>
+
+<file path=ppt/slides/slide10.xml><?xml version="1.0" encoding="utf-8"?>
+<p:sld xmlns:a="http://schemas.openxmlformats.org/drawingml/2006/main" xmlns:r="http://schemas.openxmlformats.org/officeDocument/2006/relationships" xmlns:p="http://schemas.openxmlformats.org/presentationml/2006/main">
+  <p:cSld>
+    <p:spTree>
+      <p:nvGrpSpPr>
+        <p:cNvPr id="1" name=""/>
+        <p:cNvGrpSpPr/>
+        <p:nvPr/>
+      </p:nvGrpSpPr>
+      <p:grpSpPr>
+        <a:xfrm>
+          <a:off x="0" y="0"/>
+          <a:ext cx="0" cy="0"/>
+          <a:chOff x="0" y="0"/>
+          <a:chExt cx="0" cy="0"/>
+        </a:xfrm>
+      </p:grpSpPr>
+      <p:sp>
+        <p:nvSpPr>
+          <p:cNvPr id="2" name="Titre 1">
+            <a:extLst>
+              <a:ext uri="{FF2B5EF4-FFF2-40B4-BE49-F238E27FC236}">
+                <a16:creationId xmlns:a16="http://schemas.microsoft.com/office/drawing/2014/main" id="{A11D00FF-49A7-DD3C-4AB4-2EEE29500A4D}"/>
+              </a:ext>
+            </a:extLst>
+          </p:cNvPr>
+          <p:cNvSpPr>
+            <a:spLocks noGrp="1"/>
+          </p:cNvSpPr>
+          <p:nvPr>
+            <p:ph type="title"/>
+          </p:nvPr>
+        </p:nvSpPr>
+        <p:spPr/>
+        <p:txBody>
+          <a:bodyPr/>
+          <a:lstStyle/>
+          <a:p>
+            <a:r>
+              <a:rPr lang="fr-FR" u="sng"/>
+              <a:t>Explications techniques de la réalisation</a:t>
+            </a:r>
+          </a:p>
+        </p:txBody>
+      </p:sp>
+      <p:pic>
+        <p:nvPicPr>
+          <p:cNvPr id="4" name="Image 3">
+            <a:extLst>
+              <a:ext uri="{FF2B5EF4-FFF2-40B4-BE49-F238E27FC236}">
+                <a16:creationId xmlns:a16="http://schemas.microsoft.com/office/drawing/2014/main" id="{CE456653-092F-DC2F-DFA6-84397FCD164D}"/>
+              </a:ext>
+            </a:extLst>
+          </p:cNvPr>
+          <p:cNvPicPr>
+            <a:picLocks noChangeAspect="1"/>
+          </p:cNvPicPr>
+          <p:nvPr/>
+        </p:nvPicPr>
+        <p:blipFill>
+          <a:blip r:embed="rId2"/>
+          <a:stretch>
+            <a:fillRect/>
+          </a:stretch>
+        </p:blipFill>
+        <p:spPr>
+          <a:xfrm>
+            <a:off x="10763109" y="6650"/>
+            <a:ext cx="1428891" cy="1303436"/>
+          </a:xfrm>
+          <a:prstGeom prst="rect">
+            <a:avLst/>
+          </a:prstGeom>
+        </p:spPr>
+      </p:pic>
+      <p:pic>
+        <p:nvPicPr>
+          <p:cNvPr id="12" name="Picture 11">
+            <a:extLst>
+              <a:ext uri="{FF2B5EF4-FFF2-40B4-BE49-F238E27FC236}">
+                <a16:creationId xmlns:a16="http://schemas.microsoft.com/office/drawing/2014/main" id="{017D85DC-4D70-520B-F0C1-88691E42F5AD}"/>
+              </a:ext>
+            </a:extLst>
+          </p:cNvPr>
+          <p:cNvPicPr>
+            <a:picLocks noChangeAspect="1"/>
+          </p:cNvPicPr>
+          <p:nvPr/>
+        </p:nvPicPr>
+        <p:blipFill>
+          <a:blip r:embed="rId3"/>
+          <a:stretch>
+            <a:fillRect/>
+          </a:stretch>
+        </p:blipFill>
+        <p:spPr>
+          <a:xfrm>
+            <a:off x="581186" y="2348678"/>
+            <a:ext cx="6044340" cy="2302710"/>
+          </a:xfrm>
+          <a:prstGeom prst="rect">
+            <a:avLst/>
+          </a:prstGeom>
+        </p:spPr>
+      </p:pic>
+      <p:pic>
+        <p:nvPicPr>
+          <p:cNvPr id="13" name="Picture 12">
+            <a:extLst>
+              <a:ext uri="{FF2B5EF4-FFF2-40B4-BE49-F238E27FC236}">
+                <a16:creationId xmlns:a16="http://schemas.microsoft.com/office/drawing/2014/main" id="{2E2EB8C9-8426-E4E7-EA09-54F3D2ADA420}"/>
+              </a:ext>
+            </a:extLst>
+          </p:cNvPr>
+          <p:cNvPicPr>
+            <a:picLocks noChangeAspect="1"/>
+          </p:cNvPicPr>
+          <p:nvPr/>
+        </p:nvPicPr>
+        <p:blipFill>
+          <a:blip r:embed="rId4"/>
+          <a:stretch>
+            <a:fillRect/>
+          </a:stretch>
+        </p:blipFill>
+        <p:spPr>
+          <a:xfrm>
+            <a:off x="6611714" y="2411960"/>
+            <a:ext cx="4938650" cy="2186732"/>
+          </a:xfrm>
+          <a:prstGeom prst="rect">
+            <a:avLst/>
+          </a:prstGeom>
+        </p:spPr>
+      </p:pic>
+      <p:pic>
+        <p:nvPicPr>
+          <p:cNvPr id="16" name="Content Placeholder 15">
+            <a:extLst>
+              <a:ext uri="{FF2B5EF4-FFF2-40B4-BE49-F238E27FC236}">
+                <a16:creationId xmlns:a16="http://schemas.microsoft.com/office/drawing/2014/main" id="{23857852-9CA9-83FB-0ECA-A634ECA34076}"/>
+              </a:ext>
+            </a:extLst>
+          </p:cNvPr>
+          <p:cNvPicPr>
+            <a:picLocks noGrp="1" noChangeAspect="1"/>
+          </p:cNvPicPr>
+          <p:nvPr>
+            <p:ph idx="1"/>
+          </p:nvPr>
+        </p:nvPicPr>
+        <p:blipFill>
+          <a:blip r:embed="rId5"/>
+          <a:stretch>
+            <a:fillRect/>
+          </a:stretch>
+        </p:blipFill>
+        <p:spPr>
+          <a:xfrm>
+            <a:off x="1873488" y="4391791"/>
+            <a:ext cx="8191640" cy="2348437"/>
+          </a:xfrm>
+          <a:prstGeom prst="rect">
+            <a:avLst/>
+          </a:prstGeom>
+        </p:spPr>
+      </p:pic>
+    </p:spTree>
+    <p:extLst>
+      <p:ext uri="{BB962C8B-B14F-4D97-AF65-F5344CB8AC3E}">
+        <p14:creationId xmlns:p14="http://schemas.microsoft.com/office/powerpoint/2010/main" val="40419377"/>
+      </p:ext>
+    </p:extLst>
+  </p:cSld>
+  <p:clrMapOvr>
+    <a:masterClrMapping/>
+  </p:clrMapOvr>
+</p:sld>
+</file>
+
+<file path=ppt/slides/slide11.xml><?xml version="1.0" encoding="utf-8"?>
+<p:sld xmlns:a="http://schemas.openxmlformats.org/drawingml/2006/main" xmlns:r="http://schemas.openxmlformats.org/officeDocument/2006/relationships" xmlns:p="http://schemas.openxmlformats.org/presentationml/2006/main">
+  <p:cSld>
+    <p:spTree>
+      <p:nvGrpSpPr>
+        <p:cNvPr id="1" name=""/>
+        <p:cNvGrpSpPr/>
+        <p:nvPr/>
+      </p:nvGrpSpPr>
+      <p:grpSpPr>
+        <a:xfrm>
+          <a:off x="0" y="0"/>
+          <a:ext cx="0" cy="0"/>
+          <a:chOff x="0" y="0"/>
+          <a:chExt cx="0" cy="0"/>
+        </a:xfrm>
+      </p:grpSpPr>
+      <p:pic>
+        <p:nvPicPr>
+          <p:cNvPr id="5" name="Image 4">
+            <a:extLst>
+              <a:ext uri="{FF2B5EF4-FFF2-40B4-BE49-F238E27FC236}">
+                <a16:creationId xmlns:a16="http://schemas.microsoft.com/office/drawing/2014/main" id="{37B6825B-57AC-A088-3310-414D35613C33}"/>
+              </a:ext>
+            </a:extLst>
+          </p:cNvPr>
+          <p:cNvPicPr>
+            <a:picLocks noChangeAspect="1"/>
+          </p:cNvPicPr>
+          <p:nvPr/>
+        </p:nvPicPr>
+        <p:blipFill>
+          <a:blip r:embed="rId2"/>
+          <a:stretch>
+            <a:fillRect/>
+          </a:stretch>
+        </p:blipFill>
+        <p:spPr>
+          <a:xfrm>
+            <a:off x="7501196" y="1078992"/>
+            <a:ext cx="2133974" cy="5422392"/>
+          </a:xfrm>
+          <a:prstGeom prst="rect">
+            <a:avLst/>
+          </a:prstGeom>
+        </p:spPr>
+      </p:pic>
+      <p:sp>
+        <p:nvSpPr>
+          <p:cNvPr id="6" name="ZoneTexte 5">
+            <a:extLst>
+              <a:ext uri="{FF2B5EF4-FFF2-40B4-BE49-F238E27FC236}">
+                <a16:creationId xmlns:a16="http://schemas.microsoft.com/office/drawing/2014/main" id="{886B79FE-62BA-86CD-0162-27296F1F7D17}"/>
+              </a:ext>
+            </a:extLst>
+          </p:cNvPr>
+          <p:cNvSpPr txBox="1"/>
+          <p:nvPr/>
+        </p:nvSpPr>
+        <p:spPr>
+          <a:xfrm>
+            <a:off x="1316736" y="1078992"/>
+            <a:ext cx="6108192" cy="2246769"/>
+          </a:xfrm>
+          <a:prstGeom prst="rect">
+            <a:avLst/>
+          </a:prstGeom>
+          <a:noFill/>
+        </p:spPr>
+        <p:txBody>
+          <a:bodyPr wrap="square" rtlCol="0">
+            <a:spAutoFit/>
+          </a:bodyPr>
+          <a:lstStyle/>
+          <a:p>
+            <a:r>
+              <a:rPr lang="fr-FR" sz="3200" b="1" u="sng"/>
+              <a:t>Organisation des programmes</a:t>
+            </a:r>
+          </a:p>
+          <a:p>
+            <a:endParaRPr lang="fr-FR"/>
+          </a:p>
+          <a:p>
+            <a:r>
+              <a:rPr lang="fr-FR"/>
+              <a:t>Du python pour le backend</a:t>
+            </a:r>
+          </a:p>
+          <a:p>
+            <a:endParaRPr lang="fr-FR"/>
+          </a:p>
+          <a:p>
+            <a:r>
+              <a:rPr lang="fr-FR"/>
+              <a:t>De l’HTML/CSS et du Javascript pour le frontend</a:t>
+            </a:r>
+          </a:p>
+          <a:p>
+            <a:endParaRPr lang="fr-FR"/>
+          </a:p>
+          <a:p>
+            <a:r>
+              <a:rPr lang="fr-FR"/>
+              <a:t>Les ressources (images du logo)</a:t>
+            </a:r>
+          </a:p>
+        </p:txBody>
+      </p:sp>
+      <p:sp>
+        <p:nvSpPr>
+          <p:cNvPr id="7" name="Titre 1">
+            <a:extLst>
+              <a:ext uri="{FF2B5EF4-FFF2-40B4-BE49-F238E27FC236}">
+                <a16:creationId xmlns:a16="http://schemas.microsoft.com/office/drawing/2014/main" id="{5EB98E6F-D206-2F6E-0DA1-A6C33AEC71AF}"/>
+              </a:ext>
+            </a:extLst>
+          </p:cNvPr>
+          <p:cNvSpPr txBox="1">
+            <a:spLocks/>
+          </p:cNvSpPr>
+          <p:nvPr/>
+        </p:nvSpPr>
+        <p:spPr>
+          <a:xfrm>
+            <a:off x="246887" y="109729"/>
+            <a:ext cx="10890929" cy="1097280"/>
+          </a:xfrm>
+          <a:prstGeom prst="rect">
+            <a:avLst/>
+          </a:prstGeom>
+        </p:spPr>
+        <p:txBody>
+          <a:bodyPr/>
+          <a:lstStyle>
+            <a:lvl1pPr algn="l" defTabSz="914400" rtl="0" eaLnBrk="1" latinLnBrk="0" hangingPunct="1">
+              <a:lnSpc>
+                <a:spcPct val="100000"/>
+              </a:lnSpc>
+              <a:spcBef>
+                <a:spcPct val="0"/>
+              </a:spcBef>
+              <a:buNone/>
+              <a:defRPr sz="4000" b="1" kern="1200">
+                <a:solidFill>
+                  <a:schemeClr val="tx1"/>
+                </a:solidFill>
+                <a:latin typeface="+mj-lt"/>
+                <a:ea typeface="+mj-ea"/>
+                <a:cs typeface="+mj-cs"/>
+              </a:defRPr>
+            </a:lvl1pPr>
+          </a:lstStyle>
+          <a:p>
+            <a:r>
+              <a:rPr lang="fr-FR" u="sng"/>
+              <a:t>Explications techniques de la réalisation</a:t>
+            </a:r>
+          </a:p>
+        </p:txBody>
+      </p:sp>
+      <p:pic>
+        <p:nvPicPr>
+          <p:cNvPr id="8" name="Image 7">
+            <a:extLst>
+              <a:ext uri="{FF2B5EF4-FFF2-40B4-BE49-F238E27FC236}">
+                <a16:creationId xmlns:a16="http://schemas.microsoft.com/office/drawing/2014/main" id="{06BEA553-B5EF-0511-8D20-1F014FA86977}"/>
+              </a:ext>
+            </a:extLst>
+          </p:cNvPr>
+          <p:cNvPicPr>
+            <a:picLocks noChangeAspect="1"/>
+          </p:cNvPicPr>
+          <p:nvPr/>
+        </p:nvPicPr>
+        <p:blipFill>
+          <a:blip r:embed="rId3"/>
+          <a:stretch>
+            <a:fillRect/>
+          </a:stretch>
+        </p:blipFill>
+        <p:spPr>
+          <a:xfrm>
+            <a:off x="10763109" y="6650"/>
+            <a:ext cx="1428891" cy="1303436"/>
+          </a:xfrm>
+          <a:prstGeom prst="rect">
+            <a:avLst/>
+          </a:prstGeom>
+        </p:spPr>
+      </p:pic>
+    </p:spTree>
+    <p:extLst>
+      <p:ext uri="{BB962C8B-B14F-4D97-AF65-F5344CB8AC3E}">
+        <p14:creationId xmlns:p14="http://schemas.microsoft.com/office/powerpoint/2010/main" val="2126760082"/>
+      </p:ext>
+    </p:extLst>
+  </p:cSld>
+  <p:clrMapOvr>
+    <a:masterClrMapping/>
+  </p:clrMapOvr>
+</p:sld>
+</file>
+
+<file path=ppt/slides/slide12.xml><?xml version="1.0" encoding="utf-8"?>
+<p:sld xmlns:a="http://schemas.openxmlformats.org/drawingml/2006/main" xmlns:r="http://schemas.openxmlformats.org/officeDocument/2006/relationships" xmlns:p="http://schemas.openxmlformats.org/presentationml/2006/main">
+  <p:cSld>
+    <p:spTree>
+      <p:nvGrpSpPr>
+        <p:cNvPr id="1" name="">
+          <a:extLst>
+            <a:ext uri="{FF2B5EF4-FFF2-40B4-BE49-F238E27FC236}">
+              <a16:creationId xmlns:a16="http://schemas.microsoft.com/office/drawing/2014/main" id="{271B9DEF-F848-E4FD-F260-AAB469DA5382}"/>
+            </a:ext>
+          </a:extLst>
+        </p:cNvPr>
+        <p:cNvGrpSpPr/>
+        <p:nvPr/>
+      </p:nvGrpSpPr>
+      <p:grpSpPr>
+        <a:xfrm>
+          <a:off x="0" y="0"/>
+          <a:ext cx="0" cy="0"/>
+          <a:chOff x="0" y="0"/>
+          <a:chExt cx="0" cy="0"/>
+        </a:xfrm>
+      </p:grpSpPr>
+      <p:sp>
+        <p:nvSpPr>
+          <p:cNvPr id="3" name="ZoneTexte 2">
+            <a:extLst>
+              <a:ext uri="{FF2B5EF4-FFF2-40B4-BE49-F238E27FC236}">
+                <a16:creationId xmlns:a16="http://schemas.microsoft.com/office/drawing/2014/main" id="{3076D1AD-9FE5-0DAE-648B-9266CFC7E3C7}"/>
+              </a:ext>
+            </a:extLst>
+          </p:cNvPr>
+          <p:cNvSpPr txBox="1"/>
+          <p:nvPr/>
+        </p:nvSpPr>
+        <p:spPr>
+          <a:xfrm>
+            <a:off x="1503106" y="551311"/>
+            <a:ext cx="9185788" cy="584775"/>
+          </a:xfrm>
+          <a:prstGeom prst="rect">
+            <a:avLst/>
+          </a:prstGeom>
+          <a:noFill/>
+        </p:spPr>
+        <p:txBody>
+          <a:bodyPr wrap="square">
+            <a:spAutoFit/>
+          </a:bodyPr>
+          <a:lstStyle/>
+          <a:p>
+            <a:r>
+              <a:rPr lang="fr-FR" sz="3200" b="1" u="sng">
+                <a:latin typeface="Aptos Display" panose="020B0004020202020204" pitchFamily="34" charset="0"/>
+              </a:rPr>
+              <a:t>Poursuites possibles : Fonctionnalités optionnelles</a:t>
+            </a:r>
+          </a:p>
+        </p:txBody>
+      </p:sp>
+      <p:sp>
+        <p:nvSpPr>
+          <p:cNvPr id="2" name="ZoneTexte 1">
+            <a:extLst>
+              <a:ext uri="{FF2B5EF4-FFF2-40B4-BE49-F238E27FC236}">
+                <a16:creationId xmlns:a16="http://schemas.microsoft.com/office/drawing/2014/main" id="{259BCCE2-C5D8-625D-91C8-F31112D2D6DF}"/>
+              </a:ext>
+            </a:extLst>
+          </p:cNvPr>
+          <p:cNvSpPr txBox="1"/>
+          <p:nvPr/>
+        </p:nvSpPr>
+        <p:spPr>
+          <a:xfrm>
+            <a:off x="4696917" y="2830135"/>
+            <a:ext cx="4810877" cy="2677656"/>
+          </a:xfrm>
+          <a:prstGeom prst="rect">
+            <a:avLst/>
+          </a:prstGeom>
+          <a:noFill/>
+        </p:spPr>
+        <p:txBody>
+          <a:bodyPr wrap="square" rtlCol="0">
+            <a:spAutoFit/>
+          </a:bodyPr>
+          <a:lstStyle/>
+          <a:p>
+            <a:pPr marL="285750" indent="-285750">
+              <a:buFont typeface="Arial" panose="020B0604020202020204" pitchFamily="34" charset="0"/>
+              <a:buChar char="•"/>
+            </a:pPr>
+            <a:r>
+              <a:rPr lang="fr-FR" sz="2800">
+                <a:latin typeface="Aptos Display" panose="020B0004020202020204" pitchFamily="34" charset="0"/>
+              </a:rPr>
+              <a:t>Envoi de fichier </a:t>
+            </a:r>
+          </a:p>
+          <a:p>
+            <a:pPr marL="285750" indent="-285750">
+              <a:buFont typeface="Arial" panose="020B0604020202020204" pitchFamily="34" charset="0"/>
+              <a:buChar char="•"/>
+            </a:pPr>
+            <a:r>
+              <a:rPr lang="fr-FR" sz="2800">
+                <a:latin typeface="Aptos Display" panose="020B0004020202020204" pitchFamily="34" charset="0"/>
+              </a:rPr>
+              <a:t>Supprimer les messages</a:t>
+            </a:r>
+          </a:p>
+          <a:p>
+            <a:pPr marL="285750" indent="-285750">
+              <a:buFont typeface="Arial" panose="020B0604020202020204" pitchFamily="34" charset="0"/>
+              <a:buChar char="•"/>
+            </a:pPr>
+            <a:r>
+              <a:rPr lang="fr-FR" sz="2800">
+                <a:latin typeface="Aptos Display" panose="020B0004020202020204" pitchFamily="34" charset="0"/>
+              </a:rPr>
+              <a:t>Confirmation de compte par email</a:t>
+            </a:r>
+          </a:p>
+          <a:p>
+            <a:pPr marL="285750" indent="-285750">
+              <a:buFont typeface="Arial" panose="020B0604020202020204" pitchFamily="34" charset="0"/>
+              <a:buChar char="•"/>
+            </a:pPr>
+            <a:r>
+              <a:rPr lang="fr-FR" sz="2800">
+                <a:latin typeface="Aptos Display" panose="020B0004020202020204" pitchFamily="34" charset="0"/>
+              </a:rPr>
+              <a:t>Voir ajout de contact</a:t>
+            </a:r>
+          </a:p>
+          <a:p>
+            <a:pPr marL="285750" indent="-285750">
+              <a:buFont typeface="Arial" panose="020B0604020202020204" pitchFamily="34" charset="0"/>
+              <a:buChar char="•"/>
+            </a:pPr>
+            <a:r>
+              <a:rPr lang="fr-FR" sz="2800">
+                <a:latin typeface="Aptos Display" panose="020B0004020202020204" pitchFamily="34" charset="0"/>
+              </a:rPr>
+              <a:t>Supprimer un contact</a:t>
+            </a:r>
+          </a:p>
+        </p:txBody>
+      </p:sp>
+      <p:pic>
+        <p:nvPicPr>
+          <p:cNvPr id="7" name="Image 6">
+            <a:extLst>
+              <a:ext uri="{FF2B5EF4-FFF2-40B4-BE49-F238E27FC236}">
+                <a16:creationId xmlns:a16="http://schemas.microsoft.com/office/drawing/2014/main" id="{1D01F8D7-E8A5-1410-E19B-94C7B249230E}"/>
+              </a:ext>
+            </a:extLst>
+          </p:cNvPr>
+          <p:cNvPicPr>
+            <a:picLocks noChangeAspect="1"/>
+          </p:cNvPicPr>
+          <p:nvPr/>
+        </p:nvPicPr>
+        <p:blipFill>
+          <a:blip r:embed="rId2"/>
+          <a:stretch>
+            <a:fillRect/>
+          </a:stretch>
+        </p:blipFill>
+        <p:spPr>
+          <a:xfrm>
+            <a:off x="562733" y="3230076"/>
+            <a:ext cx="2819644" cy="2034716"/>
+          </a:xfrm>
+          <a:prstGeom prst="rect">
+            <a:avLst/>
+          </a:prstGeom>
+        </p:spPr>
+      </p:pic>
+      <p:sp>
+        <p:nvSpPr>
+          <p:cNvPr id="8" name="ZoneTexte 7">
+            <a:extLst>
+              <a:ext uri="{FF2B5EF4-FFF2-40B4-BE49-F238E27FC236}">
+                <a16:creationId xmlns:a16="http://schemas.microsoft.com/office/drawing/2014/main" id="{4057975C-4149-C800-AB5D-7E4B647322D6}"/>
+              </a:ext>
+            </a:extLst>
+          </p:cNvPr>
+          <p:cNvSpPr txBox="1"/>
+          <p:nvPr/>
+        </p:nvSpPr>
+        <p:spPr>
+          <a:xfrm>
+            <a:off x="562734" y="5383359"/>
+            <a:ext cx="2819644" cy="923330"/>
+          </a:xfrm>
+          <a:prstGeom prst="rect">
+            <a:avLst/>
+          </a:prstGeom>
+          <a:noFill/>
+        </p:spPr>
+        <p:txBody>
+          <a:bodyPr wrap="square" rtlCol="0">
+            <a:spAutoFit/>
+          </a:bodyPr>
+          <a:lstStyle/>
+          <a:p>
+            <a:r>
+              <a:rPr lang="fr-FR"/>
+              <a:t>(Pas possible de voir un contact connecté ou déconnecté)</a:t>
+            </a:r>
+          </a:p>
+        </p:txBody>
+      </p:sp>
+      <p:pic>
+        <p:nvPicPr>
+          <p:cNvPr id="4" name="Image 3">
+            <a:extLst>
+              <a:ext uri="{FF2B5EF4-FFF2-40B4-BE49-F238E27FC236}">
+                <a16:creationId xmlns:a16="http://schemas.microsoft.com/office/drawing/2014/main" id="{29F9D560-72ED-7730-9C22-2996F28551AD}"/>
+              </a:ext>
+            </a:extLst>
+          </p:cNvPr>
+          <p:cNvPicPr>
+            <a:picLocks noChangeAspect="1"/>
+          </p:cNvPicPr>
+          <p:nvPr/>
+        </p:nvPicPr>
+        <p:blipFill>
+          <a:blip r:embed="rId3"/>
+          <a:stretch>
+            <a:fillRect/>
+          </a:stretch>
+        </p:blipFill>
+        <p:spPr>
+          <a:xfrm>
+            <a:off x="10763109" y="0"/>
+            <a:ext cx="1428891" cy="1303436"/>
+          </a:xfrm>
+          <a:prstGeom prst="rect">
+            <a:avLst/>
+          </a:prstGeom>
+        </p:spPr>
+      </p:pic>
+    </p:spTree>
+    <p:extLst>
+      <p:ext uri="{BB962C8B-B14F-4D97-AF65-F5344CB8AC3E}">
+        <p14:creationId xmlns:p14="http://schemas.microsoft.com/office/powerpoint/2010/main" val="1132041448"/>
+      </p:ext>
+    </p:extLst>
+  </p:cSld>
+  <p:clrMapOvr>
+    <a:masterClrMapping/>
+  </p:clrMapOvr>
+</p:sld>
+</file>
+
+<file path=ppt/slides/slide13.xml><?xml version="1.0" encoding="utf-8"?>
+<p:sld xmlns:a="http://schemas.openxmlformats.org/drawingml/2006/main" xmlns:r="http://schemas.openxmlformats.org/officeDocument/2006/relationships" xmlns:p="http://schemas.openxmlformats.org/presentationml/2006/main">
+  <p:cSld>
+    <p:spTree>
+      <p:nvGrpSpPr>
+        <p:cNvPr id="1" name=""/>
+        <p:cNvGrpSpPr/>
+        <p:nvPr/>
+      </p:nvGrpSpPr>
+      <p:grpSpPr>
+        <a:xfrm>
+          <a:off x="0" y="0"/>
+          <a:ext cx="0" cy="0"/>
+          <a:chOff x="0" y="0"/>
+          <a:chExt cx="0" cy="0"/>
+        </a:xfrm>
+      </p:grpSpPr>
+      <p:sp>
+        <p:nvSpPr>
+          <p:cNvPr id="2" name="Titre 1">
+            <a:extLst>
+              <a:ext uri="{FF2B5EF4-FFF2-40B4-BE49-F238E27FC236}">
+                <a16:creationId xmlns:a16="http://schemas.microsoft.com/office/drawing/2014/main" id="{6919809D-2E9C-029E-9B36-D8934CC7D838}"/>
+              </a:ext>
+            </a:extLst>
+          </p:cNvPr>
+          <p:cNvSpPr>
+            <a:spLocks noGrp="1"/>
+          </p:cNvSpPr>
+          <p:nvPr>
+            <p:ph type="title"/>
+          </p:nvPr>
+        </p:nvSpPr>
+        <p:spPr/>
+        <p:txBody>
+          <a:bodyPr/>
+          <a:lstStyle/>
+          <a:p>
+            <a:r>
+              <a:rPr lang="fr-FR" u="sng"/>
+              <a:t>Conclusion</a:t>
+            </a:r>
+          </a:p>
+        </p:txBody>
+      </p:sp>
+      <p:sp>
+        <p:nvSpPr>
+          <p:cNvPr id="4" name="Espace réservé du texte 3">
+            <a:extLst>
+              <a:ext uri="{FF2B5EF4-FFF2-40B4-BE49-F238E27FC236}">
+                <a16:creationId xmlns:a16="http://schemas.microsoft.com/office/drawing/2014/main" id="{7DCB222E-D1FA-F8D2-3333-CD4EE4A01197}"/>
+              </a:ext>
+            </a:extLst>
+          </p:cNvPr>
+          <p:cNvSpPr>
+            <a:spLocks noGrp="1"/>
+          </p:cNvSpPr>
+          <p:nvPr>
+            <p:ph type="body" sz="half" idx="2"/>
+          </p:nvPr>
+        </p:nvSpPr>
+        <p:spPr>
+          <a:xfrm>
+            <a:off x="7502893" y="202176"/>
+            <a:ext cx="3859397" cy="1771004"/>
+          </a:xfrm>
+        </p:spPr>
+        <p:txBody>
+          <a:bodyPr/>
+          <a:lstStyle/>
+          <a:p>
+            <a:r>
+              <a:rPr lang="fr-FR"/>
+              <a:t>Toutes les fonctionnalités principales sont présentes dans notre projet.</a:t>
+            </a:r>
+          </a:p>
+          <a:p>
+            <a:r>
+              <a:rPr lang="fr-FR"/>
+              <a:t>Quasiment toutes les fonctionnalités secondaires sont aussi présentes dans notre projet.</a:t>
+            </a:r>
+          </a:p>
+        </p:txBody>
+      </p:sp>
+      <p:pic>
+        <p:nvPicPr>
+          <p:cNvPr id="9" name="Image 8">
+            <a:extLst>
+              <a:ext uri="{FF2B5EF4-FFF2-40B4-BE49-F238E27FC236}">
+                <a16:creationId xmlns:a16="http://schemas.microsoft.com/office/drawing/2014/main" id="{90D154E6-CFDD-EE87-5090-6E2B45078C54}"/>
+              </a:ext>
+            </a:extLst>
+          </p:cNvPr>
+          <p:cNvPicPr>
+            <a:picLocks noChangeAspect="1"/>
+          </p:cNvPicPr>
+          <p:nvPr/>
+        </p:nvPicPr>
+        <p:blipFill>
+          <a:blip r:embed="rId2"/>
+          <a:stretch>
+            <a:fillRect/>
+          </a:stretch>
+        </p:blipFill>
+        <p:spPr>
+          <a:xfrm>
+            <a:off x="1181801" y="2132356"/>
+            <a:ext cx="9395652" cy="4643828"/>
+          </a:xfrm>
+          <a:prstGeom prst="rect">
+            <a:avLst/>
+          </a:prstGeom>
+        </p:spPr>
+      </p:pic>
+    </p:spTree>
+    <p:extLst>
+      <p:ext uri="{BB962C8B-B14F-4D97-AF65-F5344CB8AC3E}">
+        <p14:creationId xmlns:p14="http://schemas.microsoft.com/office/powerpoint/2010/main" val="1227815714"/>
       </p:ext>
     </p:extLst>
   </p:cSld>
@@ -4161,7 +5347,7 @@
           <a:lstStyle/>
           <a:p>
             <a:pPr algn="ctr"/>
-            <a:endParaRPr lang="fr-FR" noProof="0" dirty="0"/>
+            <a:endParaRPr lang="fr-FR" noProof="0"/>
           </a:p>
         </p:txBody>
       </p:sp>
@@ -4201,7 +5387,7 @@
               </a:spcAft>
             </a:pPr>
             <a:r>
-              <a:rPr lang="fr-FR" sz="4400" b="1" noProof="0" dirty="0">
+              <a:rPr lang="fr-FR" sz="4400" b="1" noProof="0">
                 <a:latin typeface="+mj-lt"/>
                 <a:ea typeface="+mj-ea"/>
                 <a:cs typeface="+mj-cs"/>
@@ -4292,7 +5478,7 @@
               <a:buChar char="•"/>
             </a:pPr>
             <a:r>
-              <a:rPr lang="fr-FR" sz="3200" dirty="0">
+              <a:rPr lang="fr-FR" sz="3200">
                 <a:latin typeface="Aptos Display" panose="020B0004020202020204" pitchFamily="34" charset="0"/>
               </a:rPr>
               <a:t>Présentation du projet </a:t>
@@ -4304,7 +5490,7 @@
               <a:buChar char="•"/>
             </a:pPr>
             <a:r>
-              <a:rPr lang="fr-FR" sz="3200" dirty="0">
+              <a:rPr lang="fr-FR" sz="3200">
                 <a:latin typeface="Aptos Display" panose="020B0004020202020204" pitchFamily="34" charset="0"/>
               </a:rPr>
               <a:t>Outils utilisés </a:t>
@@ -4316,7 +5502,7 @@
               <a:buChar char="•"/>
             </a:pPr>
             <a:r>
-              <a:rPr lang="fr-FR" sz="3200" dirty="0">
+              <a:rPr lang="fr-FR" sz="3200">
                 <a:latin typeface="Aptos Display" panose="020B0004020202020204" pitchFamily="34" charset="0"/>
               </a:rPr>
               <a:t>Explications techniques de la réalisation </a:t>
@@ -4328,7 +5514,7 @@
               <a:buChar char="•"/>
             </a:pPr>
             <a:r>
-              <a:rPr lang="fr-FR" sz="3200" dirty="0">
+              <a:rPr lang="fr-FR" sz="3200">
                 <a:latin typeface="Aptos Display" panose="020B0004020202020204" pitchFamily="34" charset="0"/>
               </a:rPr>
               <a:t>Poursuites possibles : Fonctionnalités optionnelles</a:t>
@@ -4340,7 +5526,7 @@
               <a:buChar char="•"/>
             </a:pPr>
             <a:r>
-              <a:rPr lang="fr-FR" sz="3200" dirty="0">
+              <a:rPr lang="fr-FR" sz="3200">
                 <a:latin typeface="Aptos Display" panose="020B0004020202020204" pitchFamily="34" charset="0"/>
               </a:rPr>
               <a:t>Conclusion</a:t>
@@ -4443,7 +5629,7 @@
           <a:lstStyle/>
           <a:p>
             <a:r>
-              <a:rPr lang="fr-FR" sz="3200" b="1" u="sng" dirty="0">
+              <a:rPr lang="fr-FR" sz="3200" b="1" u="sng">
                 <a:latin typeface="Aptos Display" panose="020B0004020202020204" pitchFamily="34" charset="0"/>
               </a:rPr>
               <a:t>Présentation du projet </a:t>
@@ -4510,10 +5696,10 @@
           <a:lstStyle/>
           <a:p>
             <a:r>
-              <a:rPr lang="fr-FR" sz="2400" b="1" u="sng" dirty="0">
+              <a:rPr lang="fr-FR" sz="2400" b="1" u="sng">
                 <a:latin typeface="Aptos Display" panose="020B0004020202020204" pitchFamily="34" charset="0"/>
               </a:rPr>
-              <a:t>un chat réseaux multi-utilisateur</a:t>
+              <a:t>un chat réseau multi-utilisateur</a:t>
             </a:r>
           </a:p>
         </p:txBody>
@@ -4547,7 +5733,7 @@
           <a:lstStyle/>
           <a:p>
             <a:r>
-              <a:rPr lang="fr-FR" b="1" u="sng" dirty="0">
+              <a:rPr lang="fr-FR" b="1" u="sng">
                 <a:latin typeface="Aptos Display" panose="020B0004020202020204" pitchFamily="34" charset="0"/>
               </a:rPr>
               <a:t>Fonctionnalités principales : </a:t>
@@ -4559,7 +5745,7 @@
               <a:buChar char="•"/>
             </a:pPr>
             <a:r>
-              <a:rPr lang="fr-FR" dirty="0">
+              <a:rPr lang="fr-FR">
                 <a:latin typeface="Aptos Display" panose="020B0004020202020204" pitchFamily="34" charset="0"/>
               </a:rPr>
               <a:t>Se connecter </a:t>
@@ -4571,7 +5757,7 @@
               <a:buChar char="•"/>
             </a:pPr>
             <a:r>
-              <a:rPr lang="fr-FR" dirty="0">
+              <a:rPr lang="fr-FR">
                 <a:latin typeface="Aptos Display" panose="020B0004020202020204" pitchFamily="34" charset="0"/>
               </a:rPr>
               <a:t>Créer un pseudo </a:t>
@@ -4583,7 +5769,7 @@
               <a:buChar char="•"/>
             </a:pPr>
             <a:r>
-              <a:rPr lang="fr-FR" dirty="0">
+              <a:rPr lang="fr-FR">
                 <a:latin typeface="Aptos Display" panose="020B0004020202020204" pitchFamily="34" charset="0"/>
               </a:rPr>
               <a:t>Discuter </a:t>
@@ -4595,7 +5781,7 @@
               <a:buChar char="•"/>
             </a:pPr>
             <a:r>
-              <a:rPr lang="fr-FR" dirty="0">
+              <a:rPr lang="fr-FR">
                 <a:latin typeface="Aptos Display" panose="020B0004020202020204" pitchFamily="34" charset="0"/>
               </a:rPr>
               <a:t>Ajouter contact </a:t>
@@ -4607,7 +5793,7 @@
               <a:buChar char="•"/>
             </a:pPr>
             <a:r>
-              <a:rPr lang="fr-FR" dirty="0">
+              <a:rPr lang="fr-FR">
                 <a:latin typeface="Aptos Display" panose="020B0004020202020204" pitchFamily="34" charset="0"/>
               </a:rPr>
               <a:t>Interface graphique </a:t>
@@ -4644,7 +5830,7 @@
           <a:lstStyle/>
           <a:p>
             <a:r>
-              <a:rPr lang="fr-FR" b="1" u="sng" dirty="0">
+              <a:rPr lang="fr-FR" b="1" u="sng">
                 <a:latin typeface="Aptos Display" panose="020B0004020202020204" pitchFamily="34" charset="0"/>
               </a:rPr>
               <a:t>Fonctionnalités secondaires : </a:t>
@@ -4656,7 +5842,7 @@
               <a:buChar char="•"/>
             </a:pPr>
             <a:r>
-              <a:rPr lang="fr-FR" dirty="0">
+              <a:rPr lang="fr-FR">
                 <a:latin typeface="Aptos Display" panose="020B0004020202020204" pitchFamily="34" charset="0"/>
               </a:rPr>
               <a:t>Envoyer des images et des fichiers </a:t>
@@ -4668,7 +5854,7 @@
               <a:buChar char="•"/>
             </a:pPr>
             <a:r>
-              <a:rPr lang="fr-FR" dirty="0">
+              <a:rPr lang="fr-FR">
                 <a:latin typeface="Aptos Display" panose="020B0004020202020204" pitchFamily="34" charset="0"/>
               </a:rPr>
               <a:t>Création des groupes </a:t>
@@ -4680,7 +5866,7 @@
               <a:buChar char="•"/>
             </a:pPr>
             <a:r>
-              <a:rPr lang="fr-FR" dirty="0">
+              <a:rPr lang="fr-FR">
                 <a:latin typeface="Aptos Display" panose="020B0004020202020204" pitchFamily="34" charset="0"/>
               </a:rPr>
               <a:t>Historique des messages </a:t>
@@ -4692,7 +5878,7 @@
               <a:buChar char="•"/>
             </a:pPr>
             <a:r>
-              <a:rPr lang="fr-FR" dirty="0">
+              <a:rPr lang="fr-FR">
                 <a:latin typeface="Aptos Display" panose="020B0004020202020204" pitchFamily="34" charset="0"/>
               </a:rPr>
               <a:t>Envoyer des gifs </a:t>
@@ -4704,17 +5890,17 @@
               <a:buChar char="•"/>
             </a:pPr>
             <a:r>
-              <a:rPr lang="fr-FR" dirty="0">
+              <a:rPr lang="fr-FR">
                 <a:latin typeface="Aptos Display" panose="020B0004020202020204" pitchFamily="34" charset="0"/>
               </a:rPr>
               <a:t>Voir les contacts connectés/déconnectés</a:t>
             </a:r>
-            <a:endParaRPr lang="fr-FR" b="1" u="sng" dirty="0">
+            <a:endParaRPr lang="fr-FR" b="1" u="sng">
               <a:latin typeface="Aptos Display" panose="020B0004020202020204" pitchFamily="34" charset="0"/>
             </a:endParaRPr>
           </a:p>
           <a:p>
-            <a:endParaRPr lang="fr-FR" dirty="0"/>
+            <a:endParaRPr lang="fr-FR"/>
           </a:p>
         </p:txBody>
       </p:sp>
@@ -4783,7 +5969,7 @@
           <a:lstStyle/>
           <a:p>
             <a:r>
-              <a:rPr lang="fr-FR" sz="3200" b="1" u="sng" dirty="0">
+              <a:rPr lang="fr-FR" sz="3200" b="1" u="sng">
                 <a:latin typeface="Aptos Display" panose="020B0004020202020204" pitchFamily="34" charset="0"/>
               </a:rPr>
               <a:t>Présentation du projet </a:t>
@@ -4791,12 +5977,116 @@
           </a:p>
         </p:txBody>
       </p:sp>
+      <p:sp>
+        <p:nvSpPr>
+          <p:cNvPr id="2" name="ZoneTexte 1">
+            <a:extLst>
+              <a:ext uri="{FF2B5EF4-FFF2-40B4-BE49-F238E27FC236}">
+                <a16:creationId xmlns:a16="http://schemas.microsoft.com/office/drawing/2014/main" id="{617EF53E-7251-382D-3FC2-A65571B3DE37}"/>
+              </a:ext>
+            </a:extLst>
+          </p:cNvPr>
+          <p:cNvSpPr txBox="1"/>
+          <p:nvPr/>
+        </p:nvSpPr>
+        <p:spPr>
+          <a:xfrm>
+            <a:off x="3378312" y="1270891"/>
+            <a:ext cx="4784067" cy="461665"/>
+          </a:xfrm>
+          <a:prstGeom prst="rect">
+            <a:avLst/>
+          </a:prstGeom>
+          <a:noFill/>
+        </p:spPr>
+        <p:txBody>
+          <a:bodyPr wrap="none" rtlCol="0">
+            <a:spAutoFit/>
+          </a:bodyPr>
+          <a:lstStyle/>
+          <a:p>
+            <a:r>
+              <a:rPr lang="fr-FR" sz="2400" b="1" u="sng">
+                <a:latin typeface="Aptos Display" panose="020B0004020202020204" pitchFamily="34" charset="0"/>
+              </a:rPr>
+              <a:t>Connexion et sécurité des comptes</a:t>
+            </a:r>
+          </a:p>
+        </p:txBody>
+      </p:sp>
+      <p:sp>
+        <p:nvSpPr>
+          <p:cNvPr id="4" name="ZoneTexte 3">
+            <a:extLst>
+              <a:ext uri="{FF2B5EF4-FFF2-40B4-BE49-F238E27FC236}">
+                <a16:creationId xmlns:a16="http://schemas.microsoft.com/office/drawing/2014/main" id="{6B4F750B-FC1B-FD2A-5231-8FED5B644F90}"/>
+              </a:ext>
+            </a:extLst>
+          </p:cNvPr>
+          <p:cNvSpPr txBox="1"/>
+          <p:nvPr/>
+        </p:nvSpPr>
+        <p:spPr>
+          <a:xfrm>
+            <a:off x="1500103" y="2295178"/>
+            <a:ext cx="2070118" cy="923330"/>
+          </a:xfrm>
+          <a:prstGeom prst="rect">
+            <a:avLst/>
+          </a:prstGeom>
+          <a:noFill/>
+        </p:spPr>
+        <p:txBody>
+          <a:bodyPr wrap="none" rtlCol="0">
+            <a:spAutoFit/>
+          </a:bodyPr>
+          <a:lstStyle/>
+          <a:p>
+            <a:r>
+              <a:rPr lang="fr-FR" b="1" u="sng">
+                <a:latin typeface="Aptos Display" panose="020B0004020202020204" pitchFamily="34" charset="0"/>
+              </a:rPr>
+              <a:t>Connexion</a:t>
+            </a:r>
+            <a:r>
+              <a:rPr lang="fr-FR" u="sng">
+                <a:latin typeface="Aptos Display" panose="020B0004020202020204" pitchFamily="34" charset="0"/>
+              </a:rPr>
+              <a:t> :</a:t>
+            </a:r>
+          </a:p>
+          <a:p>
+            <a:pPr marL="285750" indent="-285750">
+              <a:buFont typeface="Arial" panose="020B0604020202020204" pitchFamily="34" charset="0"/>
+              <a:buChar char="•"/>
+            </a:pPr>
+            <a:r>
+              <a:rPr lang="fr-FR">
+                <a:latin typeface="Aptos Display" panose="020B0004020202020204" pitchFamily="34" charset="0"/>
+              </a:rPr>
+              <a:t>Nom d’utilisateur</a:t>
+            </a:r>
+          </a:p>
+          <a:p>
+            <a:pPr marL="285750" indent="-285750">
+              <a:buFont typeface="Arial" panose="020B0604020202020204" pitchFamily="34" charset="0"/>
+              <a:buChar char="•"/>
+            </a:pPr>
+            <a:r>
+              <a:rPr lang="fr-FR">
+                <a:latin typeface="Aptos Display" panose="020B0004020202020204" pitchFamily="34" charset="0"/>
+              </a:rPr>
+              <a:t>Mot de passe </a:t>
+            </a:r>
+          </a:p>
+        </p:txBody>
+      </p:sp>
       <p:pic>
         <p:nvPicPr>
-          <p:cNvPr id="5" name="Image 4">
-            <a:extLst>
-              <a:ext uri="{FF2B5EF4-FFF2-40B4-BE49-F238E27FC236}">
-                <a16:creationId xmlns:a16="http://schemas.microsoft.com/office/drawing/2014/main" id="{8E784506-60E9-55EB-79FE-46FE6668830C}"/>
+          <p:cNvPr id="10" name="Image 9">
+            <a:extLst>
+              <a:ext uri="{FF2B5EF4-FFF2-40B4-BE49-F238E27FC236}">
+                <a16:creationId xmlns:a16="http://schemas.microsoft.com/office/drawing/2014/main" id="{49549AC7-6C61-671C-8646-EE4387E4BA3F}"/>
               </a:ext>
             </a:extLst>
           </p:cNvPr>
@@ -4813,8 +6103,8 @@
         </p:blipFill>
         <p:spPr>
           <a:xfrm>
-            <a:off x="9843860" y="122751"/>
-            <a:ext cx="1859477" cy="1696217"/>
+            <a:off x="952192" y="3429000"/>
+            <a:ext cx="3147860" cy="3215949"/>
           </a:xfrm>
           <a:prstGeom prst="rect">
             <a:avLst/>
@@ -4823,10 +6113,10 @@
       </p:pic>
       <p:sp>
         <p:nvSpPr>
-          <p:cNvPr id="6" name="ZoneTexte 5">
-            <a:extLst>
-              <a:ext uri="{FF2B5EF4-FFF2-40B4-BE49-F238E27FC236}">
-                <a16:creationId xmlns:a16="http://schemas.microsoft.com/office/drawing/2014/main" id="{7D028D47-CE76-52F6-0C42-C7414A6ECAB1}"/>
+          <p:cNvPr id="7" name="ZoneTexte 6">
+            <a:extLst>
+              <a:ext uri="{FF2B5EF4-FFF2-40B4-BE49-F238E27FC236}">
+                <a16:creationId xmlns:a16="http://schemas.microsoft.com/office/drawing/2014/main" id="{C70410CA-2EDE-6F52-9FE0-A43D0E398AEE}"/>
               </a:ext>
             </a:extLst>
           </p:cNvPr>
@@ -4835,8 +6125,8 @@
         </p:nvSpPr>
         <p:spPr>
           <a:xfrm>
-            <a:off x="488663" y="1040058"/>
-            <a:ext cx="4407802" cy="461665"/>
+            <a:off x="5157739" y="3218508"/>
+            <a:ext cx="2703151" cy="2585323"/>
           </a:xfrm>
           <a:prstGeom prst="rect">
             <a:avLst/>
@@ -4850,130 +6140,69 @@
           <a:lstStyle/>
           <a:p>
             <a:r>
-              <a:rPr lang="fr-FR" sz="2400" b="1" u="sng" dirty="0">
+              <a:rPr lang="fr-FR" b="1" u="sng">
                 <a:latin typeface="Aptos Display" panose="020B0004020202020204" pitchFamily="34" charset="0"/>
               </a:rPr>
-              <a:t>un chat réseaux </a:t>
-            </a:r>
-            <a:r>
-              <a:rPr lang="fr-FR" sz="2000" b="1" u="sng" dirty="0">
-                <a:latin typeface="Aptos Display" panose="020B0004020202020204" pitchFamily="34" charset="0"/>
-              </a:rPr>
-              <a:t>multi-utilisateur</a:t>
-            </a:r>
-          </a:p>
-        </p:txBody>
-      </p:sp>
-      <p:sp>
-        <p:nvSpPr>
-          <p:cNvPr id="2" name="ZoneTexte 1">
-            <a:extLst>
-              <a:ext uri="{FF2B5EF4-FFF2-40B4-BE49-F238E27FC236}">
-                <a16:creationId xmlns:a16="http://schemas.microsoft.com/office/drawing/2014/main" id="{617EF53E-7251-382D-3FC2-A65571B3DE37}"/>
-              </a:ext>
-            </a:extLst>
-          </p:cNvPr>
-          <p:cNvSpPr txBox="1"/>
-          <p:nvPr/>
-        </p:nvSpPr>
-        <p:spPr>
-          <a:xfrm>
-            <a:off x="3076823" y="1623021"/>
-            <a:ext cx="4784067" cy="461665"/>
-          </a:xfrm>
-          <a:prstGeom prst="rect">
-            <a:avLst/>
-          </a:prstGeom>
-          <a:noFill/>
-        </p:spPr>
-        <p:txBody>
-          <a:bodyPr wrap="none" rtlCol="0">
-            <a:spAutoFit/>
-          </a:bodyPr>
-          <a:lstStyle/>
-          <a:p>
-            <a:r>
-              <a:rPr lang="fr-FR" sz="2400" b="1" u="sng" dirty="0">
-                <a:latin typeface="Aptos Display" panose="020B0004020202020204" pitchFamily="34" charset="0"/>
-              </a:rPr>
-              <a:t>Connexion et sécurité des comptes</a:t>
-            </a:r>
-          </a:p>
-        </p:txBody>
-      </p:sp>
-      <p:sp>
-        <p:nvSpPr>
-          <p:cNvPr id="4" name="ZoneTexte 3">
-            <a:extLst>
-              <a:ext uri="{FF2B5EF4-FFF2-40B4-BE49-F238E27FC236}">
-                <a16:creationId xmlns:a16="http://schemas.microsoft.com/office/drawing/2014/main" id="{6B4F750B-FC1B-FD2A-5231-8FED5B644F90}"/>
-              </a:ext>
-            </a:extLst>
-          </p:cNvPr>
-          <p:cNvSpPr txBox="1"/>
-          <p:nvPr/>
-        </p:nvSpPr>
-        <p:spPr>
-          <a:xfrm>
-            <a:off x="1500103" y="2295178"/>
-            <a:ext cx="2052037" cy="923330"/>
-          </a:xfrm>
-          <a:prstGeom prst="rect">
-            <a:avLst/>
-          </a:prstGeom>
-          <a:noFill/>
-        </p:spPr>
-        <p:txBody>
-          <a:bodyPr wrap="none" rtlCol="0">
-            <a:spAutoFit/>
-          </a:bodyPr>
-          <a:lstStyle/>
-          <a:p>
-            <a:r>
-              <a:rPr lang="fr-FR" b="1" u="sng" dirty="0">
-                <a:latin typeface="Aptos Display" panose="020B0004020202020204" pitchFamily="34" charset="0"/>
-              </a:rPr>
-              <a:t>Connexion</a:t>
-            </a:r>
-            <a:r>
-              <a:rPr lang="fr-FR" u="sng" dirty="0">
+              <a:t>Inscription</a:t>
+            </a:r>
+            <a:r>
+              <a:rPr lang="fr-FR" u="sng">
                 <a:latin typeface="Aptos Display" panose="020B0004020202020204" pitchFamily="34" charset="0"/>
               </a:rPr>
               <a:t> :</a:t>
             </a:r>
           </a:p>
           <a:p>
-            <a:pPr marL="285750" indent="-285750">
-              <a:buFont typeface="Arial" panose="020B0604020202020204" pitchFamily="34" charset="0"/>
-              <a:buChar char="•"/>
-            </a:pPr>
-            <a:r>
-              <a:rPr lang="fr-FR" dirty="0">
-                <a:latin typeface="Aptos Display" panose="020B0004020202020204" pitchFamily="34" charset="0"/>
+            <a:r>
+              <a:rPr lang="fr-FR">
+                <a:latin typeface="Aptos" panose="020B0004020202020204" pitchFamily="34" charset="0"/>
               </a:rPr>
-              <a:t>Nom d’utilisation</a:t>
-            </a:r>
-          </a:p>
-          <a:p>
-            <a:pPr marL="285750" indent="-285750">
-              <a:buFont typeface="Arial" panose="020B0604020202020204" pitchFamily="34" charset="0"/>
-              <a:buChar char="•"/>
-            </a:pPr>
-            <a:r>
-              <a:rPr lang="fr-FR" dirty="0">
-                <a:latin typeface="Aptos Display" panose="020B0004020202020204" pitchFamily="34" charset="0"/>
+              <a:t>Restriction sur les mots de passe : </a:t>
+            </a:r>
+          </a:p>
+          <a:p>
+            <a:r>
+              <a:rPr lang="fr-FR">
+                <a:latin typeface="Aptos" panose="020B0004020202020204" pitchFamily="34" charset="0"/>
               </a:rPr>
-              <a:t>Mot de passe </a:t>
-            </a:r>
+              <a:t>• 8 caractères minimum • Une majuscule </a:t>
+            </a:r>
+          </a:p>
+          <a:p>
+            <a:r>
+              <a:rPr lang="fr-FR">
+                <a:latin typeface="Aptos" panose="020B0004020202020204" pitchFamily="34" charset="0"/>
+              </a:rPr>
+              <a:t>• Une minuscule </a:t>
+            </a:r>
+          </a:p>
+          <a:p>
+            <a:r>
+              <a:rPr lang="fr-FR">
+                <a:latin typeface="Aptos" panose="020B0004020202020204" pitchFamily="34" charset="0"/>
+              </a:rPr>
+              <a:t>• Un chiffre </a:t>
+            </a:r>
+          </a:p>
+          <a:p>
+            <a:r>
+              <a:rPr lang="fr-FR">
+                <a:latin typeface="Aptos" panose="020B0004020202020204" pitchFamily="34" charset="0"/>
+              </a:rPr>
+              <a:t>• Un caractère spécial (@, ?, %, !, …)</a:t>
+            </a:r>
+            <a:endParaRPr lang="fr-FR" u="sng">
+              <a:latin typeface="Aptos" panose="020B0004020202020204" pitchFamily="34" charset="0"/>
+            </a:endParaRPr>
           </a:p>
         </p:txBody>
       </p:sp>
       <p:pic>
         <p:nvPicPr>
-          <p:cNvPr id="10" name="Image 9">
-            <a:extLst>
-              <a:ext uri="{FF2B5EF4-FFF2-40B4-BE49-F238E27FC236}">
-                <a16:creationId xmlns:a16="http://schemas.microsoft.com/office/drawing/2014/main" id="{49549AC7-6C61-671C-8646-EE4387E4BA3F}"/>
+          <p:cNvPr id="8" name="Image 7">
+            <a:extLst>
+              <a:ext uri="{FF2B5EF4-FFF2-40B4-BE49-F238E27FC236}">
+                <a16:creationId xmlns:a16="http://schemas.microsoft.com/office/drawing/2014/main" id="{7044476A-A6F8-600B-FCD7-1F2F0AB475CC}"/>
               </a:ext>
             </a:extLst>
           </p:cNvPr>
@@ -4984,122 +6213,6 @@
         </p:nvPicPr>
         <p:blipFill>
           <a:blip r:embed="rId3"/>
-          <a:stretch>
-            <a:fillRect/>
-          </a:stretch>
-        </p:blipFill>
-        <p:spPr>
-          <a:xfrm>
-            <a:off x="952192" y="3429000"/>
-            <a:ext cx="3147860" cy="3215949"/>
-          </a:xfrm>
-          <a:prstGeom prst="rect">
-            <a:avLst/>
-          </a:prstGeom>
-        </p:spPr>
-      </p:pic>
-      <p:sp>
-        <p:nvSpPr>
-          <p:cNvPr id="7" name="ZoneTexte 6">
-            <a:extLst>
-              <a:ext uri="{FF2B5EF4-FFF2-40B4-BE49-F238E27FC236}">
-                <a16:creationId xmlns:a16="http://schemas.microsoft.com/office/drawing/2014/main" id="{C70410CA-2EDE-6F52-9FE0-A43D0E398AEE}"/>
-              </a:ext>
-            </a:extLst>
-          </p:cNvPr>
-          <p:cNvSpPr txBox="1"/>
-          <p:nvPr/>
-        </p:nvSpPr>
-        <p:spPr>
-          <a:xfrm>
-            <a:off x="5157739" y="3218508"/>
-            <a:ext cx="2703151" cy="2585323"/>
-          </a:xfrm>
-          <a:prstGeom prst="rect">
-            <a:avLst/>
-          </a:prstGeom>
-          <a:noFill/>
-        </p:spPr>
-        <p:txBody>
-          <a:bodyPr wrap="square" rtlCol="0">
-            <a:spAutoFit/>
-          </a:bodyPr>
-          <a:lstStyle/>
-          <a:p>
-            <a:r>
-              <a:rPr lang="fr-FR" b="1" u="sng" dirty="0">
-                <a:latin typeface="Aptos Display" panose="020B0004020202020204" pitchFamily="34" charset="0"/>
-              </a:rPr>
-              <a:t>Inscription</a:t>
-            </a:r>
-            <a:r>
-              <a:rPr lang="fr-FR" u="sng" dirty="0">
-                <a:latin typeface="Aptos Display" panose="020B0004020202020204" pitchFamily="34" charset="0"/>
-              </a:rPr>
-              <a:t> :</a:t>
-            </a:r>
-          </a:p>
-          <a:p>
-            <a:r>
-              <a:rPr lang="fr-FR" dirty="0">
-                <a:latin typeface="Aptos" panose="020B0004020202020204" pitchFamily="34" charset="0"/>
-              </a:rPr>
-              <a:t>Restriction sur les mots de passe : </a:t>
-            </a:r>
-          </a:p>
-          <a:p>
-            <a:r>
-              <a:rPr lang="fr-FR" dirty="0">
-                <a:latin typeface="Aptos" panose="020B0004020202020204" pitchFamily="34" charset="0"/>
-              </a:rPr>
-              <a:t>• 8 caractères minimum • Une majuscule </a:t>
-            </a:r>
-          </a:p>
-          <a:p>
-            <a:r>
-              <a:rPr lang="fr-FR" dirty="0">
-                <a:latin typeface="Aptos" panose="020B0004020202020204" pitchFamily="34" charset="0"/>
-              </a:rPr>
-              <a:t>• Une minuscule </a:t>
-            </a:r>
-          </a:p>
-          <a:p>
-            <a:r>
-              <a:rPr lang="fr-FR" dirty="0">
-                <a:latin typeface="Aptos" panose="020B0004020202020204" pitchFamily="34" charset="0"/>
-              </a:rPr>
-              <a:t>• Un chiffre </a:t>
-            </a:r>
-          </a:p>
-          <a:p>
-            <a:r>
-              <a:rPr lang="fr-FR" dirty="0">
-                <a:latin typeface="Aptos" panose="020B0004020202020204" pitchFamily="34" charset="0"/>
-              </a:rPr>
-              <a:t>• Un caractère spécial (@, ?, %, !, …)</a:t>
-            </a:r>
-            <a:endParaRPr lang="fr-FR" u="sng" dirty="0">
-              <a:latin typeface="Aptos" panose="020B0004020202020204" pitchFamily="34" charset="0"/>
-            </a:endParaRPr>
-          </a:p>
-        </p:txBody>
-      </p:sp>
-      <p:pic>
-        <p:nvPicPr>
-          <p:cNvPr id="8" name="Image 7">
-            <a:extLst>
-              <a:ext uri="{FF2B5EF4-FFF2-40B4-BE49-F238E27FC236}">
-                <a16:creationId xmlns:a16="http://schemas.microsoft.com/office/drawing/2014/main" id="{7044476A-A6F8-600B-FCD7-1F2F0AB475CC}"/>
-              </a:ext>
-            </a:extLst>
-          </p:cNvPr>
-          <p:cNvPicPr>
-            <a:picLocks noChangeAspect="1"/>
-          </p:cNvPicPr>
-          <p:nvPr/>
-        </p:nvPicPr>
-        <p:blipFill>
-          <a:blip r:embed="rId4"/>
           <a:stretch>
             <a:fillRect/>
           </a:stretch>
@@ -5179,7 +6292,7 @@
           <a:lstStyle/>
           <a:p>
             <a:r>
-              <a:rPr lang="fr-FR" sz="3200" b="1" u="sng" dirty="0">
+              <a:rPr lang="fr-FR" sz="3200" b="1" u="sng">
                 <a:latin typeface="Aptos Display" panose="020B0004020202020204" pitchFamily="34" charset="0"/>
               </a:rPr>
               <a:t>Présentation du projet </a:t>
@@ -5209,7 +6322,7 @@
         </p:blipFill>
         <p:spPr>
           <a:xfrm>
-            <a:off x="10241280" y="481680"/>
+            <a:off x="10763109" y="0"/>
             <a:ext cx="1428891" cy="1303436"/>
           </a:xfrm>
           <a:prstGeom prst="rect">
@@ -5293,7 +6406,7 @@
           <a:lstStyle/>
           <a:p>
             <a:r>
-              <a:rPr lang="fr-FR" sz="2400" u="sng" dirty="0"/>
+              <a:rPr lang="fr-FR" sz="2400" u="sng"/>
               <a:t>Diagramme de cas d’utilisation</a:t>
             </a:r>
           </a:p>
@@ -5363,6 +6476,7 @@
           </a:bodyPr>
           <a:lstStyle/>
           <a:p>
+            <a:pPr algn="ctr"/>
             <a:r>
               <a:rPr lang="fr-FR" sz="3200" b="1" u="sng">
                 <a:latin typeface="Aptos Display" panose="020B0004020202020204" pitchFamily="34" charset="0"/>
@@ -5372,36 +6486,6 @@
           </a:p>
         </p:txBody>
       </p:sp>
-      <p:pic>
-        <p:nvPicPr>
-          <p:cNvPr id="5" name="Image 4">
-            <a:extLst>
-              <a:ext uri="{FF2B5EF4-FFF2-40B4-BE49-F238E27FC236}">
-                <a16:creationId xmlns:a16="http://schemas.microsoft.com/office/drawing/2014/main" id="{7DA818D5-3C36-D9C4-4AA4-61B4811E1717}"/>
-              </a:ext>
-            </a:extLst>
-          </p:cNvPr>
-          <p:cNvPicPr>
-            <a:picLocks noChangeAspect="1"/>
-          </p:cNvPicPr>
-          <p:nvPr/>
-        </p:nvPicPr>
-        <p:blipFill>
-          <a:blip r:embed="rId2"/>
-          <a:stretch>
-            <a:fillRect/>
-          </a:stretch>
-        </p:blipFill>
-        <p:spPr>
-          <a:xfrm>
-            <a:off x="10241280" y="481680"/>
-            <a:ext cx="1428891" cy="1303436"/>
-          </a:xfrm>
-          <a:prstGeom prst="rect">
-            <a:avLst/>
-          </a:prstGeom>
-        </p:spPr>
-      </p:pic>
       <p:sp>
         <p:nvSpPr>
           <p:cNvPr id="2" name="ZoneTexte 1">
@@ -5416,8 +6500,8 @@
         </p:nvSpPr>
         <p:spPr>
           <a:xfrm>
-            <a:off x="3944608" y="902565"/>
-            <a:ext cx="3502882" cy="461665"/>
+            <a:off x="4267614" y="900741"/>
+            <a:ext cx="3656770" cy="461665"/>
           </a:xfrm>
           <a:prstGeom prst="rect">
             <a:avLst/>
@@ -5430,9 +6514,10 @@
           </a:bodyPr>
           <a:lstStyle/>
           <a:p>
-            <a:r>
-              <a:rPr lang="fr-FR" sz="2400" u="sng" dirty="0"/>
-              <a:t>Diagramme de séquence</a:t>
+            <a:pPr algn="ctr"/>
+            <a:r>
+              <a:rPr lang="fr-FR" sz="2400" u="sng"/>
+              <a:t>Diagramme de séquences</a:t>
             </a:r>
           </a:p>
         </p:txBody>
@@ -5482,6 +6567,36 @@
               </a14:hiddenFill>
             </a:ext>
           </a:extLst>
+        </p:spPr>
+      </p:pic>
+      <p:pic>
+        <p:nvPicPr>
+          <p:cNvPr id="4" name="Image 3">
+            <a:extLst>
+              <a:ext uri="{FF2B5EF4-FFF2-40B4-BE49-F238E27FC236}">
+                <a16:creationId xmlns:a16="http://schemas.microsoft.com/office/drawing/2014/main" id="{5EFA4329-BE64-5E4E-64D8-D8AA15512DCE}"/>
+              </a:ext>
+            </a:extLst>
+          </p:cNvPr>
+          <p:cNvPicPr>
+            <a:picLocks noChangeAspect="1"/>
+          </p:cNvPicPr>
+          <p:nvPr/>
+        </p:nvPicPr>
+        <p:blipFill>
+          <a:blip r:embed="rId4"/>
+          <a:stretch>
+            <a:fillRect/>
+          </a:stretch>
+        </p:blipFill>
+        <p:spPr>
+          <a:xfrm>
+            <a:off x="10763109" y="0"/>
+            <a:ext cx="1428891" cy="1303436"/>
+          </a:xfrm>
+          <a:prstGeom prst="rect">
+            <a:avLst/>
+          </a:prstGeom>
         </p:spPr>
       </p:pic>
     </p:spTree>
@@ -5549,7 +6664,7 @@
           <a:lstStyle/>
           <a:p>
             <a:r>
-              <a:rPr lang="fr-FR" sz="3200" b="1" u="sng" dirty="0">
+              <a:rPr lang="fr-FR" sz="3200" b="1" u="sng">
                 <a:latin typeface="Aptos Display" panose="020B0004020202020204" pitchFamily="34" charset="0"/>
               </a:rPr>
               <a:t>Outils utilisés </a:t>
@@ -5557,12 +6672,213 @@
           </a:p>
         </p:txBody>
       </p:sp>
+      <p:sp>
+        <p:nvSpPr>
+          <p:cNvPr id="4" name="ZoneTexte 3">
+            <a:extLst>
+              <a:ext uri="{FF2B5EF4-FFF2-40B4-BE49-F238E27FC236}">
+                <a16:creationId xmlns:a16="http://schemas.microsoft.com/office/drawing/2014/main" id="{BB863726-A82E-3ACA-30E0-5796FEF7D0D1}"/>
+              </a:ext>
+            </a:extLst>
+          </p:cNvPr>
+          <p:cNvSpPr txBox="1"/>
+          <p:nvPr/>
+        </p:nvSpPr>
+        <p:spPr>
+          <a:xfrm>
+            <a:off x="1207205" y="2028691"/>
+            <a:ext cx="2980747" cy="3323987"/>
+          </a:xfrm>
+          <a:prstGeom prst="rect">
+            <a:avLst/>
+          </a:prstGeom>
+          <a:noFill/>
+        </p:spPr>
+        <p:txBody>
+          <a:bodyPr wrap="square" rtlCol="0">
+            <a:spAutoFit/>
+          </a:bodyPr>
+          <a:lstStyle/>
+          <a:p>
+            <a:pPr marL="285750" indent="-285750">
+              <a:buFont typeface="Arial" panose="020B0604020202020204" pitchFamily="34" charset="0"/>
+              <a:buChar char="•"/>
+            </a:pPr>
+            <a:r>
+              <a:rPr lang="fr-FR" sz="2400">
+                <a:latin typeface="Aptos Display" panose="020B0004020202020204" pitchFamily="34" charset="0"/>
+              </a:rPr>
+              <a:t>Visual Studio Code</a:t>
+            </a:r>
+          </a:p>
+          <a:p>
+            <a:pPr marL="285750" indent="-285750">
+              <a:buFont typeface="Arial" panose="020B0604020202020204" pitchFamily="34" charset="0"/>
+              <a:buChar char="•"/>
+            </a:pPr>
+            <a:r>
+              <a:rPr lang="fr-FR" sz="2400">
+                <a:latin typeface="Aptos Display" panose="020B0004020202020204" pitchFamily="34" charset="0"/>
+              </a:rPr>
+              <a:t>GitHub</a:t>
+            </a:r>
+          </a:p>
+          <a:p>
+            <a:pPr marL="285750" indent="-285750">
+              <a:buFont typeface="Arial" panose="020B0604020202020204" pitchFamily="34" charset="0"/>
+              <a:buChar char="•"/>
+            </a:pPr>
+            <a:r>
+              <a:rPr lang="fr-FR" sz="2400">
+                <a:latin typeface="Aptos Display" panose="020B0004020202020204" pitchFamily="34" charset="0"/>
+              </a:rPr>
+              <a:t>GitHub Desktop</a:t>
+            </a:r>
+          </a:p>
+          <a:p>
+            <a:endParaRPr lang="fr-FR" sz="2400">
+              <a:latin typeface="Aptos Display" panose="020B0004020202020204" pitchFamily="34" charset="0"/>
+            </a:endParaRPr>
+          </a:p>
+          <a:p>
+            <a:pPr marL="285750" indent="-285750">
+              <a:buFont typeface="Arial" panose="020B0604020202020204" pitchFamily="34" charset="0"/>
+              <a:buChar char="•"/>
+            </a:pPr>
+            <a:r>
+              <a:rPr lang="fr-FR" sz="2400" err="1">
+                <a:latin typeface="Aptos Display" panose="020B0004020202020204" pitchFamily="34" charset="0"/>
+              </a:rPr>
+              <a:t>MagicDraw</a:t>
+            </a:r>
+            <a:r>
+              <a:rPr lang="fr-FR" sz="2400">
+                <a:latin typeface="Aptos Display" panose="020B0004020202020204" pitchFamily="34" charset="0"/>
+              </a:rPr>
+              <a:t> UML</a:t>
+            </a:r>
+          </a:p>
+          <a:p>
+            <a:pPr marL="285750" indent="-285750">
+              <a:buFont typeface="Arial" panose="020B0604020202020204" pitchFamily="34" charset="0"/>
+              <a:buChar char="•"/>
+            </a:pPr>
+            <a:r>
+              <a:rPr lang="fr-FR" sz="2400">
+                <a:latin typeface="Aptos Display" panose="020B0004020202020204" pitchFamily="34" charset="0"/>
+              </a:rPr>
+              <a:t>Excel</a:t>
+            </a:r>
+          </a:p>
+          <a:p>
+            <a:pPr marL="285750" indent="-285750">
+              <a:buFont typeface="Arial" panose="020B0604020202020204" pitchFamily="34" charset="0"/>
+              <a:buChar char="•"/>
+            </a:pPr>
+            <a:r>
+              <a:rPr lang="fr-FR" sz="2400">
+                <a:latin typeface="Aptos Display" panose="020B0004020202020204" pitchFamily="34" charset="0"/>
+              </a:rPr>
+              <a:t>Powerpoint</a:t>
+            </a:r>
+          </a:p>
+          <a:p>
+            <a:pPr marL="285750" indent="-285750">
+              <a:buFont typeface="Arial" panose="020B0604020202020204" pitchFamily="34" charset="0"/>
+              <a:buChar char="•"/>
+            </a:pPr>
+            <a:r>
+              <a:rPr lang="fr-FR" sz="2400">
+                <a:latin typeface="Aptos Display" panose="020B0004020202020204" pitchFamily="34" charset="0"/>
+              </a:rPr>
+              <a:t>Word</a:t>
+            </a:r>
+          </a:p>
+          <a:p>
+            <a:pPr marL="285750" indent="-285750">
+              <a:buFont typeface="Arial" panose="020B0604020202020204" pitchFamily="34" charset="0"/>
+              <a:buChar char="•"/>
+            </a:pPr>
+            <a:endParaRPr lang="fr-FR">
+              <a:latin typeface="Aptos Display" panose="020B0004020202020204" pitchFamily="34" charset="0"/>
+            </a:endParaRPr>
+          </a:p>
+        </p:txBody>
+      </p:sp>
+      <p:sp>
+        <p:nvSpPr>
+          <p:cNvPr id="2" name="ZoneTexte 1">
+            <a:extLst>
+              <a:ext uri="{FF2B5EF4-FFF2-40B4-BE49-F238E27FC236}">
+                <a16:creationId xmlns:a16="http://schemas.microsoft.com/office/drawing/2014/main" id="{014C1D89-A585-02D4-2F5A-1F025FC8552F}"/>
+              </a:ext>
+            </a:extLst>
+          </p:cNvPr>
+          <p:cNvSpPr txBox="1"/>
+          <p:nvPr/>
+        </p:nvSpPr>
+        <p:spPr>
+          <a:xfrm>
+            <a:off x="5827628" y="1951672"/>
+            <a:ext cx="4690872" cy="1477328"/>
+          </a:xfrm>
+          <a:prstGeom prst="rect">
+            <a:avLst/>
+          </a:prstGeom>
+          <a:noFill/>
+        </p:spPr>
+        <p:txBody>
+          <a:bodyPr wrap="square" rtlCol="0">
+            <a:spAutoFit/>
+          </a:bodyPr>
+          <a:lstStyle/>
+          <a:p>
+            <a:r>
+              <a:rPr lang="fr-FR" b="1" u="sng"/>
+              <a:t>Langages de programmation utilisés:</a:t>
+            </a:r>
+          </a:p>
+          <a:p>
+            <a:endParaRPr lang="fr-FR"/>
+          </a:p>
+          <a:p>
+            <a:pPr marL="285750" indent="-285750">
+              <a:buFontTx/>
+              <a:buChar char="-"/>
+            </a:pPr>
+            <a:r>
+              <a:rPr lang="fr-FR"/>
+              <a:t>Python</a:t>
+            </a:r>
+          </a:p>
+          <a:p>
+            <a:pPr marL="285750" indent="-285750">
+              <a:buFontTx/>
+              <a:buChar char="-"/>
+            </a:pPr>
+            <a:r>
+              <a:rPr lang="fr-FR"/>
+              <a:t>HTML/CSS</a:t>
+            </a:r>
+          </a:p>
+          <a:p>
+            <a:pPr marL="285750" indent="-285750">
+              <a:buFontTx/>
+              <a:buChar char="-"/>
+            </a:pPr>
+            <a:r>
+              <a:rPr lang="fr-FR"/>
+              <a:t>JavaScript</a:t>
+            </a:r>
+          </a:p>
+        </p:txBody>
+      </p:sp>
       <p:pic>
         <p:nvPicPr>
-          <p:cNvPr id="5" name="Image 4">
-            <a:extLst>
-              <a:ext uri="{FF2B5EF4-FFF2-40B4-BE49-F238E27FC236}">
-                <a16:creationId xmlns:a16="http://schemas.microsoft.com/office/drawing/2014/main" id="{90D64C95-51C8-4458-2C4F-6E267C38A96D}"/>
+          <p:cNvPr id="6" name="Image 5">
+            <a:extLst>
+              <a:ext uri="{FF2B5EF4-FFF2-40B4-BE49-F238E27FC236}">
+                <a16:creationId xmlns:a16="http://schemas.microsoft.com/office/drawing/2014/main" id="{DD0D3DC4-2BF2-2BCD-B797-7106AB1F74AB}"/>
               </a:ext>
             </a:extLst>
           </p:cNvPr>
@@ -5579,7 +6895,7 @@
         </p:blipFill>
         <p:spPr>
           <a:xfrm>
-            <a:off x="10241280" y="481680"/>
+            <a:off x="10763109" y="0"/>
             <a:ext cx="1428891" cy="1303436"/>
           </a:xfrm>
           <a:prstGeom prst="rect">
@@ -5587,166 +6903,6 @@
           </a:prstGeom>
         </p:spPr>
       </p:pic>
-      <p:sp>
-        <p:nvSpPr>
-          <p:cNvPr id="4" name="ZoneTexte 3">
-            <a:extLst>
-              <a:ext uri="{FF2B5EF4-FFF2-40B4-BE49-F238E27FC236}">
-                <a16:creationId xmlns:a16="http://schemas.microsoft.com/office/drawing/2014/main" id="{BB863726-A82E-3ACA-30E0-5796FEF7D0D1}"/>
-              </a:ext>
-            </a:extLst>
-          </p:cNvPr>
-          <p:cNvSpPr txBox="1"/>
-          <p:nvPr/>
-        </p:nvSpPr>
-        <p:spPr>
-          <a:xfrm>
-            <a:off x="1207205" y="2028691"/>
-            <a:ext cx="2980747" cy="1846659"/>
-          </a:xfrm>
-          <a:prstGeom prst="rect">
-            <a:avLst/>
-          </a:prstGeom>
-          <a:noFill/>
-        </p:spPr>
-        <p:txBody>
-          <a:bodyPr wrap="square" rtlCol="0">
-            <a:spAutoFit/>
-          </a:bodyPr>
-          <a:lstStyle/>
-          <a:p>
-            <a:pPr marL="285750" indent="-285750">
-              <a:buFont typeface="Arial" panose="020B0604020202020204" pitchFamily="34" charset="0"/>
-              <a:buChar char="•"/>
-            </a:pPr>
-            <a:r>
-              <a:rPr lang="fr-FR" sz="2400">
-                <a:latin typeface="Aptos Display" panose="020B0004020202020204" pitchFamily="34" charset="0"/>
-              </a:rPr>
-              <a:t>Visual Studio Code</a:t>
-            </a:r>
-          </a:p>
-          <a:p>
-            <a:pPr marL="285750" indent="-285750">
-              <a:buFont typeface="Arial" panose="020B0604020202020204" pitchFamily="34" charset="0"/>
-              <a:buChar char="•"/>
-            </a:pPr>
-            <a:r>
-              <a:rPr lang="fr-FR" sz="2400">
-                <a:latin typeface="Aptos Display" panose="020B0004020202020204" pitchFamily="34" charset="0"/>
-              </a:rPr>
-              <a:t>GitHub</a:t>
-            </a:r>
-          </a:p>
-          <a:p>
-            <a:pPr marL="285750" indent="-285750">
-              <a:buFont typeface="Arial" panose="020B0604020202020204" pitchFamily="34" charset="0"/>
-              <a:buChar char="•"/>
-            </a:pPr>
-            <a:r>
-              <a:rPr lang="fr-FR" sz="2400">
-                <a:latin typeface="Aptos Display" panose="020B0004020202020204" pitchFamily="34" charset="0"/>
-              </a:rPr>
-              <a:t>GitHub Desktop</a:t>
-            </a:r>
-          </a:p>
-          <a:p>
-            <a:pPr marL="285750" indent="-285750">
-              <a:buFont typeface="Arial" panose="020B0604020202020204" pitchFamily="34" charset="0"/>
-              <a:buChar char="•"/>
-            </a:pPr>
-            <a:r>
-              <a:rPr lang="fr-FR" sz="2400" err="1">
-                <a:latin typeface="Aptos Display" panose="020B0004020202020204" pitchFamily="34" charset="0"/>
-              </a:rPr>
-              <a:t>MagicDraw</a:t>
-            </a:r>
-            <a:r>
-              <a:rPr lang="fr-FR" sz="2400">
-                <a:latin typeface="Aptos Display" panose="020B0004020202020204" pitchFamily="34" charset="0"/>
-              </a:rPr>
-              <a:t> UML</a:t>
-            </a:r>
-          </a:p>
-          <a:p>
-            <a:pPr marL="285750" indent="-285750">
-              <a:buFont typeface="Arial" panose="020B0604020202020204" pitchFamily="34" charset="0"/>
-              <a:buChar char="•"/>
-            </a:pPr>
-            <a:endParaRPr lang="fr-FR" dirty="0">
-              <a:latin typeface="Aptos Display" panose="020B0004020202020204" pitchFamily="34" charset="0"/>
-            </a:endParaRPr>
-          </a:p>
-        </p:txBody>
-      </p:sp>
-      <p:sp>
-        <p:nvSpPr>
-          <p:cNvPr id="2" name="ZoneTexte 1">
-            <a:extLst>
-              <a:ext uri="{FF2B5EF4-FFF2-40B4-BE49-F238E27FC236}">
-                <a16:creationId xmlns:a16="http://schemas.microsoft.com/office/drawing/2014/main" id="{014C1D89-A585-02D4-2F5A-1F025FC8552F}"/>
-              </a:ext>
-            </a:extLst>
-          </p:cNvPr>
-          <p:cNvSpPr txBox="1"/>
-          <p:nvPr/>
-        </p:nvSpPr>
-        <p:spPr>
-          <a:xfrm>
-            <a:off x="5827628" y="1951672"/>
-            <a:ext cx="4690872" cy="1477328"/>
-          </a:xfrm>
-          <a:prstGeom prst="rect">
-            <a:avLst/>
-          </a:prstGeom>
-          <a:noFill/>
-        </p:spPr>
-        <p:txBody>
-          <a:bodyPr wrap="square" rtlCol="0">
-            <a:spAutoFit/>
-          </a:bodyPr>
-          <a:lstStyle/>
-          <a:p>
-            <a:r>
-              <a:rPr lang="fr-FR" b="1" u="sng"/>
-              <a:t>Langages de programmation utilisés:</a:t>
-            </a:r>
-          </a:p>
-          <a:p>
-            <a:endParaRPr lang="fr-FR"/>
-          </a:p>
-          <a:p>
-            <a:pPr marL="285750" indent="-285750">
-              <a:buFontTx/>
-              <a:buChar char="-"/>
-            </a:pPr>
-            <a:r>
-              <a:rPr lang="fr-FR"/>
-              <a:t>Python</a:t>
-            </a:r>
-          </a:p>
-          <a:p>
-            <a:pPr marL="285750" indent="-285750">
-              <a:buFontTx/>
-              <a:buChar char="-"/>
-            </a:pPr>
-            <a:r>
-              <a:rPr lang="fr-FR"/>
-              <a:t>HTML/CSS</a:t>
-            </a:r>
-          </a:p>
-          <a:p>
-            <a:pPr marL="285750" indent="-285750">
-              <a:buFontTx/>
-              <a:buChar char="-"/>
-            </a:pPr>
-            <a:r>
-              <a:rPr lang="fr-FR"/>
-              <a:t>JavaScript</a:t>
-            </a:r>
-          </a:p>
-        </p:txBody>
-      </p:sp>
     </p:spTree>
     <p:extLst>
       <p:ext uri="{BB962C8B-B14F-4D97-AF65-F5344CB8AC3E}">
@@ -5768,7 +6924,7 @@
         <p:cNvPr id="1" name="">
           <a:extLst>
             <a:ext uri="{FF2B5EF4-FFF2-40B4-BE49-F238E27FC236}">
-              <a16:creationId xmlns:a16="http://schemas.microsoft.com/office/drawing/2014/main" id="{271B9DEF-F848-E4FD-F260-AAB469DA5382}"/>
+              <a16:creationId xmlns:a16="http://schemas.microsoft.com/office/drawing/2014/main" id="{A7185810-A6EF-5EEC-3C3F-A2E85A8354E2}"/>
             </a:ext>
           </a:extLst>
         </p:cNvPr>
@@ -5785,54 +6941,47 @@
       </p:grpSpPr>
       <p:sp>
         <p:nvSpPr>
-          <p:cNvPr id="3" name="ZoneTexte 2">
-            <a:extLst>
-              <a:ext uri="{FF2B5EF4-FFF2-40B4-BE49-F238E27FC236}">
-                <a16:creationId xmlns:a16="http://schemas.microsoft.com/office/drawing/2014/main" id="{3076D1AD-9FE5-0DAE-648B-9266CFC7E3C7}"/>
-              </a:ext>
-            </a:extLst>
-          </p:cNvPr>
-          <p:cNvSpPr txBox="1"/>
-          <p:nvPr/>
-        </p:nvSpPr>
-        <p:spPr>
-          <a:xfrm>
-            <a:off x="1503106" y="551311"/>
-            <a:ext cx="9185788" cy="584775"/>
-          </a:xfrm>
-          <a:prstGeom prst="rect">
-            <a:avLst/>
-          </a:prstGeom>
-          <a:noFill/>
-        </p:spPr>
-        <p:txBody>
-          <a:bodyPr wrap="square">
-            <a:spAutoFit/>
-          </a:bodyPr>
-          <a:lstStyle/>
-          <a:p>
-            <a:r>
-              <a:rPr lang="fr-FR" sz="3200" b="1" u="sng" dirty="0">
-                <a:latin typeface="Aptos Display" panose="020B0004020202020204" pitchFamily="34" charset="0"/>
-              </a:rPr>
-              <a:t>Poursuites possibles : Fonctionnalités optionnelles</a:t>
+          <p:cNvPr id="2" name="Titre 1">
+            <a:extLst>
+              <a:ext uri="{FF2B5EF4-FFF2-40B4-BE49-F238E27FC236}">
+                <a16:creationId xmlns:a16="http://schemas.microsoft.com/office/drawing/2014/main" id="{76EB0315-C211-CB9B-FCB3-99BD230E0672}"/>
+              </a:ext>
+            </a:extLst>
+          </p:cNvPr>
+          <p:cNvSpPr>
+            <a:spLocks noGrp="1"/>
+          </p:cNvSpPr>
+          <p:nvPr>
+            <p:ph type="title"/>
+          </p:nvPr>
+        </p:nvSpPr>
+        <p:spPr/>
+        <p:txBody>
+          <a:bodyPr/>
+          <a:lstStyle/>
+          <a:p>
+            <a:r>
+              <a:rPr lang="fr-FR" u="sng"/>
+              <a:t>Explications techniques de la réalisation</a:t>
             </a:r>
           </a:p>
         </p:txBody>
       </p:sp>
       <p:pic>
         <p:nvPicPr>
-          <p:cNvPr id="5" name="Image 4">
-            <a:extLst>
-              <a:ext uri="{FF2B5EF4-FFF2-40B4-BE49-F238E27FC236}">
-                <a16:creationId xmlns:a16="http://schemas.microsoft.com/office/drawing/2014/main" id="{CDFBB76B-A9B4-B16A-F91A-2AA8E1C5A1F4}"/>
+          <p:cNvPr id="5" name="Content Placeholder 4">
+            <a:extLst>
+              <a:ext uri="{FF2B5EF4-FFF2-40B4-BE49-F238E27FC236}">
+                <a16:creationId xmlns:a16="http://schemas.microsoft.com/office/drawing/2014/main" id="{A6F090A7-D1CA-0505-AF3B-61510454E1FB}"/>
               </a:ext>
             </a:extLst>
           </p:cNvPr>
           <p:cNvPicPr>
-            <a:picLocks noChangeAspect="1"/>
+            <a:picLocks noGrp="1" noChangeAspect="1"/>
           </p:cNvPicPr>
-          <p:nvPr/>
+          <p:nvPr>
+            <p:ph idx="1"/>
+          </p:nvPr>
         </p:nvPicPr>
         <p:blipFill>
           <a:blip r:embed="rId2"/>
@@ -5842,85 +6991,20 @@
         </p:blipFill>
         <p:spPr>
           <a:xfrm>
-            <a:off x="10575578" y="481680"/>
-            <a:ext cx="1428891" cy="1303436"/>
+            <a:off x="581961" y="3182440"/>
+            <a:ext cx="10890928" cy="1938699"/>
           </a:xfrm>
           <a:prstGeom prst="rect">
             <a:avLst/>
           </a:prstGeom>
         </p:spPr>
       </p:pic>
-      <p:sp>
-        <p:nvSpPr>
-          <p:cNvPr id="2" name="ZoneTexte 1">
-            <a:extLst>
-              <a:ext uri="{FF2B5EF4-FFF2-40B4-BE49-F238E27FC236}">
-                <a16:creationId xmlns:a16="http://schemas.microsoft.com/office/drawing/2014/main" id="{259BCCE2-C5D8-625D-91C8-F31112D2D6DF}"/>
-              </a:ext>
-            </a:extLst>
-          </p:cNvPr>
-          <p:cNvSpPr txBox="1"/>
-          <p:nvPr/>
-        </p:nvSpPr>
-        <p:spPr>
-          <a:xfrm>
-            <a:off x="4696917" y="2830135"/>
-            <a:ext cx="4810877" cy="1815882"/>
-          </a:xfrm>
-          <a:prstGeom prst="rect">
-            <a:avLst/>
-          </a:prstGeom>
-          <a:noFill/>
-        </p:spPr>
-        <p:txBody>
-          <a:bodyPr wrap="square" rtlCol="0">
-            <a:spAutoFit/>
-          </a:bodyPr>
-          <a:lstStyle/>
-          <a:p>
-            <a:pPr marL="285750" indent="-285750">
-              <a:buFont typeface="Arial" panose="020B0604020202020204" pitchFamily="34" charset="0"/>
-              <a:buChar char="•"/>
-            </a:pPr>
-            <a:r>
-              <a:rPr lang="fr-FR" sz="2800" dirty="0">
-                <a:latin typeface="Aptos Display" panose="020B0004020202020204" pitchFamily="34" charset="0"/>
-              </a:rPr>
-              <a:t>Envoie de fichiers </a:t>
-            </a:r>
-          </a:p>
-          <a:p>
-            <a:pPr marL="285750" indent="-285750">
-              <a:buFont typeface="Arial" panose="020B0604020202020204" pitchFamily="34" charset="0"/>
-              <a:buChar char="•"/>
-            </a:pPr>
-            <a:r>
-              <a:rPr lang="fr-FR" sz="2800" dirty="0">
-                <a:latin typeface="Aptos Display" panose="020B0004020202020204" pitchFamily="34" charset="0"/>
-              </a:rPr>
-              <a:t>Supprimer les messages</a:t>
-            </a:r>
-          </a:p>
-          <a:p>
-            <a:pPr marL="285750" indent="-285750">
-              <a:buFont typeface="Arial" panose="020B0604020202020204" pitchFamily="34" charset="0"/>
-              <a:buChar char="•"/>
-            </a:pPr>
-            <a:r>
-              <a:rPr lang="fr-FR" sz="2800" dirty="0">
-                <a:latin typeface="Aptos Display" panose="020B0004020202020204" pitchFamily="34" charset="0"/>
-              </a:rPr>
-              <a:t>Confirmation de compte par email</a:t>
-            </a:r>
-          </a:p>
-        </p:txBody>
-      </p:sp>
       <p:pic>
         <p:nvPicPr>
-          <p:cNvPr id="7" name="Image 6">
-            <a:extLst>
-              <a:ext uri="{FF2B5EF4-FFF2-40B4-BE49-F238E27FC236}">
-                <a16:creationId xmlns:a16="http://schemas.microsoft.com/office/drawing/2014/main" id="{1D01F8D7-E8A5-1410-E19B-94C7B249230E}"/>
+          <p:cNvPr id="4" name="Image 3">
+            <a:extLst>
+              <a:ext uri="{FF2B5EF4-FFF2-40B4-BE49-F238E27FC236}">
+                <a16:creationId xmlns:a16="http://schemas.microsoft.com/office/drawing/2014/main" id="{F27FA17C-E038-7295-2B95-C8F0D825F27B}"/>
               </a:ext>
             </a:extLst>
           </p:cNvPr>
@@ -5937,8 +7021,8 @@
         </p:blipFill>
         <p:spPr>
           <a:xfrm>
-            <a:off x="562733" y="3230076"/>
-            <a:ext cx="2819644" cy="2034716"/>
+            <a:off x="10763109" y="6650"/>
+            <a:ext cx="1428891" cy="1303436"/>
           </a:xfrm>
           <a:prstGeom prst="rect">
             <a:avLst/>
@@ -5947,10 +7031,10 @@
       </p:pic>
       <p:sp>
         <p:nvSpPr>
-          <p:cNvPr id="8" name="ZoneTexte 7">
-            <a:extLst>
-              <a:ext uri="{FF2B5EF4-FFF2-40B4-BE49-F238E27FC236}">
-                <a16:creationId xmlns:a16="http://schemas.microsoft.com/office/drawing/2014/main" id="{4057975C-4149-C800-AB5D-7E4B647322D6}"/>
+          <p:cNvPr id="6" name="ZoneTexte 1">
+            <a:extLst>
+              <a:ext uri="{FF2B5EF4-FFF2-40B4-BE49-F238E27FC236}">
+                <a16:creationId xmlns:a16="http://schemas.microsoft.com/office/drawing/2014/main" id="{B4E0AEB8-27A0-C174-3991-9CEDEF62CE67}"/>
               </a:ext>
             </a:extLst>
           </p:cNvPr>
@@ -5959,8 +7043,8 @@
         </p:nvSpPr>
         <p:spPr>
           <a:xfrm>
-            <a:off x="562734" y="5383359"/>
-            <a:ext cx="2819644" cy="923330"/>
+            <a:off x="4798554" y="2004995"/>
+            <a:ext cx="2465740" cy="461665"/>
           </a:xfrm>
           <a:prstGeom prst="rect">
             <a:avLst/>
@@ -5968,22 +7052,24 @@
           <a:noFill/>
         </p:spPr>
         <p:txBody>
-          <a:bodyPr wrap="square" rtlCol="0">
+          <a:bodyPr wrap="none" lIns="91440" tIns="45720" rIns="91440" bIns="45720" rtlCol="0" anchor="t">
             <a:spAutoFit/>
           </a:bodyPr>
           <a:lstStyle/>
           <a:p>
-            <a:r>
-              <a:rPr lang="fr-FR" dirty="0"/>
-              <a:t>Pas possible de voir un contact connecter ou déconnecter </a:t>
-            </a:r>
+            <a:pPr algn="ctr"/>
+            <a:r>
+              <a:rPr lang="fr-FR" sz="2400" u="sng"/>
+              <a:t>Base de données</a:t>
+            </a:r>
+            <a:endParaRPr lang="en-US" err="1"/>
           </a:p>
         </p:txBody>
       </p:sp>
     </p:spTree>
     <p:extLst>
       <p:ext uri="{BB962C8B-B14F-4D97-AF65-F5344CB8AC3E}">
-        <p14:creationId xmlns:p14="http://schemas.microsoft.com/office/powerpoint/2010/main" val="1132041448"/>
+        <p14:creationId xmlns:p14="http://schemas.microsoft.com/office/powerpoint/2010/main" val="1073548905"/>
       </p:ext>
     </p:extLst>
   </p:cSld>
@@ -5998,7 +7084,13 @@
   <p:cSld>
     <p:spTree>
       <p:nvGrpSpPr>
-        <p:cNvPr id="1" name=""/>
+        <p:cNvPr id="1" name="">
+          <a:extLst>
+            <a:ext uri="{FF2B5EF4-FFF2-40B4-BE49-F238E27FC236}">
+              <a16:creationId xmlns:a16="http://schemas.microsoft.com/office/drawing/2014/main" id="{11BF7BD8-D86F-F213-82BB-003D3EA73526}"/>
+            </a:ext>
+          </a:extLst>
+        </p:cNvPr>
         <p:cNvGrpSpPr/>
         <p:nvPr/>
       </p:nvGrpSpPr>
@@ -6010,10 +7102,136 @@
           <a:chExt cx="0" cy="0"/>
         </a:xfrm>
       </p:grpSpPr>
+      <p:sp>
+        <p:nvSpPr>
+          <p:cNvPr id="2" name="Titre 1">
+            <a:extLst>
+              <a:ext uri="{FF2B5EF4-FFF2-40B4-BE49-F238E27FC236}">
+                <a16:creationId xmlns:a16="http://schemas.microsoft.com/office/drawing/2014/main" id="{EB29DD3A-F0A1-AD7A-4106-378236F808AA}"/>
+              </a:ext>
+            </a:extLst>
+          </p:cNvPr>
+          <p:cNvSpPr>
+            <a:spLocks noGrp="1"/>
+          </p:cNvSpPr>
+          <p:nvPr>
+            <p:ph type="title"/>
+          </p:nvPr>
+        </p:nvSpPr>
+        <p:spPr/>
+        <p:txBody>
+          <a:bodyPr/>
+          <a:lstStyle/>
+          <a:p>
+            <a:r>
+              <a:rPr lang="fr-FR" u="sng"/>
+              <a:t>Explications techniques de la réalisation</a:t>
+            </a:r>
+          </a:p>
+        </p:txBody>
+      </p:sp>
+      <p:pic>
+        <p:nvPicPr>
+          <p:cNvPr id="4" name="Image 3">
+            <a:extLst>
+              <a:ext uri="{FF2B5EF4-FFF2-40B4-BE49-F238E27FC236}">
+                <a16:creationId xmlns:a16="http://schemas.microsoft.com/office/drawing/2014/main" id="{4246F07D-F257-E990-574E-BB9C6059A9AA}"/>
+              </a:ext>
+            </a:extLst>
+          </p:cNvPr>
+          <p:cNvPicPr>
+            <a:picLocks noChangeAspect="1"/>
+          </p:cNvPicPr>
+          <p:nvPr/>
+        </p:nvPicPr>
+        <p:blipFill>
+          <a:blip r:embed="rId2"/>
+          <a:stretch>
+            <a:fillRect/>
+          </a:stretch>
+        </p:blipFill>
+        <p:spPr>
+          <a:xfrm>
+            <a:off x="10763109" y="6650"/>
+            <a:ext cx="1428891" cy="1303436"/>
+          </a:xfrm>
+          <a:prstGeom prst="rect">
+            <a:avLst/>
+          </a:prstGeom>
+        </p:spPr>
+      </p:pic>
+      <p:sp>
+        <p:nvSpPr>
+          <p:cNvPr id="9" name="ZoneTexte 1">
+            <a:extLst>
+              <a:ext uri="{FF2B5EF4-FFF2-40B4-BE49-F238E27FC236}">
+                <a16:creationId xmlns:a16="http://schemas.microsoft.com/office/drawing/2014/main" id="{18A475AA-C98B-DEAF-55B6-DE776AD814BB}"/>
+              </a:ext>
+            </a:extLst>
+          </p:cNvPr>
+          <p:cNvSpPr txBox="1"/>
+          <p:nvPr/>
+        </p:nvSpPr>
+        <p:spPr>
+          <a:xfrm>
+            <a:off x="3595957" y="1921046"/>
+            <a:ext cx="5000088" cy="461665"/>
+          </a:xfrm>
+          <a:prstGeom prst="rect">
+            <a:avLst/>
+          </a:prstGeom>
+          <a:noFill/>
+        </p:spPr>
+        <p:txBody>
+          <a:bodyPr wrap="none" lIns="91440" tIns="45720" rIns="91440" bIns="45720" rtlCol="0" anchor="t">
+            <a:spAutoFit/>
+          </a:bodyPr>
+          <a:lstStyle/>
+          <a:p>
+            <a:pPr algn="ctr"/>
+            <a:r>
+              <a:rPr lang="fr-FR" sz="2400" u="sng"/>
+              <a:t>Fonction de l'API pour la connexion </a:t>
+            </a:r>
+          </a:p>
+        </p:txBody>
+      </p:sp>
+      <p:pic>
+        <p:nvPicPr>
+          <p:cNvPr id="6" name="Content Placeholder 5">
+            <a:extLst>
+              <a:ext uri="{FF2B5EF4-FFF2-40B4-BE49-F238E27FC236}">
+                <a16:creationId xmlns:a16="http://schemas.microsoft.com/office/drawing/2014/main" id="{1718976D-552C-20B2-697B-1C0B789C0DC5}"/>
+              </a:ext>
+            </a:extLst>
+          </p:cNvPr>
+          <p:cNvPicPr>
+            <a:picLocks noGrp="1" noChangeAspect="1"/>
+          </p:cNvPicPr>
+          <p:nvPr>
+            <p:ph idx="1"/>
+          </p:nvPr>
+        </p:nvPicPr>
+        <p:blipFill>
+          <a:blip r:embed="rId3"/>
+          <a:stretch>
+            <a:fillRect/>
+          </a:stretch>
+        </p:blipFill>
+        <p:spPr>
+          <a:xfrm>
+            <a:off x="1935307" y="2633472"/>
+            <a:ext cx="8300474" cy="3566160"/>
+          </a:xfrm>
+          <a:prstGeom prst="rect">
+            <a:avLst/>
+          </a:prstGeom>
+        </p:spPr>
+      </p:pic>
     </p:spTree>
     <p:extLst>
       <p:ext uri="{BB962C8B-B14F-4D97-AF65-F5344CB8AC3E}">
-        <p14:creationId xmlns:p14="http://schemas.microsoft.com/office/powerpoint/2010/main" val="1657465610"/>
+        <p14:creationId xmlns:p14="http://schemas.microsoft.com/office/powerpoint/2010/main" val="1138493999"/>
       </p:ext>
     </p:extLst>
   </p:cSld>
@@ -6222,4 +7440,319 @@
     </a:ext>
   </a:extLst>
 </a:theme>
+</file>
+
+<file path=ppt/theme/theme2.xml><?xml version="1.0" encoding="utf-8"?>
+<a:theme xmlns:a="http://schemas.openxmlformats.org/drawingml/2006/main" name="Thème Office">
+  <a:themeElements>
+    <a:clrScheme name="Office">
+      <a:dk1>
+        <a:sysClr val="windowText" lastClr="000000"/>
+      </a:dk1>
+      <a:lt1>
+        <a:sysClr val="window" lastClr="FFFFFF"/>
+      </a:lt1>
+      <a:dk2>
+        <a:srgbClr val="0E2841"/>
+      </a:dk2>
+      <a:lt2>
+        <a:srgbClr val="E8E8E8"/>
+      </a:lt2>
+      <a:accent1>
+        <a:srgbClr val="156082"/>
+      </a:accent1>
+      <a:accent2>
+        <a:srgbClr val="E97132"/>
+      </a:accent2>
+      <a:accent3>
+        <a:srgbClr val="196B24"/>
+      </a:accent3>
+      <a:accent4>
+        <a:srgbClr val="0F9ED5"/>
+      </a:accent4>
+      <a:accent5>
+        <a:srgbClr val="A02B93"/>
+      </a:accent5>
+      <a:accent6>
+        <a:srgbClr val="4EA72E"/>
+      </a:accent6>
+      <a:hlink>
+        <a:srgbClr val="467886"/>
+      </a:hlink>
+      <a:folHlink>
+        <a:srgbClr val="96607D"/>
+      </a:folHlink>
+    </a:clrScheme>
+    <a:fontScheme name="Office">
+      <a:majorFont>
+        <a:latin typeface="Aptos Display" panose="02110004020202020204"/>
+        <a:ea typeface=""/>
+        <a:cs typeface=""/>
+        <a:font script="Jpan" typeface="游ゴシック Light"/>
+        <a:font script="Hang" typeface="맑은 고딕"/>
+        <a:font script="Hans" typeface="等线 Light"/>
+        <a:font script="Hant" typeface="新細明體"/>
+        <a:font script="Arab" typeface="Times New Roman"/>
+        <a:font script="Hebr" typeface="Times New Roman"/>
+        <a:font script="Thai" typeface="Angsana New"/>
+        <a:font script="Ethi" typeface="Nyala"/>
+        <a:font script="Beng" typeface="Vrinda"/>
+        <a:font script="Gujr" typeface="Shruti"/>
+        <a:font script="Khmr" typeface="MoolBoran"/>
+        <a:font script="Knda" typeface="Tunga"/>
+        <a:font script="Guru" typeface="Raavi"/>
+        <a:font script="Cans" typeface="Euphemia"/>
+        <a:font script="Cher" typeface="Plantagenet Cherokee"/>
+        <a:font script="Yiii" typeface="Microsoft Yi Baiti"/>
+        <a:font script="Tibt" typeface="Microsoft Himalaya"/>
+        <a:font script="Thaa" typeface="MV Boli"/>
+        <a:font script="Deva" typeface="Mangal"/>
+        <a:font script="Telu" typeface="Gautami"/>
+        <a:font script="Taml" typeface="Latha"/>
+        <a:font script="Syrc" typeface="Estrangelo Edessa"/>
+        <a:font script="Orya" typeface="Kalinga"/>
+        <a:font script="Mlym" typeface="Kartika"/>
+        <a:font script="Laoo" typeface="DokChampa"/>
+        <a:font script="Sinh" typeface="Iskoola Pota"/>
+        <a:font script="Mong" typeface="Mongolian Baiti"/>
+        <a:font script="Viet" typeface="Times New Roman"/>
+        <a:font script="Uigh" typeface="Microsoft Uighur"/>
+        <a:font script="Geor" typeface="Sylfaen"/>
+        <a:font script="Armn" typeface="Arial"/>
+        <a:font script="Bugi" typeface="Leelawadee UI"/>
+        <a:font script="Bopo" typeface="Microsoft JhengHei"/>
+        <a:font script="Java" typeface="Javanese Text"/>
+        <a:font script="Lisu" typeface="Segoe UI"/>
+        <a:font script="Mymr" typeface="Myanmar Text"/>
+        <a:font script="Nkoo" typeface="Ebrima"/>
+        <a:font script="Olck" typeface="Nirmala UI"/>
+        <a:font script="Osma" typeface="Ebrima"/>
+        <a:font script="Phag" typeface="Phagspa"/>
+        <a:font script="Syrn" typeface="Estrangelo Edessa"/>
+        <a:font script="Syrj" typeface="Estrangelo Edessa"/>
+        <a:font script="Syre" typeface="Estrangelo Edessa"/>
+        <a:font script="Sora" typeface="Nirmala UI"/>
+        <a:font script="Tale" typeface="Microsoft Tai Le"/>
+        <a:font script="Talu" typeface="Microsoft New Tai Lue"/>
+        <a:font script="Tfng" typeface="Ebrima"/>
+      </a:majorFont>
+      <a:minorFont>
+        <a:latin typeface="Aptos" panose="02110004020202020204"/>
+        <a:ea typeface=""/>
+        <a:cs typeface=""/>
+        <a:font script="Jpan" typeface="游ゴシック"/>
+        <a:font script="Hang" typeface="맑은 고딕"/>
+        <a:font script="Hans" typeface="等线"/>
+        <a:font script="Hant" typeface="新細明體"/>
+        <a:font script="Arab" typeface="Arial"/>
+        <a:font script="Hebr" typeface="Arial"/>
+        <a:font script="Thai" typeface="Cordia New"/>
+        <a:font script="Ethi" typeface="Nyala"/>
+        <a:font script="Beng" typeface="Vrinda"/>
+        <a:font script="Gujr" typeface="Shruti"/>
+        <a:font script="Khmr" typeface="DaunPenh"/>
+        <a:font script="Knda" typeface="Tunga"/>
+        <a:font script="Guru" typeface="Raavi"/>
+        <a:font script="Cans" typeface="Euphemia"/>
+        <a:font script="Cher" typeface="Plantagenet Cherokee"/>
+        <a:font script="Yiii" typeface="Microsoft Yi Baiti"/>
+        <a:font script="Tibt" typeface="Microsoft Himalaya"/>
+        <a:font script="Thaa" typeface="MV Boli"/>
+        <a:font script="Deva" typeface="Mangal"/>
+        <a:font script="Telu" typeface="Gautami"/>
+        <a:font script="Taml" typeface="Latha"/>
+        <a:font script="Syrc" typeface="Estrangelo Edessa"/>
+        <a:font script="Orya" typeface="Kalinga"/>
+        <a:font script="Mlym" typeface="Kartika"/>
+        <a:font script="Laoo" typeface="DokChampa"/>
+        <a:font script="Sinh" typeface="Iskoola Pota"/>
+        <a:font script="Mong" typeface="Mongolian Baiti"/>
+        <a:font script="Viet" typeface="Arial"/>
+        <a:font script="Uigh" typeface="Microsoft Uighur"/>
+        <a:font script="Geor" typeface="Sylfaen"/>
+        <a:font script="Armn" typeface="Arial"/>
+        <a:font script="Bugi" typeface="Leelawadee UI"/>
+        <a:font script="Bopo" typeface="Microsoft JhengHei"/>
+        <a:font script="Java" typeface="Javanese Text"/>
+        <a:font script="Lisu" typeface="Segoe UI"/>
+        <a:font script="Mymr" typeface="Myanmar Text"/>
+        <a:font script="Nkoo" typeface="Ebrima"/>
+        <a:font script="Olck" typeface="Nirmala UI"/>
+        <a:font script="Osma" typeface="Ebrima"/>
+        <a:font script="Phag" typeface="Phagspa"/>
+        <a:font script="Syrn" typeface="Estrangelo Edessa"/>
+        <a:font script="Syrj" typeface="Estrangelo Edessa"/>
+        <a:font script="Syre" typeface="Estrangelo Edessa"/>
+        <a:font script="Sora" typeface="Nirmala UI"/>
+        <a:font script="Tale" typeface="Microsoft Tai Le"/>
+        <a:font script="Talu" typeface="Microsoft New Tai Lue"/>
+        <a:font script="Tfng" typeface="Ebrima"/>
+      </a:minorFont>
+    </a:fontScheme>
+    <a:fmtScheme name="Office">
+      <a:fillStyleLst>
+        <a:solidFill>
+          <a:schemeClr val="phClr"/>
+        </a:solidFill>
+        <a:gradFill rotWithShape="1">
+          <a:gsLst>
+            <a:gs pos="0">
+              <a:schemeClr val="phClr">
+                <a:lumMod val="110000"/>
+                <a:satMod val="105000"/>
+                <a:tint val="67000"/>
+              </a:schemeClr>
+            </a:gs>
+            <a:gs pos="50000">
+              <a:schemeClr val="phClr">
+                <a:lumMod val="105000"/>
+                <a:satMod val="103000"/>
+                <a:tint val="73000"/>
+              </a:schemeClr>
+            </a:gs>
+            <a:gs pos="100000">
+              <a:schemeClr val="phClr">
+                <a:lumMod val="105000"/>
+                <a:satMod val="109000"/>
+                <a:tint val="81000"/>
+              </a:schemeClr>
+            </a:gs>
+          </a:gsLst>
+          <a:lin ang="5400000" scaled="0"/>
+        </a:gradFill>
+        <a:gradFill rotWithShape="1">
+          <a:gsLst>
+            <a:gs pos="0">
+              <a:schemeClr val="phClr">
+                <a:satMod val="103000"/>
+                <a:lumMod val="102000"/>
+                <a:tint val="94000"/>
+              </a:schemeClr>
+            </a:gs>
+            <a:gs pos="50000">
+              <a:schemeClr val="phClr">
+                <a:satMod val="110000"/>
+                <a:lumMod val="100000"/>
+                <a:shade val="100000"/>
+              </a:schemeClr>
+            </a:gs>
+            <a:gs pos="100000">
+              <a:schemeClr val="phClr">
+                <a:lumMod val="99000"/>
+                <a:satMod val="120000"/>
+                <a:shade val="78000"/>
+              </a:schemeClr>
+            </a:gs>
+          </a:gsLst>
+          <a:lin ang="5400000" scaled="0"/>
+        </a:gradFill>
+      </a:fillStyleLst>
+      <a:lnStyleLst>
+        <a:ln w="12700" cap="flat" cmpd="sng" algn="ctr">
+          <a:solidFill>
+            <a:schemeClr val="phClr"/>
+          </a:solidFill>
+          <a:prstDash val="solid"/>
+          <a:miter lim="800000"/>
+        </a:ln>
+        <a:ln w="19050" cap="flat" cmpd="sng" algn="ctr">
+          <a:solidFill>
+            <a:schemeClr val="phClr"/>
+          </a:solidFill>
+          <a:prstDash val="solid"/>
+          <a:miter lim="800000"/>
+        </a:ln>
+        <a:ln w="25400" cap="flat" cmpd="sng" algn="ctr">
+          <a:solidFill>
+            <a:schemeClr val="phClr"/>
+          </a:solidFill>
+          <a:prstDash val="solid"/>
+          <a:miter lim="800000"/>
+        </a:ln>
+      </a:lnStyleLst>
+      <a:effectStyleLst>
+        <a:effectStyle>
+          <a:effectLst/>
+        </a:effectStyle>
+        <a:effectStyle>
+          <a:effectLst/>
+        </a:effectStyle>
+        <a:effectStyle>
+          <a:effectLst>
+            <a:outerShdw blurRad="57150" dist="19050" dir="5400000" algn="ctr" rotWithShape="0">
+              <a:srgbClr val="000000">
+                <a:alpha val="63000"/>
+              </a:srgbClr>
+            </a:outerShdw>
+          </a:effectLst>
+        </a:effectStyle>
+      </a:effectStyleLst>
+      <a:bgFillStyleLst>
+        <a:solidFill>
+          <a:schemeClr val="phClr"/>
+        </a:solidFill>
+        <a:solidFill>
+          <a:schemeClr val="phClr">
+            <a:tint val="95000"/>
+            <a:satMod val="170000"/>
+          </a:schemeClr>
+        </a:solidFill>
+        <a:gradFill rotWithShape="1">
+          <a:gsLst>
+            <a:gs pos="0">
+              <a:schemeClr val="phClr">
+                <a:tint val="93000"/>
+                <a:satMod val="150000"/>
+                <a:shade val="98000"/>
+                <a:lumMod val="102000"/>
+              </a:schemeClr>
+            </a:gs>
+            <a:gs pos="50000">
+              <a:schemeClr val="phClr">
+                <a:tint val="98000"/>
+                <a:satMod val="130000"/>
+                <a:shade val="90000"/>
+                <a:lumMod val="103000"/>
+              </a:schemeClr>
+            </a:gs>
+            <a:gs pos="100000">
+              <a:schemeClr val="phClr">
+                <a:shade val="63000"/>
+                <a:satMod val="120000"/>
+              </a:schemeClr>
+            </a:gs>
+          </a:gsLst>
+          <a:lin ang="5400000" scaled="0"/>
+        </a:gradFill>
+      </a:bgFillStyleLst>
+    </a:fmtScheme>
+  </a:themeElements>
+  <a:objectDefaults>
+    <a:lnDef>
+      <a:spPr/>
+      <a:bodyPr/>
+      <a:lstStyle/>
+      <a:style>
+        <a:lnRef idx="2">
+          <a:schemeClr val="accent1"/>
+        </a:lnRef>
+        <a:fillRef idx="0">
+          <a:schemeClr val="accent1"/>
+        </a:fillRef>
+        <a:effectRef idx="1">
+          <a:schemeClr val="accent1"/>
+        </a:effectRef>
+        <a:fontRef idx="minor">
+          <a:schemeClr val="tx1"/>
+        </a:fontRef>
+      </a:style>
+    </a:lnDef>
+  </a:objectDefaults>
+  <a:extraClrSchemeLst/>
+  <a:extLst>
+    <a:ext uri="{05A4C25C-085E-4340-85A3-A5531E510DB2}">
+      <thm15:themeFamily xmlns:thm15="http://schemas.microsoft.com/office/thememl/2012/main" name="Office Theme" id="{2E142A2C-CD16-42D6-873A-C26D2A0506FA}" vid="{1BDDFF52-6CD6-40A5-AB3C-68EB2F1E4D0A}"/>
+    </a:ext>
+  </a:extLst>
+</a:theme>
 </file>
--- a/Présentation/TOKI.pptx
+++ b/Présentation/TOKI.pptx
@@ -119,6 +119,11 @@
       </a:defRPr>
     </a:lvl9pPr>
   </p:defaultTextStyle>
+  <p:extLst>
+    <p:ext uri="{EFAFB233-063F-42B5-8137-9DF3F51BA10A}">
+      <p15:sldGuideLst xmlns:p15="http://schemas.microsoft.com/office/powerpoint/2012/main"/>
+    </p:ext>
+  </p:extLst>
 </p:presentation>
 </file>
 
@@ -204,7 +209,7 @@
           <a:p>
             <a:fld id="{9CEC310B-918C-4C6B-8262-16D23C938C7B}" type="datetimeFigureOut">
               <a:rPr lang="fr-FR" smtClean="0"/>
-              <a:t>10/04/2026</a:t>
+              <a:t>12/04/2026</a:t>
             </a:fld>
             <a:endParaRPr lang="fr-FR"/>
           </a:p>
@@ -712,7 +717,7 @@
           <a:p>
             <a:fld id="{6444479B-705B-4489-957E-7E8A228BDFA0}" type="datetime1">
               <a:rPr lang="en-US" smtClean="0"/>
-              <a:t>4/10/2026</a:t>
+              <a:t>4/12/2026</a:t>
             </a:fld>
             <a:endParaRPr lang="en-US"/>
           </a:p>
@@ -910,7 +915,7 @@
           <a:p>
             <a:fld id="{C07B66AD-7C08-490A-ADA4-B47E10FB2407}" type="datetime1">
               <a:rPr lang="en-US" smtClean="0"/>
-              <a:t>4/10/2026</a:t>
+              <a:t>4/12/2026</a:t>
             </a:fld>
             <a:endParaRPr lang="en-US"/>
           </a:p>
@@ -1167,7 +1172,7 @@
           <a:p>
             <a:fld id="{05B95027-4255-49E7-9841-CD21BCC99996}" type="datetime1">
               <a:rPr lang="en-US" smtClean="0"/>
-              <a:t>4/10/2026</a:t>
+              <a:t>4/12/2026</a:t>
             </a:fld>
             <a:endParaRPr lang="en-US"/>
           </a:p>
@@ -1407,7 +1412,7 @@
           <a:p>
             <a:fld id="{9F89F774-3FA6-43B8-9241-99959C8FD463}" type="datetime1">
               <a:rPr lang="en-US" smtClean="0"/>
-              <a:t>4/10/2026</a:t>
+              <a:t>4/12/2026</a:t>
             </a:fld>
             <a:endParaRPr lang="en-US"/>
           </a:p>
@@ -1733,7 +1738,7 @@
           <a:p>
             <a:fld id="{F9504452-5DCC-4FE2-A5C9-8A5EF6714D65}" type="datetime1">
               <a:rPr lang="en-US" smtClean="0"/>
-              <a:t>4/10/2026</a:t>
+              <a:t>4/12/2026</a:t>
             </a:fld>
             <a:endParaRPr lang="en-US"/>
           </a:p>
@@ -2040,7 +2045,7 @@
           <a:p>
             <a:fld id="{E579ABC2-0180-4F3A-A895-A85BC724D472}" type="datetime1">
               <a:rPr lang="en-US" smtClean="0"/>
-              <a:t>4/10/2026</a:t>
+              <a:t>4/12/2026</a:t>
             </a:fld>
             <a:endParaRPr lang="en-US"/>
           </a:p>
@@ -2456,7 +2461,7 @@
           <a:p>
             <a:fld id="{6AEEA9BA-4E8F-439E-BEA4-91FBA01E3F5F}" type="datetime1">
               <a:rPr lang="en-US" smtClean="0"/>
-              <a:t>4/10/2026</a:t>
+              <a:t>4/12/2026</a:t>
             </a:fld>
             <a:endParaRPr lang="en-US"/>
           </a:p>
@@ -2597,7 +2602,7 @@
           <a:p>
             <a:fld id="{BE15BF18-0007-481C-AA29-413124BC3EE7}" type="datetime1">
               <a:rPr lang="en-US" smtClean="0"/>
-              <a:t>4/10/2026</a:t>
+              <a:t>4/12/2026</a:t>
             </a:fld>
             <a:endParaRPr lang="en-US"/>
           </a:p>
@@ -2759,7 +2764,7 @@
           <a:p>
             <a:fld id="{09BE9870-3748-43AD-B547-02A075CB4A1D}" type="datetime1">
               <a:rPr lang="en-US" smtClean="0"/>
-              <a:t>4/10/2026</a:t>
+              <a:t>4/12/2026</a:t>
             </a:fld>
             <a:endParaRPr lang="en-US"/>
           </a:p>
@@ -3074,7 +3079,7 @@
           <a:p>
             <a:fld id="{558E7897-33C5-4F1A-9307-D068E37F3DC7}" type="datetime1">
               <a:rPr lang="en-US" smtClean="0"/>
-              <a:t>4/10/2026</a:t>
+              <a:t>4/12/2026</a:t>
             </a:fld>
             <a:endParaRPr lang="en-US"/>
           </a:p>
@@ -3367,7 +3372,7 @@
           <a:p>
             <a:fld id="{82E171BA-CC09-47C8-A6DF-F5C5CB59CEEC}" type="datetime1">
               <a:rPr lang="en-US" smtClean="0"/>
-              <a:t>4/10/2026</a:t>
+              <a:t>4/12/2026</a:t>
             </a:fld>
             <a:endParaRPr lang="en-US"/>
           </a:p>
@@ -3606,7 +3611,7 @@
           <a:p>
             <a:fld id="{7DA38F49-B3E2-4BF0-BEC7-C30D34ABBB8D}" type="datetime1">
               <a:rPr lang="en-US" smtClean="0"/>
-              <a:t>4/10/2026</a:t>
+              <a:t>4/12/2026</a:t>
             </a:fld>
             <a:endParaRPr lang="en-US"/>
           </a:p>
@@ -4531,8 +4536,8 @@
         </p:blipFill>
         <p:spPr>
           <a:xfrm>
-            <a:off x="581186" y="2348678"/>
-            <a:ext cx="6044340" cy="2302710"/>
+            <a:off x="388252" y="2275176"/>
+            <a:ext cx="6237274" cy="2376212"/>
           </a:xfrm>
           <a:prstGeom prst="rect">
             <a:avLst/>
@@ -4561,8 +4566,8 @@
         </p:blipFill>
         <p:spPr>
           <a:xfrm>
-            <a:off x="6611714" y="2411960"/>
-            <a:ext cx="4938650" cy="2186732"/>
+            <a:off x="6611713" y="2372810"/>
+            <a:ext cx="5027069" cy="2225882"/>
           </a:xfrm>
           <a:prstGeom prst="rect">
             <a:avLst/>
@@ -4593,8 +4598,8 @@
         </p:blipFill>
         <p:spPr>
           <a:xfrm>
-            <a:off x="1873488" y="4391791"/>
-            <a:ext cx="8191640" cy="2348437"/>
+            <a:off x="1873487" y="4391791"/>
+            <a:ext cx="8602443" cy="2466209"/>
           </a:xfrm>
           <a:prstGeom prst="rect">
             <a:avLst/>
@@ -4675,8 +4680,8 @@
         </p:nvSpPr>
         <p:spPr>
           <a:xfrm>
-            <a:off x="1316736" y="1078992"/>
-            <a:ext cx="6108192" cy="2246769"/>
+            <a:off x="544010" y="1206316"/>
+            <a:ext cx="6742019" cy="2708434"/>
           </a:xfrm>
           <a:prstGeom prst="rect">
             <a:avLst/>
@@ -4690,34 +4695,34 @@
           <a:lstStyle/>
           <a:p>
             <a:r>
-              <a:rPr lang="fr-FR" sz="3200" b="1" u="sng"/>
+              <a:rPr lang="fr-FR" sz="3200" b="1" u="sng" dirty="0"/>
               <a:t>Organisation des programmes</a:t>
             </a:r>
           </a:p>
           <a:p>
-            <a:endParaRPr lang="fr-FR"/>
-          </a:p>
-          <a:p>
-            <a:r>
-              <a:rPr lang="fr-FR"/>
+            <a:endParaRPr lang="fr-FR" dirty="0"/>
+          </a:p>
+          <a:p>
+            <a:r>
+              <a:rPr lang="fr-FR" sz="2400" dirty="0"/>
               <a:t>Du python pour le backend</a:t>
             </a:r>
           </a:p>
           <a:p>
-            <a:endParaRPr lang="fr-FR"/>
-          </a:p>
-          <a:p>
-            <a:r>
-              <a:rPr lang="fr-FR"/>
+            <a:endParaRPr lang="fr-FR" sz="2400" dirty="0"/>
+          </a:p>
+          <a:p>
+            <a:r>
+              <a:rPr lang="fr-FR" sz="2400" dirty="0"/>
               <a:t>De l’HTML/CSS et du Javascript pour le frontend</a:t>
             </a:r>
           </a:p>
           <a:p>
-            <a:endParaRPr lang="fr-FR"/>
-          </a:p>
-          <a:p>
-            <a:r>
-              <a:rPr lang="fr-FR"/>
+            <a:endParaRPr lang="fr-FR" sz="2400" dirty="0"/>
+          </a:p>
+          <a:p>
+            <a:r>
+              <a:rPr lang="fr-FR" sz="2400" dirty="0"/>
               <a:t>Les ressources (images du logo)</a:t>
             </a:r>
           </a:p>
@@ -4769,7 +4774,9 @@
           </a:lstStyle>
           <a:p>
             <a:r>
-              <a:rPr lang="fr-FR" u="sng"/>
+              <a:rPr lang="fr-FR" u="sng" dirty="0">
+                <a:latin typeface="Aptos" panose="020B0004020202020204" pitchFamily="34" charset="0"/>
+              </a:rPr>
               <a:t>Explications techniques de la réalisation</a:t>
             </a:r>
           </a:p>
@@ -5012,7 +5019,7 @@
         <p:spPr>
           <a:xfrm>
             <a:off x="562734" y="5383359"/>
-            <a:ext cx="2819644" cy="923330"/>
+            <a:ext cx="2819644" cy="1200329"/>
           </a:xfrm>
           <a:prstGeom prst="rect">
             <a:avLst/>
@@ -5026,8 +5033,8 @@
           <a:lstStyle/>
           <a:p>
             <a:r>
-              <a:rPr lang="fr-FR"/>
-              <a:t>(Pas possible de voir un contact connecté ou déconnecté)</a:t>
+              <a:rPr lang="fr-FR" dirty="0"/>
+              <a:t>(Sur cette photo il est impossible de voir un contact connecté ou déconnecté)</a:t>
             </a:r>
           </a:p>
         </p:txBody>
@@ -5108,13 +5115,20 @@
             <p:ph type="title"/>
           </p:nvPr>
         </p:nvSpPr>
-        <p:spPr/>
-        <p:txBody>
-          <a:bodyPr/>
-          <a:lstStyle/>
-          <a:p>
-            <a:r>
-              <a:rPr lang="fr-FR" u="sng"/>
+        <p:spPr>
+          <a:xfrm>
+            <a:off x="640080" y="1001201"/>
+            <a:ext cx="3859397" cy="760756"/>
+          </a:xfrm>
+        </p:spPr>
+        <p:txBody>
+          <a:bodyPr>
+            <a:normAutofit/>
+          </a:bodyPr>
+          <a:lstStyle/>
+          <a:p>
+            <a:r>
+              <a:rPr lang="fr-FR" sz="4000" u="sng" dirty="0"/>
               <a:t>Conclusion</a:t>
             </a:r>
           </a:p>
@@ -5147,13 +5161,13 @@
           <a:lstStyle/>
           <a:p>
             <a:r>
-              <a:rPr lang="fr-FR"/>
+              <a:rPr lang="fr-FR" dirty="0"/>
               <a:t>Toutes les fonctionnalités principales sont présentes dans notre projet.</a:t>
             </a:r>
           </a:p>
           <a:p>
             <a:r>
-              <a:rPr lang="fr-FR"/>
+              <a:rPr lang="fr-FR" dirty="0"/>
               <a:t>Quasiment toutes les fonctionnalités secondaires sont aussi présentes dans notre projet.</a:t>
             </a:r>
           </a:p>
@@ -5181,8 +5195,8 @@
         </p:blipFill>
         <p:spPr>
           <a:xfrm>
-            <a:off x="1181801" y="2132356"/>
-            <a:ext cx="9395652" cy="4643828"/>
+            <a:off x="1127313" y="1888550"/>
+            <a:ext cx="9937373" cy="4911575"/>
           </a:xfrm>
           <a:prstGeom prst="rect">
             <a:avLst/>
@@ -5207,9 +5221,34 @@
   <p:cSld>
     <p:bg>
       <p:bgPr>
-        <a:solidFill>
-          <a:schemeClr val="bg1"/>
-        </a:solidFill>
+        <a:gradFill>
+          <a:gsLst>
+            <a:gs pos="84000">
+              <a:srgbClr val="CCFFFF">
+                <a:alpha val="27000"/>
+              </a:srgbClr>
+            </a:gs>
+            <a:gs pos="97000">
+              <a:schemeClr val="accent1">
+                <a:lumMod val="45000"/>
+                <a:lumOff val="55000"/>
+              </a:schemeClr>
+            </a:gs>
+            <a:gs pos="100000">
+              <a:schemeClr val="accent1">
+                <a:lumMod val="45000"/>
+                <a:lumOff val="55000"/>
+              </a:schemeClr>
+            </a:gs>
+            <a:gs pos="100000">
+              <a:schemeClr val="accent1">
+                <a:lumMod val="45000"/>
+                <a:lumOff val="55000"/>
+              </a:schemeClr>
+            </a:gs>
+          </a:gsLst>
+          <a:lin ang="5400000" scaled="1"/>
+        </a:gradFill>
         <a:effectLst/>
       </p:bgPr>
     </p:bg>
@@ -5719,7 +5758,7 @@
         <p:spPr>
           <a:xfrm>
             <a:off x="1350133" y="2205871"/>
-            <a:ext cx="3473836" cy="1754326"/>
+            <a:ext cx="3473836" cy="1938992"/>
           </a:xfrm>
           <a:prstGeom prst="rect">
             <a:avLst/>
@@ -5733,7 +5772,7 @@
           <a:lstStyle/>
           <a:p>
             <a:r>
-              <a:rPr lang="fr-FR" b="1" u="sng">
+              <a:rPr lang="fr-FR" sz="2000" b="1" u="sng" dirty="0">
                 <a:latin typeface="Aptos Display" panose="020B0004020202020204" pitchFamily="34" charset="0"/>
               </a:rPr>
               <a:t>Fonctionnalités principales : </a:t>
@@ -5745,7 +5784,7 @@
               <a:buChar char="•"/>
             </a:pPr>
             <a:r>
-              <a:rPr lang="fr-FR">
+              <a:rPr lang="fr-FR" sz="2000" dirty="0">
                 <a:latin typeface="Aptos Display" panose="020B0004020202020204" pitchFamily="34" charset="0"/>
               </a:rPr>
               <a:t>Se connecter </a:t>
@@ -5757,7 +5796,7 @@
               <a:buChar char="•"/>
             </a:pPr>
             <a:r>
-              <a:rPr lang="fr-FR">
+              <a:rPr lang="fr-FR" sz="2000" dirty="0">
                 <a:latin typeface="Aptos Display" panose="020B0004020202020204" pitchFamily="34" charset="0"/>
               </a:rPr>
               <a:t>Créer un pseudo </a:t>
@@ -5769,7 +5808,7 @@
               <a:buChar char="•"/>
             </a:pPr>
             <a:r>
-              <a:rPr lang="fr-FR">
+              <a:rPr lang="fr-FR" sz="2000" dirty="0">
                 <a:latin typeface="Aptos Display" panose="020B0004020202020204" pitchFamily="34" charset="0"/>
               </a:rPr>
               <a:t>Discuter </a:t>
@@ -5781,7 +5820,7 @@
               <a:buChar char="•"/>
             </a:pPr>
             <a:r>
-              <a:rPr lang="fr-FR">
+              <a:rPr lang="fr-FR" sz="2000" dirty="0">
                 <a:latin typeface="Aptos Display" panose="020B0004020202020204" pitchFamily="34" charset="0"/>
               </a:rPr>
               <a:t>Ajouter contact </a:t>
@@ -5793,7 +5832,7 @@
               <a:buChar char="•"/>
             </a:pPr>
             <a:r>
-              <a:rPr lang="fr-FR">
+              <a:rPr lang="fr-FR" sz="2000" dirty="0">
                 <a:latin typeface="Aptos Display" panose="020B0004020202020204" pitchFamily="34" charset="0"/>
               </a:rPr>
               <a:t>Interface graphique </a:t>
@@ -5816,7 +5855,7 @@
         <p:spPr>
           <a:xfrm>
             <a:off x="4984955" y="2205871"/>
-            <a:ext cx="2758327" cy="3139321"/>
+            <a:ext cx="3136490" cy="3170099"/>
           </a:xfrm>
           <a:prstGeom prst="rect">
             <a:avLst/>
@@ -5830,7 +5869,7 @@
           <a:lstStyle/>
           <a:p>
             <a:r>
-              <a:rPr lang="fr-FR" b="1" u="sng">
+              <a:rPr lang="fr-FR" sz="2000" b="1" u="sng" dirty="0">
                 <a:latin typeface="Aptos Display" panose="020B0004020202020204" pitchFamily="34" charset="0"/>
               </a:rPr>
               <a:t>Fonctionnalités secondaires : </a:t>
@@ -5842,7 +5881,7 @@
               <a:buChar char="•"/>
             </a:pPr>
             <a:r>
-              <a:rPr lang="fr-FR">
+              <a:rPr lang="fr-FR" sz="2000" dirty="0">
                 <a:latin typeface="Aptos Display" panose="020B0004020202020204" pitchFamily="34" charset="0"/>
               </a:rPr>
               <a:t>Envoyer des images et des fichiers </a:t>
@@ -5854,7 +5893,7 @@
               <a:buChar char="•"/>
             </a:pPr>
             <a:r>
-              <a:rPr lang="fr-FR">
+              <a:rPr lang="fr-FR" sz="2000" dirty="0">
                 <a:latin typeface="Aptos Display" panose="020B0004020202020204" pitchFamily="34" charset="0"/>
               </a:rPr>
               <a:t>Création des groupes </a:t>
@@ -5866,7 +5905,7 @@
               <a:buChar char="•"/>
             </a:pPr>
             <a:r>
-              <a:rPr lang="fr-FR">
+              <a:rPr lang="fr-FR" sz="2000" dirty="0">
                 <a:latin typeface="Aptos Display" panose="020B0004020202020204" pitchFamily="34" charset="0"/>
               </a:rPr>
               <a:t>Historique des messages </a:t>
@@ -5878,7 +5917,7 @@
               <a:buChar char="•"/>
             </a:pPr>
             <a:r>
-              <a:rPr lang="fr-FR">
+              <a:rPr lang="fr-FR" sz="2000" dirty="0">
                 <a:latin typeface="Aptos Display" panose="020B0004020202020204" pitchFamily="34" charset="0"/>
               </a:rPr>
               <a:t>Envoyer des gifs </a:t>
@@ -5890,17 +5929,17 @@
               <a:buChar char="•"/>
             </a:pPr>
             <a:r>
-              <a:rPr lang="fr-FR">
+              <a:rPr lang="fr-FR" sz="2000" dirty="0">
                 <a:latin typeface="Aptos Display" panose="020B0004020202020204" pitchFamily="34" charset="0"/>
               </a:rPr>
               <a:t>Voir les contacts connectés/déconnectés</a:t>
             </a:r>
-            <a:endParaRPr lang="fr-FR" b="1" u="sng">
+            <a:endParaRPr lang="fr-FR" sz="2000" b="1" u="sng" dirty="0">
               <a:latin typeface="Aptos Display" panose="020B0004020202020204" pitchFamily="34" charset="0"/>
             </a:endParaRPr>
           </a:p>
           <a:p>
-            <a:endParaRPr lang="fr-FR"/>
+            <a:endParaRPr lang="fr-FR" sz="2000" dirty="0"/>
           </a:p>
         </p:txBody>
       </p:sp>
@@ -5954,8 +5993,8 @@
         </p:nvSpPr>
         <p:spPr>
           <a:xfrm>
-            <a:off x="3706761" y="333985"/>
-            <a:ext cx="4154129" cy="584775"/>
+            <a:off x="3741174" y="319339"/>
+            <a:ext cx="4709652" cy="646331"/>
           </a:xfrm>
           <a:prstGeom prst="rect">
             <a:avLst/>
@@ -5969,7 +6008,7 @@
           <a:lstStyle/>
           <a:p>
             <a:r>
-              <a:rPr lang="fr-FR" sz="3200" b="1" u="sng">
+              <a:rPr lang="fr-FR" sz="3600" b="1" u="sng" dirty="0">
                 <a:latin typeface="Aptos Display" panose="020B0004020202020204" pitchFamily="34" charset="0"/>
               </a:rPr>
               <a:t>Présentation du projet </a:t>
@@ -5991,7 +6030,7 @@
         </p:nvSpPr>
         <p:spPr>
           <a:xfrm>
-            <a:off x="3378312" y="1270891"/>
+            <a:off x="3703966" y="1200814"/>
             <a:ext cx="4784067" cy="461665"/>
           </a:xfrm>
           <a:prstGeom prst="rect">
@@ -6006,7 +6045,7 @@
           <a:lstStyle/>
           <a:p>
             <a:r>
-              <a:rPr lang="fr-FR" sz="2400" b="1" u="sng">
+              <a:rPr lang="fr-FR" sz="2400" b="1" u="sng" dirty="0">
                 <a:latin typeface="Aptos Display" panose="020B0004020202020204" pitchFamily="34" charset="0"/>
               </a:rPr>
               <a:t>Connexion et sécurité des comptes</a:t>
@@ -6028,8 +6067,8 @@
         </p:nvSpPr>
         <p:spPr>
           <a:xfrm>
-            <a:off x="1500103" y="2295178"/>
-            <a:ext cx="2070118" cy="923330"/>
+            <a:off x="1491063" y="1897624"/>
+            <a:ext cx="2249527" cy="1015663"/>
           </a:xfrm>
           <a:prstGeom prst="rect">
             <a:avLst/>
@@ -6043,13 +6082,13 @@
           <a:lstStyle/>
           <a:p>
             <a:r>
-              <a:rPr lang="fr-FR" b="1" u="sng">
+              <a:rPr lang="fr-FR" sz="2000" b="1" u="sng" dirty="0">
                 <a:latin typeface="Aptos Display" panose="020B0004020202020204" pitchFamily="34" charset="0"/>
               </a:rPr>
               <a:t>Connexion</a:t>
             </a:r>
             <a:r>
-              <a:rPr lang="fr-FR" u="sng">
+              <a:rPr lang="fr-FR" sz="2000" u="sng" dirty="0">
                 <a:latin typeface="Aptos Display" panose="020B0004020202020204" pitchFamily="34" charset="0"/>
               </a:rPr>
               <a:t> :</a:t>
@@ -6061,7 +6100,7 @@
               <a:buChar char="•"/>
             </a:pPr>
             <a:r>
-              <a:rPr lang="fr-FR">
+              <a:rPr lang="fr-FR" sz="2000" dirty="0">
                 <a:latin typeface="Aptos Display" panose="020B0004020202020204" pitchFamily="34" charset="0"/>
               </a:rPr>
               <a:t>Nom d’utilisateur</a:t>
@@ -6073,7 +6112,7 @@
               <a:buChar char="•"/>
             </a:pPr>
             <a:r>
-              <a:rPr lang="fr-FR">
+              <a:rPr lang="fr-FR" sz="2000" dirty="0">
                 <a:latin typeface="Aptos Display" panose="020B0004020202020204" pitchFamily="34" charset="0"/>
               </a:rPr>
               <a:t>Mot de passe </a:t>
@@ -6103,7 +6142,7 @@
         </p:blipFill>
         <p:spPr>
           <a:xfrm>
-            <a:off x="952192" y="3429000"/>
+            <a:off x="952192" y="3218508"/>
             <a:ext cx="3147860" cy="3215949"/>
           </a:xfrm>
           <a:prstGeom prst="rect">
@@ -6125,8 +6164,8 @@
         </p:nvSpPr>
         <p:spPr>
           <a:xfrm>
-            <a:off x="5157739" y="3218508"/>
-            <a:ext cx="2703151" cy="2585323"/>
+            <a:off x="4737016" y="2438311"/>
+            <a:ext cx="3147860" cy="2862322"/>
           </a:xfrm>
           <a:prstGeom prst="rect">
             <a:avLst/>
@@ -6140,13 +6179,13 @@
           <a:lstStyle/>
           <a:p>
             <a:r>
-              <a:rPr lang="fr-FR" b="1" u="sng">
+              <a:rPr lang="fr-FR" sz="2000" b="1" u="sng" dirty="0">
                 <a:latin typeface="Aptos Display" panose="020B0004020202020204" pitchFamily="34" charset="0"/>
               </a:rPr>
               <a:t>Inscription</a:t>
             </a:r>
             <a:r>
-              <a:rPr lang="fr-FR" u="sng">
+              <a:rPr lang="fr-FR" sz="2000" u="sng" dirty="0">
                 <a:latin typeface="Aptos Display" panose="020B0004020202020204" pitchFamily="34" charset="0"/>
               </a:rPr>
               <a:t> :</a:t>
@@ -6154,7 +6193,7 @@
           </a:p>
           <a:p>
             <a:r>
-              <a:rPr lang="fr-FR">
+              <a:rPr lang="fr-FR" sz="2000" dirty="0">
                 <a:latin typeface="Aptos" panose="020B0004020202020204" pitchFamily="34" charset="0"/>
               </a:rPr>
               <a:t>Restriction sur les mots de passe : </a:t>
@@ -6162,15 +6201,23 @@
           </a:p>
           <a:p>
             <a:r>
-              <a:rPr lang="fr-FR">
+              <a:rPr lang="fr-FR" sz="2000" dirty="0">
                 <a:latin typeface="Aptos" panose="020B0004020202020204" pitchFamily="34" charset="0"/>
               </a:rPr>
-              <a:t>• 8 caractères minimum • Une majuscule </a:t>
-            </a:r>
-          </a:p>
-          <a:p>
-            <a:r>
-              <a:rPr lang="fr-FR">
+              <a:t>• 8 caractères minimum </a:t>
+            </a:r>
+          </a:p>
+          <a:p>
+            <a:r>
+              <a:rPr lang="fr-FR" sz="2000" dirty="0">
+                <a:latin typeface="Aptos" panose="020B0004020202020204" pitchFamily="34" charset="0"/>
+              </a:rPr>
+              <a:t>• Une majuscule </a:t>
+            </a:r>
+          </a:p>
+          <a:p>
+            <a:r>
+              <a:rPr lang="fr-FR" sz="2000" dirty="0">
                 <a:latin typeface="Aptos" panose="020B0004020202020204" pitchFamily="34" charset="0"/>
               </a:rPr>
               <a:t>• Une minuscule </a:t>
@@ -6178,7 +6225,7 @@
           </a:p>
           <a:p>
             <a:r>
-              <a:rPr lang="fr-FR">
+              <a:rPr lang="fr-FR" sz="2000" dirty="0">
                 <a:latin typeface="Aptos" panose="020B0004020202020204" pitchFamily="34" charset="0"/>
               </a:rPr>
               <a:t>• Un chiffre </a:t>
@@ -6186,12 +6233,12 @@
           </a:p>
           <a:p>
             <a:r>
-              <a:rPr lang="fr-FR">
+              <a:rPr lang="fr-FR" sz="2000" dirty="0">
                 <a:latin typeface="Aptos" panose="020B0004020202020204" pitchFamily="34" charset="0"/>
               </a:rPr>
               <a:t>• Un caractère spécial (@, ?, %, !, …)</a:t>
             </a:r>
-            <a:endParaRPr lang="fr-FR" u="sng">
+            <a:endParaRPr lang="fr-FR" sz="2000" u="sng" dirty="0">
               <a:latin typeface="Aptos" panose="020B0004020202020204" pitchFamily="34" charset="0"/>
             </a:endParaRPr>
           </a:p>
@@ -6277,7 +6324,7 @@
         </p:nvSpPr>
         <p:spPr>
           <a:xfrm>
-            <a:off x="4018935" y="347554"/>
+            <a:off x="4018935" y="298394"/>
             <a:ext cx="4154129" cy="584775"/>
           </a:xfrm>
           <a:prstGeom prst="rect">
@@ -6292,7 +6339,7 @@
           <a:lstStyle/>
           <a:p>
             <a:r>
-              <a:rPr lang="fr-FR" sz="3200" b="1" u="sng">
+              <a:rPr lang="fr-FR" sz="3200" b="1" u="sng" dirty="0">
                 <a:latin typeface="Aptos Display" panose="020B0004020202020204" pitchFamily="34" charset="0"/>
               </a:rPr>
               <a:t>Présentation du projet </a:t>
@@ -6359,8 +6406,8 @@
         </p:blipFill>
         <p:spPr bwMode="auto">
           <a:xfrm>
-            <a:off x="2715853" y="1352499"/>
-            <a:ext cx="6760292" cy="5293436"/>
+            <a:off x="2715852" y="1204536"/>
+            <a:ext cx="6949257" cy="5441399"/>
           </a:xfrm>
           <a:prstGeom prst="rect">
             <a:avLst/>
@@ -6391,7 +6438,7 @@
         </p:nvSpPr>
         <p:spPr>
           <a:xfrm>
-            <a:off x="3944608" y="902565"/>
+            <a:off x="3944608" y="853405"/>
             <a:ext cx="4302781" cy="461665"/>
           </a:xfrm>
           <a:prstGeom prst="rect">
@@ -6406,7 +6453,7 @@
           <a:lstStyle/>
           <a:p>
             <a:r>
-              <a:rPr lang="fr-FR" sz="2400" u="sng"/>
+              <a:rPr lang="fr-FR" sz="2400" u="sng" dirty="0"/>
               <a:t>Diagramme de cas d’utilisation</a:t>
             </a:r>
           </a:p>
@@ -6462,7 +6509,7 @@
         </p:nvSpPr>
         <p:spPr>
           <a:xfrm>
-            <a:off x="4018935" y="347554"/>
+            <a:off x="4018935" y="249234"/>
             <a:ext cx="4154129" cy="584775"/>
           </a:xfrm>
           <a:prstGeom prst="rect">
@@ -6478,7 +6525,7 @@
           <a:p>
             <a:pPr algn="ctr"/>
             <a:r>
-              <a:rPr lang="fr-FR" sz="3200" b="1" u="sng">
+              <a:rPr lang="fr-FR" sz="3200" b="1" u="sng" dirty="0">
                 <a:latin typeface="Aptos Display" panose="020B0004020202020204" pitchFamily="34" charset="0"/>
               </a:rPr>
               <a:t>Présentation du projet </a:t>
@@ -6500,7 +6547,7 @@
         </p:nvSpPr>
         <p:spPr>
           <a:xfrm>
-            <a:off x="4267614" y="900741"/>
+            <a:off x="4267614" y="812253"/>
             <a:ext cx="3656770" cy="461665"/>
           </a:xfrm>
           <a:prstGeom prst="rect">
@@ -6516,7 +6563,7 @@
           <a:p>
             <a:pPr algn="ctr"/>
             <a:r>
-              <a:rPr lang="fr-FR" sz="2400" u="sng"/>
+              <a:rPr lang="fr-FR" sz="2400" u="sng" dirty="0"/>
               <a:t>Diagramme de séquences</a:t>
             </a:r>
           </a:p>
@@ -6551,8 +6598,8 @@
         </p:blipFill>
         <p:spPr bwMode="auto">
           <a:xfrm>
-            <a:off x="2265680" y="1487340"/>
-            <a:ext cx="7660640" cy="5149370"/>
+            <a:off x="1992089" y="1303436"/>
+            <a:ext cx="7934231" cy="5333274"/>
           </a:xfrm>
           <a:prstGeom prst="rect">
             <a:avLst/>
@@ -6687,7 +6734,7 @@
         <p:spPr>
           <a:xfrm>
             <a:off x="1207205" y="2028691"/>
-            <a:ext cx="2980747" cy="3323987"/>
+            <a:ext cx="2980747" cy="4247317"/>
           </a:xfrm>
           <a:prstGeom prst="rect">
             <a:avLst/>
@@ -6705,7 +6752,7 @@
               <a:buChar char="•"/>
             </a:pPr>
             <a:r>
-              <a:rPr lang="fr-FR" sz="2400">
+              <a:rPr lang="fr-FR" sz="2800" dirty="0">
                 <a:latin typeface="Aptos Display" panose="020B0004020202020204" pitchFamily="34" charset="0"/>
               </a:rPr>
               <a:t>Visual Studio Code</a:t>
@@ -6717,7 +6764,7 @@
               <a:buChar char="•"/>
             </a:pPr>
             <a:r>
-              <a:rPr lang="fr-FR" sz="2400">
+              <a:rPr lang="fr-FR" sz="2800" dirty="0">
                 <a:latin typeface="Aptos Display" panose="020B0004020202020204" pitchFamily="34" charset="0"/>
               </a:rPr>
               <a:t>GitHub</a:t>
@@ -6729,14 +6776,14 @@
               <a:buChar char="•"/>
             </a:pPr>
             <a:r>
-              <a:rPr lang="fr-FR" sz="2400">
+              <a:rPr lang="fr-FR" sz="2800" dirty="0">
                 <a:latin typeface="Aptos Display" panose="020B0004020202020204" pitchFamily="34" charset="0"/>
               </a:rPr>
               <a:t>GitHub Desktop</a:t>
             </a:r>
           </a:p>
           <a:p>
-            <a:endParaRPr lang="fr-FR" sz="2400">
+            <a:endParaRPr lang="fr-FR" sz="2800" dirty="0">
               <a:latin typeface="Aptos Display" panose="020B0004020202020204" pitchFamily="34" charset="0"/>
             </a:endParaRPr>
           </a:p>
@@ -6746,13 +6793,13 @@
               <a:buChar char="•"/>
             </a:pPr>
             <a:r>
-              <a:rPr lang="fr-FR" sz="2400" err="1">
+              <a:rPr lang="fr-FR" sz="2800" dirty="0" err="1">
                 <a:latin typeface="Aptos Display" panose="020B0004020202020204" pitchFamily="34" charset="0"/>
               </a:rPr>
               <a:t>MagicDraw</a:t>
             </a:r>
             <a:r>
-              <a:rPr lang="fr-FR" sz="2400">
+              <a:rPr lang="fr-FR" sz="2800" dirty="0">
                 <a:latin typeface="Aptos Display" panose="020B0004020202020204" pitchFamily="34" charset="0"/>
               </a:rPr>
               <a:t> UML</a:t>
@@ -6764,7 +6811,7 @@
               <a:buChar char="•"/>
             </a:pPr>
             <a:r>
-              <a:rPr lang="fr-FR" sz="2400">
+              <a:rPr lang="fr-FR" sz="2800" dirty="0">
                 <a:latin typeface="Aptos Display" panose="020B0004020202020204" pitchFamily="34" charset="0"/>
               </a:rPr>
               <a:t>Excel</a:t>
@@ -6776,7 +6823,7 @@
               <a:buChar char="•"/>
             </a:pPr>
             <a:r>
-              <a:rPr lang="fr-FR" sz="2400">
+              <a:rPr lang="fr-FR" sz="2800" dirty="0">
                 <a:latin typeface="Aptos Display" panose="020B0004020202020204" pitchFamily="34" charset="0"/>
               </a:rPr>
               <a:t>Powerpoint</a:t>
@@ -6788,7 +6835,7 @@
               <a:buChar char="•"/>
             </a:pPr>
             <a:r>
-              <a:rPr lang="fr-FR" sz="2400">
+              <a:rPr lang="fr-FR" sz="2800" dirty="0">
                 <a:latin typeface="Aptos Display" panose="020B0004020202020204" pitchFamily="34" charset="0"/>
               </a:rPr>
               <a:t>Word</a:t>
@@ -6799,7 +6846,7 @@
               <a:buFont typeface="Arial" panose="020B0604020202020204" pitchFamily="34" charset="0"/>
               <a:buChar char="•"/>
             </a:pPr>
-            <a:endParaRPr lang="fr-FR">
+            <a:endParaRPr lang="fr-FR" sz="2000" dirty="0">
               <a:latin typeface="Aptos Display" panose="020B0004020202020204" pitchFamily="34" charset="0"/>
             </a:endParaRPr>
           </a:p>
@@ -6819,8 +6866,8 @@
         </p:nvSpPr>
         <p:spPr>
           <a:xfrm>
-            <a:off x="5827628" y="1951672"/>
-            <a:ext cx="4690872" cy="1477328"/>
+            <a:off x="5827627" y="1951672"/>
+            <a:ext cx="5351649" cy="1569660"/>
           </a:xfrm>
           <a:prstGeom prst="rect">
             <a:avLst/>
@@ -6834,12 +6881,12 @@
           <a:lstStyle/>
           <a:p>
             <a:r>
-              <a:rPr lang="fr-FR" b="1" u="sng"/>
+              <a:rPr lang="fr-FR" sz="2400" b="1" u="sng" dirty="0"/>
               <a:t>Langages de programmation utilisés:</a:t>
             </a:r>
           </a:p>
           <a:p>
-            <a:endParaRPr lang="fr-FR"/>
+            <a:endParaRPr lang="fr-FR" dirty="0"/>
           </a:p>
           <a:p>
             <a:pPr marL="285750" indent="-285750">
@@ -6847,7 +6894,7 @@
               <a:buChar char="-"/>
             </a:pPr>
             <a:r>
-              <a:rPr lang="fr-FR"/>
+              <a:rPr lang="fr-FR" dirty="0"/>
               <a:t>Python</a:t>
             </a:r>
           </a:p>
@@ -6857,7 +6904,7 @@
               <a:buChar char="-"/>
             </a:pPr>
             <a:r>
-              <a:rPr lang="fr-FR"/>
+              <a:rPr lang="fr-FR" dirty="0"/>
               <a:t>HTML/CSS</a:t>
             </a:r>
           </a:p>
@@ -6867,7 +6914,7 @@
               <a:buChar char="-"/>
             </a:pPr>
             <a:r>
-              <a:rPr lang="fr-FR"/>
+              <a:rPr lang="fr-FR" dirty="0"/>
               <a:t>JavaScript</a:t>
             </a:r>
           </a:p>
@@ -6961,7 +7008,7 @@
           <a:lstStyle/>
           <a:p>
             <a:r>
-              <a:rPr lang="fr-FR" u="sng"/>
+              <a:rPr lang="fr-FR" u="sng" dirty="0"/>
               <a:t>Explications techniques de la réalisation</a:t>
             </a:r>
           </a:p>
@@ -7220,8 +7267,8 @@
         </p:blipFill>
         <p:spPr>
           <a:xfrm>
-            <a:off x="1935307" y="2633472"/>
-            <a:ext cx="8300474" cy="3566160"/>
+            <a:off x="1630824" y="2530396"/>
+            <a:ext cx="8930351" cy="3836776"/>
           </a:xfrm>
           <a:prstGeom prst="rect">
             <a:avLst/>

--- a/Présentation/TOKI.pptx
+++ b/Présentation/TOKI.pptx
@@ -209,7 +209,7 @@
           <a:p>
             <a:fld id="{9CEC310B-918C-4C6B-8262-16D23C938C7B}" type="datetimeFigureOut">
               <a:rPr lang="fr-FR" smtClean="0"/>
-              <a:t>12/04/2026</a:t>
+              <a:t>03/05/2026</a:t>
             </a:fld>
             <a:endParaRPr lang="fr-FR"/>
           </a:p>
@@ -717,7 +717,7 @@
           <a:p>
             <a:fld id="{6444479B-705B-4489-957E-7E8A228BDFA0}" type="datetime1">
               <a:rPr lang="en-US" smtClean="0"/>
-              <a:t>4/12/2026</a:t>
+              <a:t>5/3/2026</a:t>
             </a:fld>
             <a:endParaRPr lang="en-US"/>
           </a:p>
@@ -915,7 +915,7 @@
           <a:p>
             <a:fld id="{C07B66AD-7C08-490A-ADA4-B47E10FB2407}" type="datetime1">
               <a:rPr lang="en-US" smtClean="0"/>
-              <a:t>4/12/2026</a:t>
+              <a:t>5/3/2026</a:t>
             </a:fld>
             <a:endParaRPr lang="en-US"/>
           </a:p>
@@ -1172,7 +1172,7 @@
           <a:p>
             <a:fld id="{05B95027-4255-49E7-9841-CD21BCC99996}" type="datetime1">
               <a:rPr lang="en-US" smtClean="0"/>
-              <a:t>4/12/2026</a:t>
+              <a:t>5/3/2026</a:t>
             </a:fld>
             <a:endParaRPr lang="en-US"/>
           </a:p>
@@ -1412,7 +1412,7 @@
           <a:p>
             <a:fld id="{9F89F774-3FA6-43B8-9241-99959C8FD463}" type="datetime1">
               <a:rPr lang="en-US" smtClean="0"/>
-              <a:t>4/12/2026</a:t>
+              <a:t>5/3/2026</a:t>
             </a:fld>
             <a:endParaRPr lang="en-US"/>
           </a:p>
@@ -1738,7 +1738,7 @@
           <a:p>
             <a:fld id="{F9504452-5DCC-4FE2-A5C9-8A5EF6714D65}" type="datetime1">
               <a:rPr lang="en-US" smtClean="0"/>
-              <a:t>4/12/2026</a:t>
+              <a:t>5/3/2026</a:t>
             </a:fld>
             <a:endParaRPr lang="en-US"/>
           </a:p>
@@ -2045,7 +2045,7 @@
           <a:p>
             <a:fld id="{E579ABC2-0180-4F3A-A895-A85BC724D472}" type="datetime1">
               <a:rPr lang="en-US" smtClean="0"/>
-              <a:t>4/12/2026</a:t>
+              <a:t>5/3/2026</a:t>
             </a:fld>
             <a:endParaRPr lang="en-US"/>
           </a:p>
@@ -2461,7 +2461,7 @@
           <a:p>
             <a:fld id="{6AEEA9BA-4E8F-439E-BEA4-91FBA01E3F5F}" type="datetime1">
               <a:rPr lang="en-US" smtClean="0"/>
-              <a:t>4/12/2026</a:t>
+              <a:t>5/3/2026</a:t>
             </a:fld>
             <a:endParaRPr lang="en-US"/>
           </a:p>
@@ -2602,7 +2602,7 @@
           <a:p>
             <a:fld id="{BE15BF18-0007-481C-AA29-413124BC3EE7}" type="datetime1">
               <a:rPr lang="en-US" smtClean="0"/>
-              <a:t>4/12/2026</a:t>
+              <a:t>5/3/2026</a:t>
             </a:fld>
             <a:endParaRPr lang="en-US"/>
           </a:p>
@@ -2764,7 +2764,7 @@
           <a:p>
             <a:fld id="{09BE9870-3748-43AD-B547-02A075CB4A1D}" type="datetime1">
               <a:rPr lang="en-US" smtClean="0"/>
-              <a:t>4/12/2026</a:t>
+              <a:t>5/3/2026</a:t>
             </a:fld>
             <a:endParaRPr lang="en-US"/>
           </a:p>
@@ -3079,7 +3079,7 @@
           <a:p>
             <a:fld id="{558E7897-33C5-4F1A-9307-D068E37F3DC7}" type="datetime1">
               <a:rPr lang="en-US" smtClean="0"/>
-              <a:t>4/12/2026</a:t>
+              <a:t>5/3/2026</a:t>
             </a:fld>
             <a:endParaRPr lang="en-US"/>
           </a:p>
@@ -3372,7 +3372,7 @@
           <a:p>
             <a:fld id="{82E171BA-CC09-47C8-A6DF-F5C5CB59CEEC}" type="datetime1">
               <a:rPr lang="en-US" smtClean="0"/>
-              <a:t>4/12/2026</a:t>
+              <a:t>5/3/2026</a:t>
             </a:fld>
             <a:endParaRPr lang="en-US"/>
           </a:p>
@@ -3611,7 +3611,7 @@
           <a:p>
             <a:fld id="{7DA38F49-B3E2-4BF0-BEC7-C30D34ABBB8D}" type="datetime1">
               <a:rPr lang="en-US" smtClean="0"/>
-              <a:t>4/12/2026</a:t>
+              <a:t>5/3/2026</a:t>
             </a:fld>
             <a:endParaRPr lang="en-US"/>
           </a:p>
@@ -4996,7 +4996,7 @@
         </p:blipFill>
         <p:spPr>
           <a:xfrm>
-            <a:off x="562733" y="3230076"/>
+            <a:off x="562734" y="2830135"/>
             <a:ext cx="2819644" cy="2034716"/>
           </a:xfrm>
           <a:prstGeom prst="rect">
@@ -5018,8 +5018,8 @@
         </p:nvSpPr>
         <p:spPr>
           <a:xfrm>
-            <a:off x="562734" y="5383359"/>
-            <a:ext cx="2819644" cy="1200329"/>
+            <a:off x="562734" y="5106360"/>
+            <a:ext cx="2929974" cy="1323439"/>
           </a:xfrm>
           <a:prstGeom prst="rect">
             <a:avLst/>
@@ -5033,7 +5033,7 @@
           <a:lstStyle/>
           <a:p>
             <a:r>
-              <a:rPr lang="fr-FR" dirty="0"/>
+              <a:rPr lang="fr-FR" sz="2000" dirty="0"/>
               <a:t>(Sur cette photo il est impossible de voir un contact connecté ou déconnecté)</a:t>
             </a:r>
           </a:p>
@@ -5698,7 +5698,7 @@
         </p:blipFill>
         <p:spPr>
           <a:xfrm>
-            <a:off x="8229600" y="1927021"/>
+            <a:off x="8589364" y="1927021"/>
             <a:ext cx="3293087" cy="3003957"/>
           </a:xfrm>
           <a:prstGeom prst="rect">
@@ -5721,7 +5721,7 @@
         <p:spPr>
           <a:xfrm>
             <a:off x="1530882" y="1421744"/>
-            <a:ext cx="4434484" cy="461665"/>
+            <a:ext cx="4978094" cy="523220"/>
           </a:xfrm>
           <a:prstGeom prst="rect">
             <a:avLst/>
@@ -5735,7 +5735,7 @@
           <a:lstStyle/>
           <a:p>
             <a:r>
-              <a:rPr lang="fr-FR" sz="2400" b="1" u="sng">
+              <a:rPr lang="fr-FR" sz="2800" b="1" u="sng">
                 <a:latin typeface="Aptos Display" panose="020B0004020202020204" pitchFamily="34" charset="0"/>
               </a:rPr>
               <a:t>un chat réseau multi-utilisateur</a:t>
@@ -5757,8 +5757,8 @@
         </p:nvSpPr>
         <p:spPr>
           <a:xfrm>
-            <a:off x="1350133" y="2205871"/>
-            <a:ext cx="3473836" cy="1938992"/>
+            <a:off x="1350133" y="2205870"/>
+            <a:ext cx="3401749" cy="3108543"/>
           </a:xfrm>
           <a:prstGeom prst="rect">
             <a:avLst/>
@@ -5772,7 +5772,7 @@
           <a:lstStyle/>
           <a:p>
             <a:r>
-              <a:rPr lang="fr-FR" sz="2000" b="1" u="sng" dirty="0">
+              <a:rPr lang="fr-FR" sz="2800" b="1" u="sng" dirty="0">
                 <a:latin typeface="Aptos Display" panose="020B0004020202020204" pitchFamily="34" charset="0"/>
               </a:rPr>
               <a:t>Fonctionnalités principales : </a:t>
@@ -5784,7 +5784,7 @@
               <a:buChar char="•"/>
             </a:pPr>
             <a:r>
-              <a:rPr lang="fr-FR" sz="2000" dirty="0">
+              <a:rPr lang="fr-FR" sz="2800" dirty="0">
                 <a:latin typeface="Aptos Display" panose="020B0004020202020204" pitchFamily="34" charset="0"/>
               </a:rPr>
               <a:t>Se connecter </a:t>
@@ -5796,7 +5796,7 @@
               <a:buChar char="•"/>
             </a:pPr>
             <a:r>
-              <a:rPr lang="fr-FR" sz="2000" dirty="0">
+              <a:rPr lang="fr-FR" sz="2800" dirty="0">
                 <a:latin typeface="Aptos Display" panose="020B0004020202020204" pitchFamily="34" charset="0"/>
               </a:rPr>
               <a:t>Créer un pseudo </a:t>
@@ -5808,7 +5808,7 @@
               <a:buChar char="•"/>
             </a:pPr>
             <a:r>
-              <a:rPr lang="fr-FR" sz="2000" dirty="0">
+              <a:rPr lang="fr-FR" sz="2800" dirty="0">
                 <a:latin typeface="Aptos Display" panose="020B0004020202020204" pitchFamily="34" charset="0"/>
               </a:rPr>
               <a:t>Discuter </a:t>
@@ -5820,7 +5820,7 @@
               <a:buChar char="•"/>
             </a:pPr>
             <a:r>
-              <a:rPr lang="fr-FR" sz="2000" dirty="0">
+              <a:rPr lang="fr-FR" sz="2800" dirty="0">
                 <a:latin typeface="Aptos Display" panose="020B0004020202020204" pitchFamily="34" charset="0"/>
               </a:rPr>
               <a:t>Ajouter contact </a:t>
@@ -5832,7 +5832,7 @@
               <a:buChar char="•"/>
             </a:pPr>
             <a:r>
-              <a:rPr lang="fr-FR" sz="2000" dirty="0">
+              <a:rPr lang="fr-FR" sz="2800" dirty="0">
                 <a:latin typeface="Aptos Display" panose="020B0004020202020204" pitchFamily="34" charset="0"/>
               </a:rPr>
               <a:t>Interface graphique </a:t>
@@ -5854,8 +5854,8 @@
         </p:nvSpPr>
         <p:spPr>
           <a:xfrm>
-            <a:off x="4984955" y="2205871"/>
-            <a:ext cx="3136490" cy="3170099"/>
+            <a:off x="4984954" y="2205871"/>
+            <a:ext cx="3604409" cy="3785652"/>
           </a:xfrm>
           <a:prstGeom prst="rect">
             <a:avLst/>
@@ -5869,7 +5869,7 @@
           <a:lstStyle/>
           <a:p>
             <a:r>
-              <a:rPr lang="fr-FR" sz="2000" b="1" u="sng" dirty="0">
+              <a:rPr lang="fr-FR" sz="2400" b="1" u="sng" dirty="0">
                 <a:latin typeface="Aptos Display" panose="020B0004020202020204" pitchFamily="34" charset="0"/>
               </a:rPr>
               <a:t>Fonctionnalités secondaires : </a:t>
@@ -5881,7 +5881,7 @@
               <a:buChar char="•"/>
             </a:pPr>
             <a:r>
-              <a:rPr lang="fr-FR" sz="2000" dirty="0">
+              <a:rPr lang="fr-FR" sz="2400" dirty="0">
                 <a:latin typeface="Aptos Display" panose="020B0004020202020204" pitchFamily="34" charset="0"/>
               </a:rPr>
               <a:t>Envoyer des images et des fichiers </a:t>
@@ -5893,7 +5893,7 @@
               <a:buChar char="•"/>
             </a:pPr>
             <a:r>
-              <a:rPr lang="fr-FR" sz="2000" dirty="0">
+              <a:rPr lang="fr-FR" sz="2400" dirty="0">
                 <a:latin typeface="Aptos Display" panose="020B0004020202020204" pitchFamily="34" charset="0"/>
               </a:rPr>
               <a:t>Création des groupes </a:t>
@@ -5905,7 +5905,7 @@
               <a:buChar char="•"/>
             </a:pPr>
             <a:r>
-              <a:rPr lang="fr-FR" sz="2000" dirty="0">
+              <a:rPr lang="fr-FR" sz="2400" dirty="0">
                 <a:latin typeface="Aptos Display" panose="020B0004020202020204" pitchFamily="34" charset="0"/>
               </a:rPr>
               <a:t>Historique des messages </a:t>
@@ -5917,7 +5917,7 @@
               <a:buChar char="•"/>
             </a:pPr>
             <a:r>
-              <a:rPr lang="fr-FR" sz="2000" dirty="0">
+              <a:rPr lang="fr-FR" sz="2400" dirty="0">
                 <a:latin typeface="Aptos Display" panose="020B0004020202020204" pitchFamily="34" charset="0"/>
               </a:rPr>
               <a:t>Envoyer des gifs </a:t>
@@ -5929,17 +5929,17 @@
               <a:buChar char="•"/>
             </a:pPr>
             <a:r>
-              <a:rPr lang="fr-FR" sz="2000" dirty="0">
+              <a:rPr lang="fr-FR" sz="2400" dirty="0">
                 <a:latin typeface="Aptos Display" panose="020B0004020202020204" pitchFamily="34" charset="0"/>
               </a:rPr>
               <a:t>Voir les contacts connectés/déconnectés</a:t>
             </a:r>
-            <a:endParaRPr lang="fr-FR" sz="2000" b="1" u="sng" dirty="0">
+            <a:endParaRPr lang="fr-FR" sz="2400" b="1" u="sng" dirty="0">
               <a:latin typeface="Aptos Display" panose="020B0004020202020204" pitchFamily="34" charset="0"/>
             </a:endParaRPr>
           </a:p>
           <a:p>
-            <a:endParaRPr lang="fr-FR" sz="2000" dirty="0"/>
+            <a:endParaRPr lang="fr-FR" sz="2400" dirty="0"/>
           </a:p>
         </p:txBody>
       </p:sp>
@@ -6031,7 +6031,7 @@
         <p:spPr>
           <a:xfrm>
             <a:off x="3703966" y="1200814"/>
-            <a:ext cx="4784067" cy="461665"/>
+            <a:ext cx="5542608" cy="523220"/>
           </a:xfrm>
           <a:prstGeom prst="rect">
             <a:avLst/>
@@ -6045,7 +6045,7 @@
           <a:lstStyle/>
           <a:p>
             <a:r>
-              <a:rPr lang="fr-FR" sz="2400" b="1" u="sng" dirty="0">
+              <a:rPr lang="fr-FR" sz="2800" b="1" u="sng" dirty="0">
                 <a:latin typeface="Aptos Display" panose="020B0004020202020204" pitchFamily="34" charset="0"/>
               </a:rPr>
               <a:t>Connexion et sécurité des comptes</a:t>
@@ -6068,7 +6068,7 @@
         <p:spPr>
           <a:xfrm>
             <a:off x="1491063" y="1897624"/>
-            <a:ext cx="2249527" cy="1015663"/>
+            <a:ext cx="2600392" cy="1200329"/>
           </a:xfrm>
           <a:prstGeom prst="rect">
             <a:avLst/>
@@ -6082,13 +6082,13 @@
           <a:lstStyle/>
           <a:p>
             <a:r>
-              <a:rPr lang="fr-FR" sz="2000" b="1" u="sng" dirty="0">
+              <a:rPr lang="fr-FR" sz="2400" b="1" u="sng" dirty="0">
                 <a:latin typeface="Aptos Display" panose="020B0004020202020204" pitchFamily="34" charset="0"/>
               </a:rPr>
               <a:t>Connexion</a:t>
             </a:r>
             <a:r>
-              <a:rPr lang="fr-FR" sz="2000" u="sng" dirty="0">
+              <a:rPr lang="fr-FR" sz="2400" u="sng" dirty="0">
                 <a:latin typeface="Aptos Display" panose="020B0004020202020204" pitchFamily="34" charset="0"/>
               </a:rPr>
               <a:t> :</a:t>
@@ -6100,7 +6100,7 @@
               <a:buChar char="•"/>
             </a:pPr>
             <a:r>
-              <a:rPr lang="fr-FR" sz="2000" dirty="0">
+              <a:rPr lang="fr-FR" sz="2400" dirty="0">
                 <a:latin typeface="Aptos Display" panose="020B0004020202020204" pitchFamily="34" charset="0"/>
               </a:rPr>
               <a:t>Nom d’utilisateur</a:t>
@@ -6112,7 +6112,7 @@
               <a:buChar char="•"/>
             </a:pPr>
             <a:r>
-              <a:rPr lang="fr-FR" sz="2000" dirty="0">
+              <a:rPr lang="fr-FR" sz="2400" dirty="0">
                 <a:latin typeface="Aptos Display" panose="020B0004020202020204" pitchFamily="34" charset="0"/>
               </a:rPr>
               <a:t>Mot de passe </a:t>
@@ -6164,8 +6164,8 @@
         </p:nvSpPr>
         <p:spPr>
           <a:xfrm>
-            <a:off x="4737016" y="2438311"/>
-            <a:ext cx="3147860" cy="2862322"/>
+            <a:off x="4407108" y="2438311"/>
+            <a:ext cx="3477768" cy="3416320"/>
           </a:xfrm>
           <a:prstGeom prst="rect">
             <a:avLst/>
@@ -6179,13 +6179,13 @@
           <a:lstStyle/>
           <a:p>
             <a:r>
-              <a:rPr lang="fr-FR" sz="2000" b="1" u="sng" dirty="0">
+              <a:rPr lang="fr-FR" sz="2400" b="1" u="sng" dirty="0">
                 <a:latin typeface="Aptos Display" panose="020B0004020202020204" pitchFamily="34" charset="0"/>
               </a:rPr>
               <a:t>Inscription</a:t>
             </a:r>
             <a:r>
-              <a:rPr lang="fr-FR" sz="2000" u="sng" dirty="0">
+              <a:rPr lang="fr-FR" sz="2400" u="sng" dirty="0">
                 <a:latin typeface="Aptos Display" panose="020B0004020202020204" pitchFamily="34" charset="0"/>
               </a:rPr>
               <a:t> :</a:t>
@@ -6193,7 +6193,7 @@
           </a:p>
           <a:p>
             <a:r>
-              <a:rPr lang="fr-FR" sz="2000" dirty="0">
+              <a:rPr lang="fr-FR" sz="2400" dirty="0">
                 <a:latin typeface="Aptos" panose="020B0004020202020204" pitchFamily="34" charset="0"/>
               </a:rPr>
               <a:t>Restriction sur les mots de passe : </a:t>
@@ -6201,7 +6201,7 @@
           </a:p>
           <a:p>
             <a:r>
-              <a:rPr lang="fr-FR" sz="2000" dirty="0">
+              <a:rPr lang="fr-FR" sz="2400" dirty="0">
                 <a:latin typeface="Aptos" panose="020B0004020202020204" pitchFamily="34" charset="0"/>
               </a:rPr>
               <a:t>• 8 caractères minimum </a:t>
@@ -6209,7 +6209,7 @@
           </a:p>
           <a:p>
             <a:r>
-              <a:rPr lang="fr-FR" sz="2000" dirty="0">
+              <a:rPr lang="fr-FR" sz="2400" dirty="0">
                 <a:latin typeface="Aptos" panose="020B0004020202020204" pitchFamily="34" charset="0"/>
               </a:rPr>
               <a:t>• Une majuscule </a:t>
@@ -6217,7 +6217,7 @@
           </a:p>
           <a:p>
             <a:r>
-              <a:rPr lang="fr-FR" sz="2000" dirty="0">
+              <a:rPr lang="fr-FR" sz="2400" dirty="0">
                 <a:latin typeface="Aptos" panose="020B0004020202020204" pitchFamily="34" charset="0"/>
               </a:rPr>
               <a:t>• Une minuscule </a:t>
@@ -6225,7 +6225,7 @@
           </a:p>
           <a:p>
             <a:r>
-              <a:rPr lang="fr-FR" sz="2000" dirty="0">
+              <a:rPr lang="fr-FR" sz="2400" dirty="0">
                 <a:latin typeface="Aptos" panose="020B0004020202020204" pitchFamily="34" charset="0"/>
               </a:rPr>
               <a:t>• Un chiffre </a:t>
@@ -6233,12 +6233,12 @@
           </a:p>
           <a:p>
             <a:r>
-              <a:rPr lang="fr-FR" sz="2000" dirty="0">
+              <a:rPr lang="fr-FR" sz="2400" dirty="0">
                 <a:latin typeface="Aptos" panose="020B0004020202020204" pitchFamily="34" charset="0"/>
               </a:rPr>
               <a:t>• Un caractère spécial (@, ?, %, !, …)</a:t>
             </a:r>
-            <a:endParaRPr lang="fr-FR" sz="2000" u="sng" dirty="0">
+            <a:endParaRPr lang="fr-FR" sz="2400" u="sng" dirty="0">
               <a:latin typeface="Aptos" panose="020B0004020202020204" pitchFamily="34" charset="0"/>
             </a:endParaRPr>
           </a:p>
@@ -6439,7 +6439,7 @@
         <p:spPr>
           <a:xfrm>
             <a:off x="3944608" y="853405"/>
-            <a:ext cx="4302781" cy="461665"/>
+            <a:ext cx="4984057" cy="523220"/>
           </a:xfrm>
           <a:prstGeom prst="rect">
             <a:avLst/>
@@ -6453,7 +6453,7 @@
           <a:lstStyle/>
           <a:p>
             <a:r>
-              <a:rPr lang="fr-FR" sz="2400" u="sng" dirty="0"/>
+              <a:rPr lang="fr-FR" sz="2800" u="sng" dirty="0"/>
               <a:t>Diagramme de cas d’utilisation</a:t>
             </a:r>
           </a:p>
@@ -6547,8 +6547,8 @@
         </p:nvSpPr>
         <p:spPr>
           <a:xfrm>
-            <a:off x="4267614" y="812253"/>
-            <a:ext cx="3656770" cy="461665"/>
+            <a:off x="3979875" y="812253"/>
+            <a:ext cx="4232249" cy="523220"/>
           </a:xfrm>
           <a:prstGeom prst="rect">
             <a:avLst/>
@@ -6563,7 +6563,7 @@
           <a:p>
             <a:pPr algn="ctr"/>
             <a:r>
-              <a:rPr lang="fr-FR" sz="2400" u="sng" dirty="0"/>
+              <a:rPr lang="fr-FR" sz="2800" u="sng" dirty="0"/>
               <a:t>Diagramme de séquences</a:t>
             </a:r>
           </a:p>
@@ -6866,8 +6866,8 @@
         </p:nvSpPr>
         <p:spPr>
           <a:xfrm>
-            <a:off x="5827627" y="1951672"/>
-            <a:ext cx="5351649" cy="1569660"/>
+            <a:off x="5246557" y="1951672"/>
+            <a:ext cx="5932719" cy="2123658"/>
           </a:xfrm>
           <a:prstGeom prst="rect">
             <a:avLst/>
@@ -6881,12 +6881,12 @@
           <a:lstStyle/>
           <a:p>
             <a:r>
-              <a:rPr lang="fr-FR" sz="2400" b="1" u="sng" dirty="0"/>
+              <a:rPr lang="fr-FR" sz="2800" b="1" u="sng" dirty="0"/>
               <a:t>Langages de programmation utilisés:</a:t>
             </a:r>
           </a:p>
           <a:p>
-            <a:endParaRPr lang="fr-FR" dirty="0"/>
+            <a:endParaRPr lang="fr-FR" sz="2000" dirty="0"/>
           </a:p>
           <a:p>
             <a:pPr marL="285750" indent="-285750">
@@ -6894,7 +6894,7 @@
               <a:buChar char="-"/>
             </a:pPr>
             <a:r>
-              <a:rPr lang="fr-FR" dirty="0"/>
+              <a:rPr lang="fr-FR" sz="2800" dirty="0"/>
               <a:t>Python</a:t>
             </a:r>
           </a:p>
@@ -6904,7 +6904,7 @@
               <a:buChar char="-"/>
             </a:pPr>
             <a:r>
-              <a:rPr lang="fr-FR" dirty="0"/>
+              <a:rPr lang="fr-FR" sz="2800" dirty="0"/>
               <a:t>HTML/CSS</a:t>
             </a:r>
           </a:p>
@@ -6914,7 +6914,7 @@
               <a:buChar char="-"/>
             </a:pPr>
             <a:r>
-              <a:rPr lang="fr-FR" dirty="0"/>
+              <a:rPr lang="fr-FR" sz="2800" dirty="0"/>
               <a:t>JavaScript</a:t>
             </a:r>
           </a:p>
@@ -6944,6 +6944,66 @@
           <a:xfrm>
             <a:off x="10763109" y="0"/>
             <a:ext cx="1428891" cy="1303436"/>
+          </a:xfrm>
+          <a:prstGeom prst="rect">
+            <a:avLst/>
+          </a:prstGeom>
+        </p:spPr>
+      </p:pic>
+      <p:pic>
+        <p:nvPicPr>
+          <p:cNvPr id="7" name="Image 6">
+            <a:extLst>
+              <a:ext uri="{FF2B5EF4-FFF2-40B4-BE49-F238E27FC236}">
+                <a16:creationId xmlns:a16="http://schemas.microsoft.com/office/drawing/2014/main" id="{FF78954F-D80F-C780-F2F1-FF03C5BEAF18}"/>
+              </a:ext>
+            </a:extLst>
+          </p:cNvPr>
+          <p:cNvPicPr>
+            <a:picLocks noChangeAspect="1"/>
+          </p:cNvPicPr>
+          <p:nvPr/>
+        </p:nvPicPr>
+        <p:blipFill>
+          <a:blip r:embed="rId3"/>
+          <a:stretch>
+            <a:fillRect/>
+          </a:stretch>
+        </p:blipFill>
+        <p:spPr>
+          <a:xfrm>
+            <a:off x="2548328" y="150262"/>
+            <a:ext cx="979357" cy="979357"/>
+          </a:xfrm>
+          <a:prstGeom prst="rect">
+            <a:avLst/>
+          </a:prstGeom>
+        </p:spPr>
+      </p:pic>
+      <p:pic>
+        <p:nvPicPr>
+          <p:cNvPr id="9" name="Image 8">
+            <a:extLst>
+              <a:ext uri="{FF2B5EF4-FFF2-40B4-BE49-F238E27FC236}">
+                <a16:creationId xmlns:a16="http://schemas.microsoft.com/office/drawing/2014/main" id="{35E5743E-189B-424F-49F9-1B5656226086}"/>
+              </a:ext>
+            </a:extLst>
+          </p:cNvPr>
+          <p:cNvPicPr>
+            <a:picLocks noChangeAspect="1"/>
+          </p:cNvPicPr>
+          <p:nvPr/>
+        </p:nvPicPr>
+        <p:blipFill>
+          <a:blip r:embed="rId4"/>
+          <a:stretch>
+            <a:fillRect/>
+          </a:stretch>
+        </p:blipFill>
+        <p:spPr>
+          <a:xfrm>
+            <a:off x="9409857" y="4152349"/>
+            <a:ext cx="2556604" cy="2556604"/>
           </a:xfrm>
           <a:prstGeom prst="rect">
             <a:avLst/>
@@ -7038,8 +7098,8 @@
         </p:blipFill>
         <p:spPr>
           <a:xfrm>
-            <a:off x="581961" y="3182440"/>
-            <a:ext cx="10890928" cy="1938699"/>
+            <a:off x="220322" y="3100054"/>
+            <a:ext cx="11751355" cy="2091864"/>
           </a:xfrm>
           <a:prstGeom prst="rect">
             <a:avLst/>
@@ -7090,8 +7150,8 @@
         </p:nvSpPr>
         <p:spPr>
           <a:xfrm>
-            <a:off x="4798554" y="2004995"/>
-            <a:ext cx="2465740" cy="461665"/>
+            <a:off x="4662717" y="2238048"/>
+            <a:ext cx="2845652" cy="523220"/>
           </a:xfrm>
           <a:prstGeom prst="rect">
             <a:avLst/>
@@ -7106,10 +7166,10 @@
           <a:p>
             <a:pPr algn="ctr"/>
             <a:r>
-              <a:rPr lang="fr-FR" sz="2400" u="sng"/>
+              <a:rPr lang="fr-FR" sz="2800" u="sng" dirty="0"/>
               <a:t>Base de données</a:t>
             </a:r>
-            <a:endParaRPr lang="en-US" err="1"/>
+            <a:endParaRPr lang="en-US" sz="2000" dirty="0"/>
           </a:p>
         </p:txBody>
       </p:sp>
@@ -7221,8 +7281,8 @@
         </p:nvSpPr>
         <p:spPr>
           <a:xfrm>
-            <a:off x="3595957" y="1921046"/>
-            <a:ext cx="5000088" cy="461665"/>
+            <a:off x="3200816" y="2007216"/>
+            <a:ext cx="5790368" cy="523220"/>
           </a:xfrm>
           <a:prstGeom prst="rect">
             <a:avLst/>
@@ -7237,7 +7297,7 @@
           <a:p>
             <a:pPr algn="ctr"/>
             <a:r>
-              <a:rPr lang="fr-FR" sz="2400" u="sng"/>
+              <a:rPr lang="fr-FR" sz="2800" u="sng" dirty="0"/>
               <a:t>Fonction de l'API pour la connexion </a:t>
             </a:r>
           </a:p>

--- a/Présentation/TOKI.pptx
+++ b/Présentation/TOKI.pptx
@@ -11,9 +11,9 @@
     <p:sldId id="256" r:id="rId2"/>
     <p:sldId id="257" r:id="rId3"/>
     <p:sldId id="258" r:id="rId4"/>
-    <p:sldId id="259" r:id="rId5"/>
-    <p:sldId id="260" r:id="rId6"/>
-    <p:sldId id="264" r:id="rId7"/>
+    <p:sldId id="260" r:id="rId5"/>
+    <p:sldId id="264" r:id="rId6"/>
+    <p:sldId id="259" r:id="rId7"/>
     <p:sldId id="261" r:id="rId8"/>
     <p:sldId id="272" r:id="rId9"/>
     <p:sldId id="273" r:id="rId10"/>
@@ -209,7 +209,7 @@
           <a:p>
             <a:fld id="{9CEC310B-918C-4C6B-8262-16D23C938C7B}" type="datetimeFigureOut">
               <a:rPr lang="fr-FR" smtClean="0"/>
-              <a:t>03/05/2026</a:t>
+              <a:t>04/05/2026</a:t>
             </a:fld>
             <a:endParaRPr lang="fr-FR"/>
           </a:p>
@@ -544,7 +544,7 @@
           <a:p>
             <a:fld id="{08798FA1-20D3-46ED-A06E-B96DB04CEA0D}" type="slidenum">
               <a:rPr lang="fr-FR" smtClean="0"/>
-              <a:t>6</a:t>
+              <a:t>5</a:t>
             </a:fld>
             <a:endParaRPr lang="fr-FR"/>
           </a:p>
@@ -717,7 +717,7 @@
           <a:p>
             <a:fld id="{6444479B-705B-4489-957E-7E8A228BDFA0}" type="datetime1">
               <a:rPr lang="en-US" smtClean="0"/>
-              <a:t>5/3/2026</a:t>
+              <a:t>5/4/2026</a:t>
             </a:fld>
             <a:endParaRPr lang="en-US"/>
           </a:p>
@@ -915,7 +915,7 @@
           <a:p>
             <a:fld id="{C07B66AD-7C08-490A-ADA4-B47E10FB2407}" type="datetime1">
               <a:rPr lang="en-US" smtClean="0"/>
-              <a:t>5/3/2026</a:t>
+              <a:t>5/4/2026</a:t>
             </a:fld>
             <a:endParaRPr lang="en-US"/>
           </a:p>
@@ -1172,7 +1172,7 @@
           <a:p>
             <a:fld id="{05B95027-4255-49E7-9841-CD21BCC99996}" type="datetime1">
               <a:rPr lang="en-US" smtClean="0"/>
-              <a:t>5/3/2026</a:t>
+              <a:t>5/4/2026</a:t>
             </a:fld>
             <a:endParaRPr lang="en-US"/>
           </a:p>
@@ -1412,7 +1412,7 @@
           <a:p>
             <a:fld id="{9F89F774-3FA6-43B8-9241-99959C8FD463}" type="datetime1">
               <a:rPr lang="en-US" smtClean="0"/>
-              <a:t>5/3/2026</a:t>
+              <a:t>5/4/2026</a:t>
             </a:fld>
             <a:endParaRPr lang="en-US"/>
           </a:p>
@@ -1738,7 +1738,7 @@
           <a:p>
             <a:fld id="{F9504452-5DCC-4FE2-A5C9-8A5EF6714D65}" type="datetime1">
               <a:rPr lang="en-US" smtClean="0"/>
-              <a:t>5/3/2026</a:t>
+              <a:t>5/4/2026</a:t>
             </a:fld>
             <a:endParaRPr lang="en-US"/>
           </a:p>
@@ -2045,7 +2045,7 @@
           <a:p>
             <a:fld id="{E579ABC2-0180-4F3A-A895-A85BC724D472}" type="datetime1">
               <a:rPr lang="en-US" smtClean="0"/>
-              <a:t>5/3/2026</a:t>
+              <a:t>5/4/2026</a:t>
             </a:fld>
             <a:endParaRPr lang="en-US"/>
           </a:p>
@@ -2461,7 +2461,7 @@
           <a:p>
             <a:fld id="{6AEEA9BA-4E8F-439E-BEA4-91FBA01E3F5F}" type="datetime1">
               <a:rPr lang="en-US" smtClean="0"/>
-              <a:t>5/3/2026</a:t>
+              <a:t>5/4/2026</a:t>
             </a:fld>
             <a:endParaRPr lang="en-US"/>
           </a:p>
@@ -2602,7 +2602,7 @@
           <a:p>
             <a:fld id="{BE15BF18-0007-481C-AA29-413124BC3EE7}" type="datetime1">
               <a:rPr lang="en-US" smtClean="0"/>
-              <a:t>5/3/2026</a:t>
+              <a:t>5/4/2026</a:t>
             </a:fld>
             <a:endParaRPr lang="en-US"/>
           </a:p>
@@ -2764,7 +2764,7 @@
           <a:p>
             <a:fld id="{09BE9870-3748-43AD-B547-02A075CB4A1D}" type="datetime1">
               <a:rPr lang="en-US" smtClean="0"/>
-              <a:t>5/3/2026</a:t>
+              <a:t>5/4/2026</a:t>
             </a:fld>
             <a:endParaRPr lang="en-US"/>
           </a:p>
@@ -3079,7 +3079,7 @@
           <a:p>
             <a:fld id="{558E7897-33C5-4F1A-9307-D068E37F3DC7}" type="datetime1">
               <a:rPr lang="en-US" smtClean="0"/>
-              <a:t>5/3/2026</a:t>
+              <a:t>5/4/2026</a:t>
             </a:fld>
             <a:endParaRPr lang="en-US"/>
           </a:p>
@@ -3372,7 +3372,7 @@
           <a:p>
             <a:fld id="{82E171BA-CC09-47C8-A6DF-F5C5CB59CEEC}" type="datetime1">
               <a:rPr lang="en-US" smtClean="0"/>
-              <a:t>5/3/2026</a:t>
+              <a:t>5/4/2026</a:t>
             </a:fld>
             <a:endParaRPr lang="en-US"/>
           </a:p>
@@ -3611,7 +3611,7 @@
           <a:p>
             <a:fld id="{7DA38F49-B3E2-4BF0-BEC7-C30D34ABBB8D}" type="datetime1">
               <a:rPr lang="en-US" smtClean="0"/>
-              <a:t>5/3/2026</a:t>
+              <a:t>5/4/2026</a:t>
             </a:fld>
             <a:endParaRPr lang="en-US"/>
           </a:p>
@@ -5964,337 +5964,6 @@
         <p:cNvPr id="1" name="">
           <a:extLst>
             <a:ext uri="{FF2B5EF4-FFF2-40B4-BE49-F238E27FC236}">
-              <a16:creationId xmlns:a16="http://schemas.microsoft.com/office/drawing/2014/main" id="{E86AC3F2-1BD3-8FC9-A751-967F7C0AAFAB}"/>
-            </a:ext>
-          </a:extLst>
-        </p:cNvPr>
-        <p:cNvGrpSpPr/>
-        <p:nvPr/>
-      </p:nvGrpSpPr>
-      <p:grpSpPr>
-        <a:xfrm>
-          <a:off x="0" y="0"/>
-          <a:ext cx="0" cy="0"/>
-          <a:chOff x="0" y="0"/>
-          <a:chExt cx="0" cy="0"/>
-        </a:xfrm>
-      </p:grpSpPr>
-      <p:sp>
-        <p:nvSpPr>
-          <p:cNvPr id="3" name="ZoneTexte 2">
-            <a:extLst>
-              <a:ext uri="{FF2B5EF4-FFF2-40B4-BE49-F238E27FC236}">
-                <a16:creationId xmlns:a16="http://schemas.microsoft.com/office/drawing/2014/main" id="{FB5C5047-18D2-666E-3FF6-74C07D1F898E}"/>
-              </a:ext>
-            </a:extLst>
-          </p:cNvPr>
-          <p:cNvSpPr txBox="1"/>
-          <p:nvPr/>
-        </p:nvSpPr>
-        <p:spPr>
-          <a:xfrm>
-            <a:off x="3741174" y="319339"/>
-            <a:ext cx="4709652" cy="646331"/>
-          </a:xfrm>
-          <a:prstGeom prst="rect">
-            <a:avLst/>
-          </a:prstGeom>
-          <a:noFill/>
-        </p:spPr>
-        <p:txBody>
-          <a:bodyPr wrap="square">
-            <a:spAutoFit/>
-          </a:bodyPr>
-          <a:lstStyle/>
-          <a:p>
-            <a:r>
-              <a:rPr lang="fr-FR" sz="3600" b="1" u="sng" dirty="0">
-                <a:latin typeface="Aptos Display" panose="020B0004020202020204" pitchFamily="34" charset="0"/>
-              </a:rPr>
-              <a:t>Présentation du projet </a:t>
-            </a:r>
-          </a:p>
-        </p:txBody>
-      </p:sp>
-      <p:sp>
-        <p:nvSpPr>
-          <p:cNvPr id="2" name="ZoneTexte 1">
-            <a:extLst>
-              <a:ext uri="{FF2B5EF4-FFF2-40B4-BE49-F238E27FC236}">
-                <a16:creationId xmlns:a16="http://schemas.microsoft.com/office/drawing/2014/main" id="{617EF53E-7251-382D-3FC2-A65571B3DE37}"/>
-              </a:ext>
-            </a:extLst>
-          </p:cNvPr>
-          <p:cNvSpPr txBox="1"/>
-          <p:nvPr/>
-        </p:nvSpPr>
-        <p:spPr>
-          <a:xfrm>
-            <a:off x="3703966" y="1200814"/>
-            <a:ext cx="5542608" cy="523220"/>
-          </a:xfrm>
-          <a:prstGeom prst="rect">
-            <a:avLst/>
-          </a:prstGeom>
-          <a:noFill/>
-        </p:spPr>
-        <p:txBody>
-          <a:bodyPr wrap="none" rtlCol="0">
-            <a:spAutoFit/>
-          </a:bodyPr>
-          <a:lstStyle/>
-          <a:p>
-            <a:r>
-              <a:rPr lang="fr-FR" sz="2800" b="1" u="sng" dirty="0">
-                <a:latin typeface="Aptos Display" panose="020B0004020202020204" pitchFamily="34" charset="0"/>
-              </a:rPr>
-              <a:t>Connexion et sécurité des comptes</a:t>
-            </a:r>
-          </a:p>
-        </p:txBody>
-      </p:sp>
-      <p:sp>
-        <p:nvSpPr>
-          <p:cNvPr id="4" name="ZoneTexte 3">
-            <a:extLst>
-              <a:ext uri="{FF2B5EF4-FFF2-40B4-BE49-F238E27FC236}">
-                <a16:creationId xmlns:a16="http://schemas.microsoft.com/office/drawing/2014/main" id="{6B4F750B-FC1B-FD2A-5231-8FED5B644F90}"/>
-              </a:ext>
-            </a:extLst>
-          </p:cNvPr>
-          <p:cNvSpPr txBox="1"/>
-          <p:nvPr/>
-        </p:nvSpPr>
-        <p:spPr>
-          <a:xfrm>
-            <a:off x="1491063" y="1897624"/>
-            <a:ext cx="2600392" cy="1200329"/>
-          </a:xfrm>
-          <a:prstGeom prst="rect">
-            <a:avLst/>
-          </a:prstGeom>
-          <a:noFill/>
-        </p:spPr>
-        <p:txBody>
-          <a:bodyPr wrap="none" rtlCol="0">
-            <a:spAutoFit/>
-          </a:bodyPr>
-          <a:lstStyle/>
-          <a:p>
-            <a:r>
-              <a:rPr lang="fr-FR" sz="2400" b="1" u="sng" dirty="0">
-                <a:latin typeface="Aptos Display" panose="020B0004020202020204" pitchFamily="34" charset="0"/>
-              </a:rPr>
-              <a:t>Connexion</a:t>
-            </a:r>
-            <a:r>
-              <a:rPr lang="fr-FR" sz="2400" u="sng" dirty="0">
-                <a:latin typeface="Aptos Display" panose="020B0004020202020204" pitchFamily="34" charset="0"/>
-              </a:rPr>
-              <a:t> :</a:t>
-            </a:r>
-          </a:p>
-          <a:p>
-            <a:pPr marL="285750" indent="-285750">
-              <a:buFont typeface="Arial" panose="020B0604020202020204" pitchFamily="34" charset="0"/>
-              <a:buChar char="•"/>
-            </a:pPr>
-            <a:r>
-              <a:rPr lang="fr-FR" sz="2400" dirty="0">
-                <a:latin typeface="Aptos Display" panose="020B0004020202020204" pitchFamily="34" charset="0"/>
-              </a:rPr>
-              <a:t>Nom d’utilisateur</a:t>
-            </a:r>
-          </a:p>
-          <a:p>
-            <a:pPr marL="285750" indent="-285750">
-              <a:buFont typeface="Arial" panose="020B0604020202020204" pitchFamily="34" charset="0"/>
-              <a:buChar char="•"/>
-            </a:pPr>
-            <a:r>
-              <a:rPr lang="fr-FR" sz="2400" dirty="0">
-                <a:latin typeface="Aptos Display" panose="020B0004020202020204" pitchFamily="34" charset="0"/>
-              </a:rPr>
-              <a:t>Mot de passe </a:t>
-            </a:r>
-          </a:p>
-        </p:txBody>
-      </p:sp>
-      <p:pic>
-        <p:nvPicPr>
-          <p:cNvPr id="10" name="Image 9">
-            <a:extLst>
-              <a:ext uri="{FF2B5EF4-FFF2-40B4-BE49-F238E27FC236}">
-                <a16:creationId xmlns:a16="http://schemas.microsoft.com/office/drawing/2014/main" id="{49549AC7-6C61-671C-8646-EE4387E4BA3F}"/>
-              </a:ext>
-            </a:extLst>
-          </p:cNvPr>
-          <p:cNvPicPr>
-            <a:picLocks noChangeAspect="1"/>
-          </p:cNvPicPr>
-          <p:nvPr/>
-        </p:nvPicPr>
-        <p:blipFill>
-          <a:blip r:embed="rId2"/>
-          <a:stretch>
-            <a:fillRect/>
-          </a:stretch>
-        </p:blipFill>
-        <p:spPr>
-          <a:xfrm>
-            <a:off x="952192" y="3218508"/>
-            <a:ext cx="3147860" cy="3215949"/>
-          </a:xfrm>
-          <a:prstGeom prst="rect">
-            <a:avLst/>
-          </a:prstGeom>
-        </p:spPr>
-      </p:pic>
-      <p:sp>
-        <p:nvSpPr>
-          <p:cNvPr id="7" name="ZoneTexte 6">
-            <a:extLst>
-              <a:ext uri="{FF2B5EF4-FFF2-40B4-BE49-F238E27FC236}">
-                <a16:creationId xmlns:a16="http://schemas.microsoft.com/office/drawing/2014/main" id="{C70410CA-2EDE-6F52-9FE0-A43D0E398AEE}"/>
-              </a:ext>
-            </a:extLst>
-          </p:cNvPr>
-          <p:cNvSpPr txBox="1"/>
-          <p:nvPr/>
-        </p:nvSpPr>
-        <p:spPr>
-          <a:xfrm>
-            <a:off x="4407108" y="2438311"/>
-            <a:ext cx="3477768" cy="3416320"/>
-          </a:xfrm>
-          <a:prstGeom prst="rect">
-            <a:avLst/>
-          </a:prstGeom>
-          <a:noFill/>
-        </p:spPr>
-        <p:txBody>
-          <a:bodyPr wrap="square" rtlCol="0">
-            <a:spAutoFit/>
-          </a:bodyPr>
-          <a:lstStyle/>
-          <a:p>
-            <a:r>
-              <a:rPr lang="fr-FR" sz="2400" b="1" u="sng" dirty="0">
-                <a:latin typeface="Aptos Display" panose="020B0004020202020204" pitchFamily="34" charset="0"/>
-              </a:rPr>
-              <a:t>Inscription</a:t>
-            </a:r>
-            <a:r>
-              <a:rPr lang="fr-FR" sz="2400" u="sng" dirty="0">
-                <a:latin typeface="Aptos Display" panose="020B0004020202020204" pitchFamily="34" charset="0"/>
-              </a:rPr>
-              <a:t> :</a:t>
-            </a:r>
-          </a:p>
-          <a:p>
-            <a:r>
-              <a:rPr lang="fr-FR" sz="2400" dirty="0">
-                <a:latin typeface="Aptos" panose="020B0004020202020204" pitchFamily="34" charset="0"/>
-              </a:rPr>
-              <a:t>Restriction sur les mots de passe : </a:t>
-            </a:r>
-          </a:p>
-          <a:p>
-            <a:r>
-              <a:rPr lang="fr-FR" sz="2400" dirty="0">
-                <a:latin typeface="Aptos" panose="020B0004020202020204" pitchFamily="34" charset="0"/>
-              </a:rPr>
-              <a:t>• 8 caractères minimum </a:t>
-            </a:r>
-          </a:p>
-          <a:p>
-            <a:r>
-              <a:rPr lang="fr-FR" sz="2400" dirty="0">
-                <a:latin typeface="Aptos" panose="020B0004020202020204" pitchFamily="34" charset="0"/>
-              </a:rPr>
-              <a:t>• Une majuscule </a:t>
-            </a:r>
-          </a:p>
-          <a:p>
-            <a:r>
-              <a:rPr lang="fr-FR" sz="2400" dirty="0">
-                <a:latin typeface="Aptos" panose="020B0004020202020204" pitchFamily="34" charset="0"/>
-              </a:rPr>
-              <a:t>• Une minuscule </a:t>
-            </a:r>
-          </a:p>
-          <a:p>
-            <a:r>
-              <a:rPr lang="fr-FR" sz="2400" dirty="0">
-                <a:latin typeface="Aptos" panose="020B0004020202020204" pitchFamily="34" charset="0"/>
-              </a:rPr>
-              <a:t>• Un chiffre </a:t>
-            </a:r>
-          </a:p>
-          <a:p>
-            <a:r>
-              <a:rPr lang="fr-FR" sz="2400" dirty="0">
-                <a:latin typeface="Aptos" panose="020B0004020202020204" pitchFamily="34" charset="0"/>
-              </a:rPr>
-              <a:t>• Un caractère spécial (@, ?, %, !, …)</a:t>
-            </a:r>
-            <a:endParaRPr lang="fr-FR" sz="2400" u="sng" dirty="0">
-              <a:latin typeface="Aptos" panose="020B0004020202020204" pitchFamily="34" charset="0"/>
-            </a:endParaRPr>
-          </a:p>
-        </p:txBody>
-      </p:sp>
-      <p:pic>
-        <p:nvPicPr>
-          <p:cNvPr id="8" name="Image 7">
-            <a:extLst>
-              <a:ext uri="{FF2B5EF4-FFF2-40B4-BE49-F238E27FC236}">
-                <a16:creationId xmlns:a16="http://schemas.microsoft.com/office/drawing/2014/main" id="{7044476A-A6F8-600B-FCD7-1F2F0AB475CC}"/>
-              </a:ext>
-            </a:extLst>
-          </p:cNvPr>
-          <p:cNvPicPr>
-            <a:picLocks noChangeAspect="1"/>
-          </p:cNvPicPr>
-          <p:nvPr/>
-        </p:nvPicPr>
-        <p:blipFill>
-          <a:blip r:embed="rId3"/>
-          <a:stretch>
-            <a:fillRect/>
-          </a:stretch>
-        </p:blipFill>
-        <p:spPr>
-          <a:xfrm>
-            <a:off x="8162379" y="1897624"/>
-            <a:ext cx="3321696" cy="4720304"/>
-          </a:xfrm>
-          <a:prstGeom prst="rect">
-            <a:avLst/>
-          </a:prstGeom>
-        </p:spPr>
-      </p:pic>
-    </p:spTree>
-    <p:extLst>
-      <p:ext uri="{BB962C8B-B14F-4D97-AF65-F5344CB8AC3E}">
-        <p14:creationId xmlns:p14="http://schemas.microsoft.com/office/powerpoint/2010/main" val="243014035"/>
-      </p:ext>
-    </p:extLst>
-  </p:cSld>
-  <p:clrMapOvr>
-    <a:masterClrMapping/>
-  </p:clrMapOvr>
-</p:sld>
-</file>
-
-<file path=ppt/slides/slide5.xml><?xml version="1.0" encoding="utf-8"?>
-<p:sld xmlns:a="http://schemas.openxmlformats.org/drawingml/2006/main" xmlns:r="http://schemas.openxmlformats.org/officeDocument/2006/relationships" xmlns:p="http://schemas.openxmlformats.org/presentationml/2006/main">
-  <p:cSld>
-    <p:spTree>
-      <p:nvGrpSpPr>
-        <p:cNvPr id="1" name="">
-          <a:extLst>
-            <a:ext uri="{FF2B5EF4-FFF2-40B4-BE49-F238E27FC236}">
               <a16:creationId xmlns:a16="http://schemas.microsoft.com/office/drawing/2014/main" id="{196C41EE-C7C0-2D7F-4169-4BF1C99E820B}"/>
             </a:ext>
           </a:extLst>
@@ -6472,7 +6141,7 @@
 </p:sld>
 </file>
 
-<file path=ppt/slides/slide6.xml><?xml version="1.0" encoding="utf-8"?>
+<file path=ppt/slides/slide5.xml><?xml version="1.0" encoding="utf-8"?>
 <p:sld xmlns:a="http://schemas.openxmlformats.org/drawingml/2006/main" xmlns:r="http://schemas.openxmlformats.org/officeDocument/2006/relationships" xmlns:p="http://schemas.openxmlformats.org/presentationml/2006/main">
   <p:cSld>
     <p:spTree>
@@ -6650,6 +6319,337 @@
     <p:extLst>
       <p:ext uri="{BB962C8B-B14F-4D97-AF65-F5344CB8AC3E}">
         <p14:creationId xmlns:p14="http://schemas.microsoft.com/office/powerpoint/2010/main" val="1157583138"/>
+      </p:ext>
+    </p:extLst>
+  </p:cSld>
+  <p:clrMapOvr>
+    <a:masterClrMapping/>
+  </p:clrMapOvr>
+</p:sld>
+</file>
+
+<file path=ppt/slides/slide6.xml><?xml version="1.0" encoding="utf-8"?>
+<p:sld xmlns:a="http://schemas.openxmlformats.org/drawingml/2006/main" xmlns:r="http://schemas.openxmlformats.org/officeDocument/2006/relationships" xmlns:p="http://schemas.openxmlformats.org/presentationml/2006/main">
+  <p:cSld>
+    <p:spTree>
+      <p:nvGrpSpPr>
+        <p:cNvPr id="1" name="">
+          <a:extLst>
+            <a:ext uri="{FF2B5EF4-FFF2-40B4-BE49-F238E27FC236}">
+              <a16:creationId xmlns:a16="http://schemas.microsoft.com/office/drawing/2014/main" id="{E86AC3F2-1BD3-8FC9-A751-967F7C0AAFAB}"/>
+            </a:ext>
+          </a:extLst>
+        </p:cNvPr>
+        <p:cNvGrpSpPr/>
+        <p:nvPr/>
+      </p:nvGrpSpPr>
+      <p:grpSpPr>
+        <a:xfrm>
+          <a:off x="0" y="0"/>
+          <a:ext cx="0" cy="0"/>
+          <a:chOff x="0" y="0"/>
+          <a:chExt cx="0" cy="0"/>
+        </a:xfrm>
+      </p:grpSpPr>
+      <p:sp>
+        <p:nvSpPr>
+          <p:cNvPr id="3" name="ZoneTexte 2">
+            <a:extLst>
+              <a:ext uri="{FF2B5EF4-FFF2-40B4-BE49-F238E27FC236}">
+                <a16:creationId xmlns:a16="http://schemas.microsoft.com/office/drawing/2014/main" id="{FB5C5047-18D2-666E-3FF6-74C07D1F898E}"/>
+              </a:ext>
+            </a:extLst>
+          </p:cNvPr>
+          <p:cNvSpPr txBox="1"/>
+          <p:nvPr/>
+        </p:nvSpPr>
+        <p:spPr>
+          <a:xfrm>
+            <a:off x="3741174" y="319339"/>
+            <a:ext cx="4709652" cy="646331"/>
+          </a:xfrm>
+          <a:prstGeom prst="rect">
+            <a:avLst/>
+          </a:prstGeom>
+          <a:noFill/>
+        </p:spPr>
+        <p:txBody>
+          <a:bodyPr wrap="square">
+            <a:spAutoFit/>
+          </a:bodyPr>
+          <a:lstStyle/>
+          <a:p>
+            <a:r>
+              <a:rPr lang="fr-FR" sz="3600" b="1" u="sng" dirty="0">
+                <a:latin typeface="Aptos Display" panose="020B0004020202020204" pitchFamily="34" charset="0"/>
+              </a:rPr>
+              <a:t>Présentation du projet </a:t>
+            </a:r>
+          </a:p>
+        </p:txBody>
+      </p:sp>
+      <p:sp>
+        <p:nvSpPr>
+          <p:cNvPr id="2" name="ZoneTexte 1">
+            <a:extLst>
+              <a:ext uri="{FF2B5EF4-FFF2-40B4-BE49-F238E27FC236}">
+                <a16:creationId xmlns:a16="http://schemas.microsoft.com/office/drawing/2014/main" id="{617EF53E-7251-382D-3FC2-A65571B3DE37}"/>
+              </a:ext>
+            </a:extLst>
+          </p:cNvPr>
+          <p:cNvSpPr txBox="1"/>
+          <p:nvPr/>
+        </p:nvSpPr>
+        <p:spPr>
+          <a:xfrm>
+            <a:off x="3703966" y="1200814"/>
+            <a:ext cx="5542608" cy="523220"/>
+          </a:xfrm>
+          <a:prstGeom prst="rect">
+            <a:avLst/>
+          </a:prstGeom>
+          <a:noFill/>
+        </p:spPr>
+        <p:txBody>
+          <a:bodyPr wrap="none" rtlCol="0">
+            <a:spAutoFit/>
+          </a:bodyPr>
+          <a:lstStyle/>
+          <a:p>
+            <a:r>
+              <a:rPr lang="fr-FR" sz="2800" b="1" u="sng" dirty="0">
+                <a:latin typeface="Aptos Display" panose="020B0004020202020204" pitchFamily="34" charset="0"/>
+              </a:rPr>
+              <a:t>Connexion et sécurité des comptes</a:t>
+            </a:r>
+          </a:p>
+        </p:txBody>
+      </p:sp>
+      <p:sp>
+        <p:nvSpPr>
+          <p:cNvPr id="4" name="ZoneTexte 3">
+            <a:extLst>
+              <a:ext uri="{FF2B5EF4-FFF2-40B4-BE49-F238E27FC236}">
+                <a16:creationId xmlns:a16="http://schemas.microsoft.com/office/drawing/2014/main" id="{6B4F750B-FC1B-FD2A-5231-8FED5B644F90}"/>
+              </a:ext>
+            </a:extLst>
+          </p:cNvPr>
+          <p:cNvSpPr txBox="1"/>
+          <p:nvPr/>
+        </p:nvSpPr>
+        <p:spPr>
+          <a:xfrm>
+            <a:off x="1491063" y="1897624"/>
+            <a:ext cx="2600392" cy="1200329"/>
+          </a:xfrm>
+          <a:prstGeom prst="rect">
+            <a:avLst/>
+          </a:prstGeom>
+          <a:noFill/>
+        </p:spPr>
+        <p:txBody>
+          <a:bodyPr wrap="none" rtlCol="0">
+            <a:spAutoFit/>
+          </a:bodyPr>
+          <a:lstStyle/>
+          <a:p>
+            <a:r>
+              <a:rPr lang="fr-FR" sz="2400" b="1" u="sng" dirty="0">
+                <a:latin typeface="Aptos Display" panose="020B0004020202020204" pitchFamily="34" charset="0"/>
+              </a:rPr>
+              <a:t>Connexion</a:t>
+            </a:r>
+            <a:r>
+              <a:rPr lang="fr-FR" sz="2400" u="sng" dirty="0">
+                <a:latin typeface="Aptos Display" panose="020B0004020202020204" pitchFamily="34" charset="0"/>
+              </a:rPr>
+              <a:t> :</a:t>
+            </a:r>
+          </a:p>
+          <a:p>
+            <a:pPr marL="285750" indent="-285750">
+              <a:buFont typeface="Arial" panose="020B0604020202020204" pitchFamily="34" charset="0"/>
+              <a:buChar char="•"/>
+            </a:pPr>
+            <a:r>
+              <a:rPr lang="fr-FR" sz="2400" dirty="0">
+                <a:latin typeface="Aptos Display" panose="020B0004020202020204" pitchFamily="34" charset="0"/>
+              </a:rPr>
+              <a:t>Nom d’utilisateur</a:t>
+            </a:r>
+          </a:p>
+          <a:p>
+            <a:pPr marL="285750" indent="-285750">
+              <a:buFont typeface="Arial" panose="020B0604020202020204" pitchFamily="34" charset="0"/>
+              <a:buChar char="•"/>
+            </a:pPr>
+            <a:r>
+              <a:rPr lang="fr-FR" sz="2400" dirty="0">
+                <a:latin typeface="Aptos Display" panose="020B0004020202020204" pitchFamily="34" charset="0"/>
+              </a:rPr>
+              <a:t>Mot de passe </a:t>
+            </a:r>
+          </a:p>
+        </p:txBody>
+      </p:sp>
+      <p:pic>
+        <p:nvPicPr>
+          <p:cNvPr id="10" name="Image 9">
+            <a:extLst>
+              <a:ext uri="{FF2B5EF4-FFF2-40B4-BE49-F238E27FC236}">
+                <a16:creationId xmlns:a16="http://schemas.microsoft.com/office/drawing/2014/main" id="{49549AC7-6C61-671C-8646-EE4387E4BA3F}"/>
+              </a:ext>
+            </a:extLst>
+          </p:cNvPr>
+          <p:cNvPicPr>
+            <a:picLocks noChangeAspect="1"/>
+          </p:cNvPicPr>
+          <p:nvPr/>
+        </p:nvPicPr>
+        <p:blipFill>
+          <a:blip r:embed="rId2"/>
+          <a:stretch>
+            <a:fillRect/>
+          </a:stretch>
+        </p:blipFill>
+        <p:spPr>
+          <a:xfrm>
+            <a:off x="952192" y="3218508"/>
+            <a:ext cx="3147860" cy="3215949"/>
+          </a:xfrm>
+          <a:prstGeom prst="rect">
+            <a:avLst/>
+          </a:prstGeom>
+        </p:spPr>
+      </p:pic>
+      <p:sp>
+        <p:nvSpPr>
+          <p:cNvPr id="7" name="ZoneTexte 6">
+            <a:extLst>
+              <a:ext uri="{FF2B5EF4-FFF2-40B4-BE49-F238E27FC236}">
+                <a16:creationId xmlns:a16="http://schemas.microsoft.com/office/drawing/2014/main" id="{C70410CA-2EDE-6F52-9FE0-A43D0E398AEE}"/>
+              </a:ext>
+            </a:extLst>
+          </p:cNvPr>
+          <p:cNvSpPr txBox="1"/>
+          <p:nvPr/>
+        </p:nvSpPr>
+        <p:spPr>
+          <a:xfrm>
+            <a:off x="4407108" y="2438311"/>
+            <a:ext cx="3477768" cy="3416320"/>
+          </a:xfrm>
+          <a:prstGeom prst="rect">
+            <a:avLst/>
+          </a:prstGeom>
+          <a:noFill/>
+        </p:spPr>
+        <p:txBody>
+          <a:bodyPr wrap="square" rtlCol="0">
+            <a:spAutoFit/>
+          </a:bodyPr>
+          <a:lstStyle/>
+          <a:p>
+            <a:r>
+              <a:rPr lang="fr-FR" sz="2400" b="1" u="sng" dirty="0">
+                <a:latin typeface="Aptos Display" panose="020B0004020202020204" pitchFamily="34" charset="0"/>
+              </a:rPr>
+              <a:t>Inscription</a:t>
+            </a:r>
+            <a:r>
+              <a:rPr lang="fr-FR" sz="2400" u="sng" dirty="0">
+                <a:latin typeface="Aptos Display" panose="020B0004020202020204" pitchFamily="34" charset="0"/>
+              </a:rPr>
+              <a:t> :</a:t>
+            </a:r>
+          </a:p>
+          <a:p>
+            <a:r>
+              <a:rPr lang="fr-FR" sz="2400" dirty="0">
+                <a:latin typeface="Aptos" panose="020B0004020202020204" pitchFamily="34" charset="0"/>
+              </a:rPr>
+              <a:t>Restriction sur les mots de passe : </a:t>
+            </a:r>
+          </a:p>
+          <a:p>
+            <a:r>
+              <a:rPr lang="fr-FR" sz="2400" dirty="0">
+                <a:latin typeface="Aptos" panose="020B0004020202020204" pitchFamily="34" charset="0"/>
+              </a:rPr>
+              <a:t>• 8 caractères minimum </a:t>
+            </a:r>
+          </a:p>
+          <a:p>
+            <a:r>
+              <a:rPr lang="fr-FR" sz="2400" dirty="0">
+                <a:latin typeface="Aptos" panose="020B0004020202020204" pitchFamily="34" charset="0"/>
+              </a:rPr>
+              <a:t>• Une majuscule </a:t>
+            </a:r>
+          </a:p>
+          <a:p>
+            <a:r>
+              <a:rPr lang="fr-FR" sz="2400" dirty="0">
+                <a:latin typeface="Aptos" panose="020B0004020202020204" pitchFamily="34" charset="0"/>
+              </a:rPr>
+              <a:t>• Une minuscule </a:t>
+            </a:r>
+          </a:p>
+          <a:p>
+            <a:r>
+              <a:rPr lang="fr-FR" sz="2400" dirty="0">
+                <a:latin typeface="Aptos" panose="020B0004020202020204" pitchFamily="34" charset="0"/>
+              </a:rPr>
+              <a:t>• Un chiffre </a:t>
+            </a:r>
+          </a:p>
+          <a:p>
+            <a:r>
+              <a:rPr lang="fr-FR" sz="2400" dirty="0">
+                <a:latin typeface="Aptos" panose="020B0004020202020204" pitchFamily="34" charset="0"/>
+              </a:rPr>
+              <a:t>• Un caractère spécial (@, ?, %, !, …)</a:t>
+            </a:r>
+            <a:endParaRPr lang="fr-FR" sz="2400" u="sng" dirty="0">
+              <a:latin typeface="Aptos" panose="020B0004020202020204" pitchFamily="34" charset="0"/>
+            </a:endParaRPr>
+          </a:p>
+        </p:txBody>
+      </p:sp>
+      <p:pic>
+        <p:nvPicPr>
+          <p:cNvPr id="8" name="Image 7">
+            <a:extLst>
+              <a:ext uri="{FF2B5EF4-FFF2-40B4-BE49-F238E27FC236}">
+                <a16:creationId xmlns:a16="http://schemas.microsoft.com/office/drawing/2014/main" id="{7044476A-A6F8-600B-FCD7-1F2F0AB475CC}"/>
+              </a:ext>
+            </a:extLst>
+          </p:cNvPr>
+          <p:cNvPicPr>
+            <a:picLocks noChangeAspect="1"/>
+          </p:cNvPicPr>
+          <p:nvPr/>
+        </p:nvPicPr>
+        <p:blipFill>
+          <a:blip r:embed="rId3"/>
+          <a:stretch>
+            <a:fillRect/>
+          </a:stretch>
+        </p:blipFill>
+        <p:spPr>
+          <a:xfrm>
+            <a:off x="8162379" y="1897624"/>
+            <a:ext cx="3321696" cy="4720304"/>
+          </a:xfrm>
+          <a:prstGeom prst="rect">
+            <a:avLst/>
+          </a:prstGeom>
+        </p:spPr>
+      </p:pic>
+    </p:spTree>
+    <p:extLst>
+      <p:ext uri="{BB962C8B-B14F-4D97-AF65-F5344CB8AC3E}">
+        <p14:creationId xmlns:p14="http://schemas.microsoft.com/office/powerpoint/2010/main" val="243014035"/>
       </p:ext>
     </p:extLst>
   </p:cSld>
